--- a/slides/CSC336-Lecture-22-Database-Connectivity.pptx
+++ b/slides/CSC336-Lecture-22-Database-Connectivity.pptx
@@ -3637,79 +3637,44 @@
       </p:sp>
       <p:sp>
         <p:nvSpPr>
-          <p:cNvPr id="6" name="Text 4"/>
-          <p:cNvSpPr txBox="1"/>
-          <p:nvPr/>
-        </p:nvSpPr>
-        <p:spPr>
-          <a:xfrm>
-            <a:off x="640080" y="6446520"/>
-            <a:ext cx="8686800" cy="292608"/>
-          </a:xfrm>
-          <a:prstGeom prst="rect">
-            <a:avLst/>
-          </a:prstGeom>
-          <a:noFill/>
-          <a:ln/>
-        </p:spPr>
-        <p:txBody>
-          <a:bodyPr wrap="square" lIns="0" tIns="0" rIns="0" bIns="0" rtlCol="0" anchor="ctr"/>
-          <a:lstStyle/>
-          <a:p>
-            <a:pPr algn="l" indent="0" marL="0">
-              <a:buNone/>
-            </a:pPr>
-            <a:r>
-              <a:rPr lang="en-US" sz="900" dirty="0">
-                <a:solidFill>
-                  <a:srgbClr val="9AA3D8"/>
-                </a:solidFill>
-                <a:latin typeface="Calibri" pitchFamily="34" charset="0"/>
-                <a:ea typeface="Calibri" pitchFamily="34" charset="-122"/>
-                <a:cs typeface="Calibri" pitchFamily="34" charset="-120"/>
-              </a:rPr>
-              <a:t>Usman Akram  •  COMSATS University Islamabad</a:t>
-            </a:r>
-            <a:endParaRPr lang="en-US" sz="900" dirty="0"/>
-          </a:p>
-        </p:txBody>
-      </p:sp>
-      <p:sp>
-        <p:nvSpPr>
-          <p:cNvPr id="7" name="Text 5"/>
-          <p:cNvSpPr txBox="1"/>
-          <p:nvPr/>
-        </p:nvSpPr>
-        <p:spPr>
-          <a:xfrm>
-            <a:off x="11155680" y="6446520"/>
-            <a:ext cx="457200" cy="292608"/>
-          </a:xfrm>
-          <a:prstGeom prst="rect">
-            <a:avLst/>
-          </a:prstGeom>
-          <a:noFill/>
-          <a:ln/>
-        </p:spPr>
-        <p:txBody>
-          <a:bodyPr wrap="square" lIns="0" tIns="0" rIns="0" bIns="0" rtlCol="0" anchor="ctr"/>
-          <a:lstStyle/>
-          <a:p>
-            <a:pPr algn="r" indent="0" marL="0">
-              <a:buNone/>
-            </a:pPr>
-            <a:r>
-              <a:rPr lang="en-US" sz="900" dirty="0">
-                <a:solidFill>
-                  <a:srgbClr val="9AA3D8"/>
-                </a:solidFill>
-                <a:latin typeface="Calibri" pitchFamily="34" charset="0"/>
-                <a:ea typeface="Calibri" pitchFamily="34" charset="-122"/>
-                <a:cs typeface="Calibri" pitchFamily="34" charset="-120"/>
-              </a:rPr>
-              <a:t>1</a:t>
-            </a:r>
-            <a:endParaRPr lang="en-US" sz="900" dirty="0"/>
+          <p:cNvPr id="8" name="cuinotes-footer-mark"/>
+          <p:cNvSpPr txBox="1"/>
+          <p:nvPr/>
+        </p:nvSpPr>
+        <p:spPr>
+          <a:xfrm>
+            <a:off x="9951720" y="6455664"/>
+            <a:ext cx="2011680" cy="292608"/>
+          </a:xfrm>
+          <a:prstGeom prst="rect">
+            <a:avLst/>
+          </a:prstGeom>
+          <a:noFill/>
+        </p:spPr>
+        <p:txBody>
+          <a:bodyPr wrap="none" lIns="0" rIns="0" tIns="0" bIns="0">
+            <a:spAutoFit/>
+          </a:bodyPr>
+          <a:lstStyle/>
+          <a:p>
+            <a:pPr algn="r"/>
+            <a:r>
+              <a:rPr sz="1000">
+                <a:solidFill>
+                  <a:srgbClr val="8A939B"/>
+                </a:solidFill>
+                <a:hlinkClick r:id="rId3"/>
+              </a:rPr>
+              <a:t>cuinotes.com</a:t>
+            </a:r>
+            <a:r>
+              <a:rPr sz="1000">
+                <a:solidFill>
+                  <a:srgbClr val="8A939B"/>
+                </a:solidFill>
+              </a:rPr>
+              <a:t>  ·  1</a:t>
+            </a:r>
           </a:p>
         </p:txBody>
       </p:sp>
@@ -3849,6 +3814,10 @@
             <a:prstDash val="solid"/>
           </a:ln>
         </p:spPr>
+        <p:txBody>
+          <a:bodyPr/>
+          <a:p/>
+        </p:txBody>
       </p:sp>
       <p:sp>
         <p:nvSpPr>
@@ -3930,79 +3899,44 @@
       </p:sp>
       <p:sp>
         <p:nvSpPr>
-          <p:cNvPr id="7" name="Text 5"/>
-          <p:cNvSpPr txBox="1"/>
-          <p:nvPr/>
-        </p:nvSpPr>
-        <p:spPr>
-          <a:xfrm>
-            <a:off x="640080" y="6446520"/>
-            <a:ext cx="8686800" cy="292608"/>
-          </a:xfrm>
-          <a:prstGeom prst="rect">
-            <a:avLst/>
-          </a:prstGeom>
-          <a:noFill/>
-          <a:ln/>
-        </p:spPr>
-        <p:txBody>
-          <a:bodyPr wrap="square" lIns="0" tIns="0" rIns="0" bIns="0" rtlCol="0" anchor="ctr"/>
-          <a:lstStyle/>
-          <a:p>
-            <a:pPr algn="l" indent="0" marL="0">
-              <a:buNone/>
-            </a:pPr>
-            <a:r>
-              <a:rPr lang="en-US" sz="900" dirty="0">
-                <a:solidFill>
-                  <a:srgbClr val="5D5D72"/>
-                </a:solidFill>
-                <a:latin typeface="Calibri" pitchFamily="34" charset="0"/>
-                <a:ea typeface="Calibri" pitchFamily="34" charset="-122"/>
-                <a:cs typeface="Calibri" pitchFamily="34" charset="-120"/>
-              </a:rPr>
-              <a:t>Usman Akram  •  COMSATS University Islamabad</a:t>
-            </a:r>
-            <a:endParaRPr lang="en-US" sz="900" dirty="0"/>
-          </a:p>
-        </p:txBody>
-      </p:sp>
-      <p:sp>
-        <p:nvSpPr>
-          <p:cNvPr id="8" name="Text 6"/>
-          <p:cNvSpPr txBox="1"/>
-          <p:nvPr/>
-        </p:nvSpPr>
-        <p:spPr>
-          <a:xfrm>
-            <a:off x="11155680" y="6446520"/>
-            <a:ext cx="457200" cy="292608"/>
-          </a:xfrm>
-          <a:prstGeom prst="rect">
-            <a:avLst/>
-          </a:prstGeom>
-          <a:noFill/>
-          <a:ln/>
-        </p:spPr>
-        <p:txBody>
-          <a:bodyPr wrap="square" lIns="0" tIns="0" rIns="0" bIns="0" rtlCol="0" anchor="ctr"/>
-          <a:lstStyle/>
-          <a:p>
-            <a:pPr algn="r" indent="0" marL="0">
-              <a:buNone/>
-            </a:pPr>
-            <a:r>
-              <a:rPr lang="en-US" sz="900" dirty="0">
-                <a:solidFill>
-                  <a:srgbClr val="5D5D72"/>
-                </a:solidFill>
-                <a:latin typeface="Calibri" pitchFamily="34" charset="0"/>
-                <a:ea typeface="Calibri" pitchFamily="34" charset="-122"/>
-                <a:cs typeface="Calibri" pitchFamily="34" charset="-120"/>
-              </a:rPr>
-              <a:t>10</a:t>
-            </a:r>
-            <a:endParaRPr lang="en-US" sz="900" dirty="0"/>
+          <p:cNvPr id="9" name="cuinotes-footer-mark"/>
+          <p:cNvSpPr txBox="1"/>
+          <p:nvPr/>
+        </p:nvSpPr>
+        <p:spPr>
+          <a:xfrm>
+            <a:off x="9951720" y="6455664"/>
+            <a:ext cx="2011680" cy="292608"/>
+          </a:xfrm>
+          <a:prstGeom prst="rect">
+            <a:avLst/>
+          </a:prstGeom>
+          <a:noFill/>
+        </p:spPr>
+        <p:txBody>
+          <a:bodyPr wrap="none" lIns="0" rIns="0" tIns="0" bIns="0">
+            <a:spAutoFit/>
+          </a:bodyPr>
+          <a:lstStyle/>
+          <a:p>
+            <a:pPr algn="r"/>
+            <a:r>
+              <a:rPr sz="1000">
+                <a:solidFill>
+                  <a:srgbClr val="8A939B"/>
+                </a:solidFill>
+                <a:hlinkClick r:id="rId3"/>
+              </a:rPr>
+              <a:t>cuinotes.com</a:t>
+            </a:r>
+            <a:r>
+              <a:rPr sz="1000">
+                <a:solidFill>
+                  <a:srgbClr val="8A939B"/>
+                </a:solidFill>
+              </a:rPr>
+              <a:t>  ·  10</a:t>
+            </a:r>
           </a:p>
         </p:txBody>
       </p:sp>
@@ -4135,6 +4069,10 @@
           </a:solidFill>
           <a:ln/>
         </p:spPr>
+        <p:txBody>
+          <a:bodyPr/>
+          <a:p/>
+        </p:txBody>
       </p:sp>
       <p:sp>
         <p:nvSpPr>
@@ -4233,6 +4171,10 @@
           </a:solidFill>
           <a:ln/>
         </p:spPr>
+        <p:txBody>
+          <a:bodyPr/>
+          <a:p/>
+        </p:txBody>
       </p:sp>
       <p:sp>
         <p:nvSpPr>
@@ -4331,6 +4273,10 @@
           </a:solidFill>
           <a:ln/>
         </p:spPr>
+        <p:txBody>
+          <a:bodyPr/>
+          <a:p/>
+        </p:txBody>
       </p:sp>
       <p:sp>
         <p:nvSpPr>
@@ -4412,79 +4358,44 @@
       </p:sp>
       <p:sp>
         <p:nvSpPr>
-          <p:cNvPr id="13" name="Text 11"/>
-          <p:cNvSpPr txBox="1"/>
-          <p:nvPr/>
-        </p:nvSpPr>
-        <p:spPr>
-          <a:xfrm>
-            <a:off x="640080" y="6446520"/>
-            <a:ext cx="8686800" cy="292608"/>
-          </a:xfrm>
-          <a:prstGeom prst="rect">
-            <a:avLst/>
-          </a:prstGeom>
-          <a:noFill/>
-          <a:ln/>
-        </p:spPr>
-        <p:txBody>
-          <a:bodyPr wrap="square" lIns="0" tIns="0" rIns="0" bIns="0" rtlCol="0" anchor="ctr"/>
-          <a:lstStyle/>
-          <a:p>
-            <a:pPr algn="l" indent="0" marL="0">
-              <a:buNone/>
-            </a:pPr>
-            <a:r>
-              <a:rPr lang="en-US" sz="900" dirty="0">
-                <a:solidFill>
-                  <a:srgbClr val="5D5D72"/>
-                </a:solidFill>
-                <a:latin typeface="Calibri" pitchFamily="34" charset="0"/>
-                <a:ea typeface="Calibri" pitchFamily="34" charset="-122"/>
-                <a:cs typeface="Calibri" pitchFamily="34" charset="-120"/>
-              </a:rPr>
-              <a:t>Usman Akram  •  COMSATS University Islamabad</a:t>
-            </a:r>
-            <a:endParaRPr lang="en-US" sz="900" dirty="0"/>
-          </a:p>
-        </p:txBody>
-      </p:sp>
-      <p:sp>
-        <p:nvSpPr>
-          <p:cNvPr id="14" name="Text 12"/>
-          <p:cNvSpPr txBox="1"/>
-          <p:nvPr/>
-        </p:nvSpPr>
-        <p:spPr>
-          <a:xfrm>
-            <a:off x="11155680" y="6446520"/>
-            <a:ext cx="457200" cy="292608"/>
-          </a:xfrm>
-          <a:prstGeom prst="rect">
-            <a:avLst/>
-          </a:prstGeom>
-          <a:noFill/>
-          <a:ln/>
-        </p:spPr>
-        <p:txBody>
-          <a:bodyPr wrap="square" lIns="0" tIns="0" rIns="0" bIns="0" rtlCol="0" anchor="ctr"/>
-          <a:lstStyle/>
-          <a:p>
-            <a:pPr algn="r" indent="0" marL="0">
-              <a:buNone/>
-            </a:pPr>
-            <a:r>
-              <a:rPr lang="en-US" sz="900" dirty="0">
-                <a:solidFill>
-                  <a:srgbClr val="5D5D72"/>
-                </a:solidFill>
-                <a:latin typeface="Calibri" pitchFamily="34" charset="0"/>
-                <a:ea typeface="Calibri" pitchFamily="34" charset="-122"/>
-                <a:cs typeface="Calibri" pitchFamily="34" charset="-120"/>
-              </a:rPr>
-              <a:t>11</a:t>
-            </a:r>
-            <a:endParaRPr lang="en-US" sz="900" dirty="0"/>
+          <p:cNvPr id="15" name="cuinotes-footer-mark"/>
+          <p:cNvSpPr txBox="1"/>
+          <p:nvPr/>
+        </p:nvSpPr>
+        <p:spPr>
+          <a:xfrm>
+            <a:off x="9951720" y="6455664"/>
+            <a:ext cx="2011680" cy="292608"/>
+          </a:xfrm>
+          <a:prstGeom prst="rect">
+            <a:avLst/>
+          </a:prstGeom>
+          <a:noFill/>
+        </p:spPr>
+        <p:txBody>
+          <a:bodyPr wrap="none" lIns="0" rIns="0" tIns="0" bIns="0">
+            <a:spAutoFit/>
+          </a:bodyPr>
+          <a:lstStyle/>
+          <a:p>
+            <a:pPr algn="r"/>
+            <a:r>
+              <a:rPr sz="1000">
+                <a:solidFill>
+                  <a:srgbClr val="8A939B"/>
+                </a:solidFill>
+                <a:hlinkClick r:id="rId3"/>
+              </a:rPr>
+              <a:t>cuinotes.com</a:t>
+            </a:r>
+            <a:r>
+              <a:rPr sz="1000">
+                <a:solidFill>
+                  <a:srgbClr val="8A939B"/>
+                </a:solidFill>
+              </a:rPr>
+              <a:t>  ·  11</a:t>
+            </a:r>
           </a:p>
         </p:txBody>
       </p:sp>
@@ -4619,6 +4530,10 @@
           </a:solidFill>
           <a:ln/>
         </p:spPr>
+        <p:txBody>
+          <a:bodyPr/>
+          <a:p/>
+        </p:txBody>
       </p:sp>
       <p:sp>
         <p:nvSpPr>
@@ -4693,79 +4608,44 @@
       </p:sp>
       <p:sp>
         <p:nvSpPr>
-          <p:cNvPr id="6" name="Text 4"/>
-          <p:cNvSpPr txBox="1"/>
-          <p:nvPr/>
-        </p:nvSpPr>
-        <p:spPr>
-          <a:xfrm>
-            <a:off x="640080" y="6446520"/>
-            <a:ext cx="8686800" cy="292608"/>
-          </a:xfrm>
-          <a:prstGeom prst="rect">
-            <a:avLst/>
-          </a:prstGeom>
-          <a:noFill/>
-          <a:ln/>
-        </p:spPr>
-        <p:txBody>
-          <a:bodyPr wrap="square" lIns="0" tIns="0" rIns="0" bIns="0" rtlCol="0" anchor="ctr"/>
-          <a:lstStyle/>
-          <a:p>
-            <a:pPr algn="l" indent="0" marL="0">
-              <a:buNone/>
-            </a:pPr>
-            <a:r>
-              <a:rPr lang="en-US" sz="900" dirty="0">
-                <a:solidFill>
-                  <a:srgbClr val="5D5D72"/>
-                </a:solidFill>
-                <a:latin typeface="Calibri" pitchFamily="34" charset="0"/>
-                <a:ea typeface="Calibri" pitchFamily="34" charset="-122"/>
-                <a:cs typeface="Calibri" pitchFamily="34" charset="-120"/>
-              </a:rPr>
-              <a:t>Usman Akram  •  COMSATS University Islamabad</a:t>
-            </a:r>
-            <a:endParaRPr lang="en-US" sz="900" dirty="0"/>
-          </a:p>
-        </p:txBody>
-      </p:sp>
-      <p:sp>
-        <p:nvSpPr>
-          <p:cNvPr id="7" name="Text 5"/>
-          <p:cNvSpPr txBox="1"/>
-          <p:nvPr/>
-        </p:nvSpPr>
-        <p:spPr>
-          <a:xfrm>
-            <a:off x="11155680" y="6446520"/>
-            <a:ext cx="457200" cy="292608"/>
-          </a:xfrm>
-          <a:prstGeom prst="rect">
-            <a:avLst/>
-          </a:prstGeom>
-          <a:noFill/>
-          <a:ln/>
-        </p:spPr>
-        <p:txBody>
-          <a:bodyPr wrap="square" lIns="0" tIns="0" rIns="0" bIns="0" rtlCol="0" anchor="ctr"/>
-          <a:lstStyle/>
-          <a:p>
-            <a:pPr algn="r" indent="0" marL="0">
-              <a:buNone/>
-            </a:pPr>
-            <a:r>
-              <a:rPr lang="en-US" sz="900" dirty="0">
-                <a:solidFill>
-                  <a:srgbClr val="5D5D72"/>
-                </a:solidFill>
-                <a:latin typeface="Calibri" pitchFamily="34" charset="0"/>
-                <a:ea typeface="Calibri" pitchFamily="34" charset="-122"/>
-                <a:cs typeface="Calibri" pitchFamily="34" charset="-120"/>
-              </a:rPr>
-              <a:t>12</a:t>
-            </a:r>
-            <a:endParaRPr lang="en-US" sz="900" dirty="0"/>
+          <p:cNvPr id="8" name="cuinotes-footer-mark"/>
+          <p:cNvSpPr txBox="1"/>
+          <p:nvPr/>
+        </p:nvSpPr>
+        <p:spPr>
+          <a:xfrm>
+            <a:off x="9951720" y="6455664"/>
+            <a:ext cx="2011680" cy="292608"/>
+          </a:xfrm>
+          <a:prstGeom prst="rect">
+            <a:avLst/>
+          </a:prstGeom>
+          <a:noFill/>
+        </p:spPr>
+        <p:txBody>
+          <a:bodyPr wrap="none" lIns="0" rIns="0" tIns="0" bIns="0">
+            <a:spAutoFit/>
+          </a:bodyPr>
+          <a:lstStyle/>
+          <a:p>
+            <a:pPr algn="r"/>
+            <a:r>
+              <a:rPr sz="1000">
+                <a:solidFill>
+                  <a:srgbClr val="8A939B"/>
+                </a:solidFill>
+                <a:hlinkClick r:id="rId3"/>
+              </a:rPr>
+              <a:t>cuinotes.com</a:t>
+            </a:r>
+            <a:r>
+              <a:rPr sz="1000">
+                <a:solidFill>
+                  <a:srgbClr val="8A939B"/>
+                </a:solidFill>
+              </a:rPr>
+              <a:t>  ·  12</a:t>
+            </a:r>
           </a:p>
         </p:txBody>
       </p:sp>
@@ -4905,6 +4785,10 @@
             <a:prstDash val="solid"/>
           </a:ln>
         </p:spPr>
+        <p:txBody>
+          <a:bodyPr/>
+          <a:p/>
+        </p:txBody>
       </p:sp>
       <p:sp>
         <p:nvSpPr>
@@ -4986,79 +4870,44 @@
       </p:sp>
       <p:sp>
         <p:nvSpPr>
-          <p:cNvPr id="7" name="Text 5"/>
-          <p:cNvSpPr txBox="1"/>
-          <p:nvPr/>
-        </p:nvSpPr>
-        <p:spPr>
-          <a:xfrm>
-            <a:off x="640080" y="6446520"/>
-            <a:ext cx="8686800" cy="292608"/>
-          </a:xfrm>
-          <a:prstGeom prst="rect">
-            <a:avLst/>
-          </a:prstGeom>
-          <a:noFill/>
-          <a:ln/>
-        </p:spPr>
-        <p:txBody>
-          <a:bodyPr wrap="square" lIns="0" tIns="0" rIns="0" bIns="0" rtlCol="0" anchor="ctr"/>
-          <a:lstStyle/>
-          <a:p>
-            <a:pPr algn="l" indent="0" marL="0">
-              <a:buNone/>
-            </a:pPr>
-            <a:r>
-              <a:rPr lang="en-US" sz="900" dirty="0">
-                <a:solidFill>
-                  <a:srgbClr val="5D5D72"/>
-                </a:solidFill>
-                <a:latin typeface="Calibri" pitchFamily="34" charset="0"/>
-                <a:ea typeface="Calibri" pitchFamily="34" charset="-122"/>
-                <a:cs typeface="Calibri" pitchFamily="34" charset="-120"/>
-              </a:rPr>
-              <a:t>Usman Akram  •  COMSATS University Islamabad</a:t>
-            </a:r>
-            <a:endParaRPr lang="en-US" sz="900" dirty="0"/>
-          </a:p>
-        </p:txBody>
-      </p:sp>
-      <p:sp>
-        <p:nvSpPr>
-          <p:cNvPr id="8" name="Text 6"/>
-          <p:cNvSpPr txBox="1"/>
-          <p:nvPr/>
-        </p:nvSpPr>
-        <p:spPr>
-          <a:xfrm>
-            <a:off x="11155680" y="6446520"/>
-            <a:ext cx="457200" cy="292608"/>
-          </a:xfrm>
-          <a:prstGeom prst="rect">
-            <a:avLst/>
-          </a:prstGeom>
-          <a:noFill/>
-          <a:ln/>
-        </p:spPr>
-        <p:txBody>
-          <a:bodyPr wrap="square" lIns="0" tIns="0" rIns="0" bIns="0" rtlCol="0" anchor="ctr"/>
-          <a:lstStyle/>
-          <a:p>
-            <a:pPr algn="r" indent="0" marL="0">
-              <a:buNone/>
-            </a:pPr>
-            <a:r>
-              <a:rPr lang="en-US" sz="900" dirty="0">
-                <a:solidFill>
-                  <a:srgbClr val="5D5D72"/>
-                </a:solidFill>
-                <a:latin typeface="Calibri" pitchFamily="34" charset="0"/>
-                <a:ea typeface="Calibri" pitchFamily="34" charset="-122"/>
-                <a:cs typeface="Calibri" pitchFamily="34" charset="-120"/>
-              </a:rPr>
-              <a:t>13</a:t>
-            </a:r>
-            <a:endParaRPr lang="en-US" sz="900" dirty="0"/>
+          <p:cNvPr id="9" name="cuinotes-footer-mark"/>
+          <p:cNvSpPr txBox="1"/>
+          <p:nvPr/>
+        </p:nvSpPr>
+        <p:spPr>
+          <a:xfrm>
+            <a:off x="9951720" y="6455664"/>
+            <a:ext cx="2011680" cy="292608"/>
+          </a:xfrm>
+          <a:prstGeom prst="rect">
+            <a:avLst/>
+          </a:prstGeom>
+          <a:noFill/>
+        </p:spPr>
+        <p:txBody>
+          <a:bodyPr wrap="none" lIns="0" rIns="0" tIns="0" bIns="0">
+            <a:spAutoFit/>
+          </a:bodyPr>
+          <a:lstStyle/>
+          <a:p>
+            <a:pPr algn="r"/>
+            <a:r>
+              <a:rPr sz="1000">
+                <a:solidFill>
+                  <a:srgbClr val="8A939B"/>
+                </a:solidFill>
+                <a:hlinkClick r:id="rId3"/>
+              </a:rPr>
+              <a:t>cuinotes.com</a:t>
+            </a:r>
+            <a:r>
+              <a:rPr sz="1000">
+                <a:solidFill>
+                  <a:srgbClr val="8A939B"/>
+                </a:solidFill>
+              </a:rPr>
+              <a:t>  ·  13</a:t>
+            </a:r>
           </a:p>
         </p:txBody>
       </p:sp>
@@ -5193,6 +5042,10 @@
           </a:solidFill>
           <a:ln/>
         </p:spPr>
+        <p:txBody>
+          <a:bodyPr/>
+          <a:p/>
+        </p:txBody>
       </p:sp>
       <p:sp>
         <p:nvSpPr>
@@ -5298,79 +5151,44 @@
       </p:sp>
       <p:sp>
         <p:nvSpPr>
-          <p:cNvPr id="6" name="Text 4"/>
-          <p:cNvSpPr txBox="1"/>
-          <p:nvPr/>
-        </p:nvSpPr>
-        <p:spPr>
-          <a:xfrm>
-            <a:off x="640080" y="6446520"/>
-            <a:ext cx="8686800" cy="292608"/>
-          </a:xfrm>
-          <a:prstGeom prst="rect">
-            <a:avLst/>
-          </a:prstGeom>
-          <a:noFill/>
-          <a:ln/>
-        </p:spPr>
-        <p:txBody>
-          <a:bodyPr wrap="square" lIns="0" tIns="0" rIns="0" bIns="0" rtlCol="0" anchor="ctr"/>
-          <a:lstStyle/>
-          <a:p>
-            <a:pPr algn="l" indent="0" marL="0">
-              <a:buNone/>
-            </a:pPr>
-            <a:r>
-              <a:rPr lang="en-US" sz="900" dirty="0">
-                <a:solidFill>
-                  <a:srgbClr val="5D5D72"/>
-                </a:solidFill>
-                <a:latin typeface="Calibri" pitchFamily="34" charset="0"/>
-                <a:ea typeface="Calibri" pitchFamily="34" charset="-122"/>
-                <a:cs typeface="Calibri" pitchFamily="34" charset="-120"/>
-              </a:rPr>
-              <a:t>Usman Akram  •  COMSATS University Islamabad</a:t>
-            </a:r>
-            <a:endParaRPr lang="en-US" sz="900" dirty="0"/>
-          </a:p>
-        </p:txBody>
-      </p:sp>
-      <p:sp>
-        <p:nvSpPr>
-          <p:cNvPr id="7" name="Text 5"/>
-          <p:cNvSpPr txBox="1"/>
-          <p:nvPr/>
-        </p:nvSpPr>
-        <p:spPr>
-          <a:xfrm>
-            <a:off x="11155680" y="6446520"/>
-            <a:ext cx="457200" cy="292608"/>
-          </a:xfrm>
-          <a:prstGeom prst="rect">
-            <a:avLst/>
-          </a:prstGeom>
-          <a:noFill/>
-          <a:ln/>
-        </p:spPr>
-        <p:txBody>
-          <a:bodyPr wrap="square" lIns="0" tIns="0" rIns="0" bIns="0" rtlCol="0" anchor="ctr"/>
-          <a:lstStyle/>
-          <a:p>
-            <a:pPr algn="r" indent="0" marL="0">
-              <a:buNone/>
-            </a:pPr>
-            <a:r>
-              <a:rPr lang="en-US" sz="900" dirty="0">
-                <a:solidFill>
-                  <a:srgbClr val="5D5D72"/>
-                </a:solidFill>
-                <a:latin typeface="Calibri" pitchFamily="34" charset="0"/>
-                <a:ea typeface="Calibri" pitchFamily="34" charset="-122"/>
-                <a:cs typeface="Calibri" pitchFamily="34" charset="-120"/>
-              </a:rPr>
-              <a:t>14</a:t>
-            </a:r>
-            <a:endParaRPr lang="en-US" sz="900" dirty="0"/>
+          <p:cNvPr id="8" name="cuinotes-footer-mark"/>
+          <p:cNvSpPr txBox="1"/>
+          <p:nvPr/>
+        </p:nvSpPr>
+        <p:spPr>
+          <a:xfrm>
+            <a:off x="9951720" y="6455664"/>
+            <a:ext cx="2011680" cy="292608"/>
+          </a:xfrm>
+          <a:prstGeom prst="rect">
+            <a:avLst/>
+          </a:prstGeom>
+          <a:noFill/>
+        </p:spPr>
+        <p:txBody>
+          <a:bodyPr wrap="none" lIns="0" rIns="0" tIns="0" bIns="0">
+            <a:spAutoFit/>
+          </a:bodyPr>
+          <a:lstStyle/>
+          <a:p>
+            <a:pPr algn="r"/>
+            <a:r>
+              <a:rPr sz="1000">
+                <a:solidFill>
+                  <a:srgbClr val="8A939B"/>
+                </a:solidFill>
+                <a:hlinkClick r:id="rId3"/>
+              </a:rPr>
+              <a:t>cuinotes.com</a:t>
+            </a:r>
+            <a:r>
+              <a:rPr sz="1000">
+                <a:solidFill>
+                  <a:srgbClr val="8A939B"/>
+                </a:solidFill>
+              </a:rPr>
+              <a:t>  ·  14</a:t>
+            </a:r>
           </a:p>
         </p:txBody>
       </p:sp>
@@ -5505,6 +5323,10 @@
           </a:solidFill>
           <a:ln/>
         </p:spPr>
+        <p:txBody>
+          <a:bodyPr/>
+          <a:p/>
+        </p:txBody>
       </p:sp>
       <p:sp>
         <p:nvSpPr>
@@ -5638,79 +5460,44 @@
       </p:sp>
       <p:sp>
         <p:nvSpPr>
-          <p:cNvPr id="7" name="Text 5"/>
-          <p:cNvSpPr txBox="1"/>
-          <p:nvPr/>
-        </p:nvSpPr>
-        <p:spPr>
-          <a:xfrm>
-            <a:off x="640080" y="6446520"/>
-            <a:ext cx="8686800" cy="292608"/>
-          </a:xfrm>
-          <a:prstGeom prst="rect">
-            <a:avLst/>
-          </a:prstGeom>
-          <a:noFill/>
-          <a:ln/>
-        </p:spPr>
-        <p:txBody>
-          <a:bodyPr wrap="square" lIns="0" tIns="0" rIns="0" bIns="0" rtlCol="0" anchor="ctr"/>
-          <a:lstStyle/>
-          <a:p>
-            <a:pPr algn="l" indent="0" marL="0">
-              <a:buNone/>
-            </a:pPr>
-            <a:r>
-              <a:rPr lang="en-US" sz="900" dirty="0">
-                <a:solidFill>
-                  <a:srgbClr val="5D5D72"/>
-                </a:solidFill>
-                <a:latin typeface="Calibri" pitchFamily="34" charset="0"/>
-                <a:ea typeface="Calibri" pitchFamily="34" charset="-122"/>
-                <a:cs typeface="Calibri" pitchFamily="34" charset="-120"/>
-              </a:rPr>
-              <a:t>Usman Akram  •  COMSATS University Islamabad</a:t>
-            </a:r>
-            <a:endParaRPr lang="en-US" sz="900" dirty="0"/>
-          </a:p>
-        </p:txBody>
-      </p:sp>
-      <p:sp>
-        <p:nvSpPr>
-          <p:cNvPr id="8" name="Text 6"/>
-          <p:cNvSpPr txBox="1"/>
-          <p:nvPr/>
-        </p:nvSpPr>
-        <p:spPr>
-          <a:xfrm>
-            <a:off x="11155680" y="6446520"/>
-            <a:ext cx="457200" cy="292608"/>
-          </a:xfrm>
-          <a:prstGeom prst="rect">
-            <a:avLst/>
-          </a:prstGeom>
-          <a:noFill/>
-          <a:ln/>
-        </p:spPr>
-        <p:txBody>
-          <a:bodyPr wrap="square" lIns="0" tIns="0" rIns="0" bIns="0" rtlCol="0" anchor="ctr"/>
-          <a:lstStyle/>
-          <a:p>
-            <a:pPr algn="r" indent="0" marL="0">
-              <a:buNone/>
-            </a:pPr>
-            <a:r>
-              <a:rPr lang="en-US" sz="900" dirty="0">
-                <a:solidFill>
-                  <a:srgbClr val="5D5D72"/>
-                </a:solidFill>
-                <a:latin typeface="Calibri" pitchFamily="34" charset="0"/>
-                <a:ea typeface="Calibri" pitchFamily="34" charset="-122"/>
-                <a:cs typeface="Calibri" pitchFamily="34" charset="-120"/>
-              </a:rPr>
-              <a:t>15</a:t>
-            </a:r>
-            <a:endParaRPr lang="en-US" sz="900" dirty="0"/>
+          <p:cNvPr id="9" name="cuinotes-footer-mark"/>
+          <p:cNvSpPr txBox="1"/>
+          <p:nvPr/>
+        </p:nvSpPr>
+        <p:spPr>
+          <a:xfrm>
+            <a:off x="9951720" y="6455664"/>
+            <a:ext cx="2011680" cy="292608"/>
+          </a:xfrm>
+          <a:prstGeom prst="rect">
+            <a:avLst/>
+          </a:prstGeom>
+          <a:noFill/>
+        </p:spPr>
+        <p:txBody>
+          <a:bodyPr wrap="none" lIns="0" rIns="0" tIns="0" bIns="0">
+            <a:spAutoFit/>
+          </a:bodyPr>
+          <a:lstStyle/>
+          <a:p>
+            <a:pPr algn="r"/>
+            <a:r>
+              <a:rPr sz="1000">
+                <a:solidFill>
+                  <a:srgbClr val="8A939B"/>
+                </a:solidFill>
+                <a:hlinkClick r:id="rId3"/>
+              </a:rPr>
+              <a:t>cuinotes.com</a:t>
+            </a:r>
+            <a:r>
+              <a:rPr sz="1000">
+                <a:solidFill>
+                  <a:srgbClr val="8A939B"/>
+                </a:solidFill>
+              </a:rPr>
+              <a:t>  ·  15</a:t>
+            </a:r>
           </a:p>
         </p:txBody>
       </p:sp>
@@ -5845,6 +5632,10 @@
           </a:solidFill>
           <a:ln/>
         </p:spPr>
+        <p:txBody>
+          <a:bodyPr/>
+          <a:p/>
+        </p:txBody>
       </p:sp>
       <p:sp>
         <p:nvSpPr>
@@ -6097,79 +5888,44 @@
       </p:sp>
       <p:sp>
         <p:nvSpPr>
-          <p:cNvPr id="6" name="Text 4"/>
-          <p:cNvSpPr txBox="1"/>
-          <p:nvPr/>
-        </p:nvSpPr>
-        <p:spPr>
-          <a:xfrm>
-            <a:off x="640080" y="6446520"/>
-            <a:ext cx="8686800" cy="292608"/>
-          </a:xfrm>
-          <a:prstGeom prst="rect">
-            <a:avLst/>
-          </a:prstGeom>
-          <a:noFill/>
-          <a:ln/>
-        </p:spPr>
-        <p:txBody>
-          <a:bodyPr wrap="square" lIns="0" tIns="0" rIns="0" bIns="0" rtlCol="0" anchor="ctr"/>
-          <a:lstStyle/>
-          <a:p>
-            <a:pPr algn="l" indent="0" marL="0">
-              <a:buNone/>
-            </a:pPr>
-            <a:r>
-              <a:rPr lang="en-US" sz="900" dirty="0">
-                <a:solidFill>
-                  <a:srgbClr val="5D5D72"/>
-                </a:solidFill>
-                <a:latin typeface="Calibri" pitchFamily="34" charset="0"/>
-                <a:ea typeface="Calibri" pitchFamily="34" charset="-122"/>
-                <a:cs typeface="Calibri" pitchFamily="34" charset="-120"/>
-              </a:rPr>
-              <a:t>Usman Akram  •  COMSATS University Islamabad</a:t>
-            </a:r>
-            <a:endParaRPr lang="en-US" sz="900" dirty="0"/>
-          </a:p>
-        </p:txBody>
-      </p:sp>
-      <p:sp>
-        <p:nvSpPr>
-          <p:cNvPr id="7" name="Text 5"/>
-          <p:cNvSpPr txBox="1"/>
-          <p:nvPr/>
-        </p:nvSpPr>
-        <p:spPr>
-          <a:xfrm>
-            <a:off x="11155680" y="6446520"/>
-            <a:ext cx="457200" cy="292608"/>
-          </a:xfrm>
-          <a:prstGeom prst="rect">
-            <a:avLst/>
-          </a:prstGeom>
-          <a:noFill/>
-          <a:ln/>
-        </p:spPr>
-        <p:txBody>
-          <a:bodyPr wrap="square" lIns="0" tIns="0" rIns="0" bIns="0" rtlCol="0" anchor="ctr"/>
-          <a:lstStyle/>
-          <a:p>
-            <a:pPr algn="r" indent="0" marL="0">
-              <a:buNone/>
-            </a:pPr>
-            <a:r>
-              <a:rPr lang="en-US" sz="900" dirty="0">
-                <a:solidFill>
-                  <a:srgbClr val="5D5D72"/>
-                </a:solidFill>
-                <a:latin typeface="Calibri" pitchFamily="34" charset="0"/>
-                <a:ea typeface="Calibri" pitchFamily="34" charset="-122"/>
-                <a:cs typeface="Calibri" pitchFamily="34" charset="-120"/>
-              </a:rPr>
-              <a:t>16</a:t>
-            </a:r>
-            <a:endParaRPr lang="en-US" sz="900" dirty="0"/>
+          <p:cNvPr id="8" name="cuinotes-footer-mark"/>
+          <p:cNvSpPr txBox="1"/>
+          <p:nvPr/>
+        </p:nvSpPr>
+        <p:spPr>
+          <a:xfrm>
+            <a:off x="9951720" y="6455664"/>
+            <a:ext cx="2011680" cy="292608"/>
+          </a:xfrm>
+          <a:prstGeom prst="rect">
+            <a:avLst/>
+          </a:prstGeom>
+          <a:noFill/>
+        </p:spPr>
+        <p:txBody>
+          <a:bodyPr wrap="none" lIns="0" rIns="0" tIns="0" bIns="0">
+            <a:spAutoFit/>
+          </a:bodyPr>
+          <a:lstStyle/>
+          <a:p>
+            <a:pPr algn="r"/>
+            <a:r>
+              <a:rPr sz="1000">
+                <a:solidFill>
+                  <a:srgbClr val="8A939B"/>
+                </a:solidFill>
+                <a:hlinkClick r:id="rId3"/>
+              </a:rPr>
+              <a:t>cuinotes.com</a:t>
+            </a:r>
+            <a:r>
+              <a:rPr sz="1000">
+                <a:solidFill>
+                  <a:srgbClr val="8A939B"/>
+                </a:solidFill>
+              </a:rPr>
+              <a:t>  ·  16</a:t>
+            </a:r>
           </a:p>
         </p:txBody>
       </p:sp>
@@ -6304,6 +6060,10 @@
           </a:solidFill>
           <a:ln/>
         </p:spPr>
+        <p:txBody>
+          <a:bodyPr/>
+          <a:p/>
+        </p:txBody>
       </p:sp>
       <p:sp>
         <p:nvSpPr>
@@ -6586,79 +6346,44 @@
       </p:sp>
       <p:sp>
         <p:nvSpPr>
-          <p:cNvPr id="7" name="Text 5"/>
-          <p:cNvSpPr txBox="1"/>
-          <p:nvPr/>
-        </p:nvSpPr>
-        <p:spPr>
-          <a:xfrm>
-            <a:off x="640080" y="6446520"/>
-            <a:ext cx="8686800" cy="292608"/>
-          </a:xfrm>
-          <a:prstGeom prst="rect">
-            <a:avLst/>
-          </a:prstGeom>
-          <a:noFill/>
-          <a:ln/>
-        </p:spPr>
-        <p:txBody>
-          <a:bodyPr wrap="square" lIns="0" tIns="0" rIns="0" bIns="0" rtlCol="0" anchor="ctr"/>
-          <a:lstStyle/>
-          <a:p>
-            <a:pPr algn="l" indent="0" marL="0">
-              <a:buNone/>
-            </a:pPr>
-            <a:r>
-              <a:rPr lang="en-US" sz="900" dirty="0">
-                <a:solidFill>
-                  <a:srgbClr val="5D5D72"/>
-                </a:solidFill>
-                <a:latin typeface="Calibri" pitchFamily="34" charset="0"/>
-                <a:ea typeface="Calibri" pitchFamily="34" charset="-122"/>
-                <a:cs typeface="Calibri" pitchFamily="34" charset="-120"/>
-              </a:rPr>
-              <a:t>Usman Akram  •  COMSATS University Islamabad</a:t>
-            </a:r>
-            <a:endParaRPr lang="en-US" sz="900" dirty="0"/>
-          </a:p>
-        </p:txBody>
-      </p:sp>
-      <p:sp>
-        <p:nvSpPr>
-          <p:cNvPr id="8" name="Text 6"/>
-          <p:cNvSpPr txBox="1"/>
-          <p:nvPr/>
-        </p:nvSpPr>
-        <p:spPr>
-          <a:xfrm>
-            <a:off x="11155680" y="6446520"/>
-            <a:ext cx="457200" cy="292608"/>
-          </a:xfrm>
-          <a:prstGeom prst="rect">
-            <a:avLst/>
-          </a:prstGeom>
-          <a:noFill/>
-          <a:ln/>
-        </p:spPr>
-        <p:txBody>
-          <a:bodyPr wrap="square" lIns="0" tIns="0" rIns="0" bIns="0" rtlCol="0" anchor="ctr"/>
-          <a:lstStyle/>
-          <a:p>
-            <a:pPr algn="r" indent="0" marL="0">
-              <a:buNone/>
-            </a:pPr>
-            <a:r>
-              <a:rPr lang="en-US" sz="900" dirty="0">
-                <a:solidFill>
-                  <a:srgbClr val="5D5D72"/>
-                </a:solidFill>
-                <a:latin typeface="Calibri" pitchFamily="34" charset="0"/>
-                <a:ea typeface="Calibri" pitchFamily="34" charset="-122"/>
-                <a:cs typeface="Calibri" pitchFamily="34" charset="-120"/>
-              </a:rPr>
-              <a:t>17</a:t>
-            </a:r>
-            <a:endParaRPr lang="en-US" sz="900" dirty="0"/>
+          <p:cNvPr id="9" name="cuinotes-footer-mark"/>
+          <p:cNvSpPr txBox="1"/>
+          <p:nvPr/>
+        </p:nvSpPr>
+        <p:spPr>
+          <a:xfrm>
+            <a:off x="9951720" y="6455664"/>
+            <a:ext cx="2011680" cy="292608"/>
+          </a:xfrm>
+          <a:prstGeom prst="rect">
+            <a:avLst/>
+          </a:prstGeom>
+          <a:noFill/>
+        </p:spPr>
+        <p:txBody>
+          <a:bodyPr wrap="none" lIns="0" rIns="0" tIns="0" bIns="0">
+            <a:spAutoFit/>
+          </a:bodyPr>
+          <a:lstStyle/>
+          <a:p>
+            <a:pPr algn="r"/>
+            <a:r>
+              <a:rPr sz="1000">
+                <a:solidFill>
+                  <a:srgbClr val="8A939B"/>
+                </a:solidFill>
+                <a:hlinkClick r:id="rId3"/>
+              </a:rPr>
+              <a:t>cuinotes.com</a:t>
+            </a:r>
+            <a:r>
+              <a:rPr sz="1000">
+                <a:solidFill>
+                  <a:srgbClr val="8A939B"/>
+                </a:solidFill>
+              </a:rPr>
+              <a:t>  ·  17</a:t>
+            </a:r>
           </a:p>
         </p:txBody>
       </p:sp>
@@ -6798,6 +6523,10 @@
             <a:prstDash val="solid"/>
           </a:ln>
         </p:spPr>
+        <p:txBody>
+          <a:bodyPr/>
+          <a:p/>
+        </p:txBody>
       </p:sp>
       <p:sp>
         <p:nvSpPr>
@@ -6879,79 +6608,44 @@
       </p:sp>
       <p:sp>
         <p:nvSpPr>
-          <p:cNvPr id="7" name="Text 5"/>
-          <p:cNvSpPr txBox="1"/>
-          <p:nvPr/>
-        </p:nvSpPr>
-        <p:spPr>
-          <a:xfrm>
-            <a:off x="640080" y="6446520"/>
-            <a:ext cx="8686800" cy="292608"/>
-          </a:xfrm>
-          <a:prstGeom prst="rect">
-            <a:avLst/>
-          </a:prstGeom>
-          <a:noFill/>
-          <a:ln/>
-        </p:spPr>
-        <p:txBody>
-          <a:bodyPr wrap="square" lIns="0" tIns="0" rIns="0" bIns="0" rtlCol="0" anchor="ctr"/>
-          <a:lstStyle/>
-          <a:p>
-            <a:pPr algn="l" indent="0" marL="0">
-              <a:buNone/>
-            </a:pPr>
-            <a:r>
-              <a:rPr lang="en-US" sz="900" dirty="0">
-                <a:solidFill>
-                  <a:srgbClr val="5D5D72"/>
-                </a:solidFill>
-                <a:latin typeface="Calibri" pitchFamily="34" charset="0"/>
-                <a:ea typeface="Calibri" pitchFamily="34" charset="-122"/>
-                <a:cs typeface="Calibri" pitchFamily="34" charset="-120"/>
-              </a:rPr>
-              <a:t>Usman Akram  •  COMSATS University Islamabad</a:t>
-            </a:r>
-            <a:endParaRPr lang="en-US" sz="900" dirty="0"/>
-          </a:p>
-        </p:txBody>
-      </p:sp>
-      <p:sp>
-        <p:nvSpPr>
-          <p:cNvPr id="8" name="Text 6"/>
-          <p:cNvSpPr txBox="1"/>
-          <p:nvPr/>
-        </p:nvSpPr>
-        <p:spPr>
-          <a:xfrm>
-            <a:off x="11155680" y="6446520"/>
-            <a:ext cx="457200" cy="292608"/>
-          </a:xfrm>
-          <a:prstGeom prst="rect">
-            <a:avLst/>
-          </a:prstGeom>
-          <a:noFill/>
-          <a:ln/>
-        </p:spPr>
-        <p:txBody>
-          <a:bodyPr wrap="square" lIns="0" tIns="0" rIns="0" bIns="0" rtlCol="0" anchor="ctr"/>
-          <a:lstStyle/>
-          <a:p>
-            <a:pPr algn="r" indent="0" marL="0">
-              <a:buNone/>
-            </a:pPr>
-            <a:r>
-              <a:rPr lang="en-US" sz="900" dirty="0">
-                <a:solidFill>
-                  <a:srgbClr val="5D5D72"/>
-                </a:solidFill>
-                <a:latin typeface="Calibri" pitchFamily="34" charset="0"/>
-                <a:ea typeface="Calibri" pitchFamily="34" charset="-122"/>
-                <a:cs typeface="Calibri" pitchFamily="34" charset="-120"/>
-              </a:rPr>
-              <a:t>18</a:t>
-            </a:r>
-            <a:endParaRPr lang="en-US" sz="900" dirty="0"/>
+          <p:cNvPr id="9" name="cuinotes-footer-mark"/>
+          <p:cNvSpPr txBox="1"/>
+          <p:nvPr/>
+        </p:nvSpPr>
+        <p:spPr>
+          <a:xfrm>
+            <a:off x="9951720" y="6455664"/>
+            <a:ext cx="2011680" cy="292608"/>
+          </a:xfrm>
+          <a:prstGeom prst="rect">
+            <a:avLst/>
+          </a:prstGeom>
+          <a:noFill/>
+        </p:spPr>
+        <p:txBody>
+          <a:bodyPr wrap="none" lIns="0" rIns="0" tIns="0" bIns="0">
+            <a:spAutoFit/>
+          </a:bodyPr>
+          <a:lstStyle/>
+          <a:p>
+            <a:pPr algn="r"/>
+            <a:r>
+              <a:rPr sz="1000">
+                <a:solidFill>
+                  <a:srgbClr val="8A939B"/>
+                </a:solidFill>
+                <a:hlinkClick r:id="rId3"/>
+              </a:rPr>
+              <a:t>cuinotes.com</a:t>
+            </a:r>
+            <a:r>
+              <a:rPr sz="1000">
+                <a:solidFill>
+                  <a:srgbClr val="8A939B"/>
+                </a:solidFill>
+              </a:rPr>
+              <a:t>  ·  18</a:t>
+            </a:r>
           </a:p>
         </p:txBody>
       </p:sp>
@@ -7086,6 +6780,10 @@
           </a:solidFill>
           <a:ln/>
         </p:spPr>
+        <p:txBody>
+          <a:bodyPr/>
+          <a:p/>
+        </p:txBody>
       </p:sp>
       <p:sp>
         <p:nvSpPr>
@@ -7166,6 +6864,10 @@
             <a:tailEnd type="triangle"/>
           </a:ln>
         </p:spPr>
+        <p:txBody>
+          <a:bodyPr/>
+          <a:p/>
+        </p:txBody>
       </p:sp>
       <p:sp>
         <p:nvSpPr>
@@ -7188,6 +6890,10 @@
           </a:solidFill>
           <a:ln/>
         </p:spPr>
+        <p:txBody>
+          <a:bodyPr/>
+          <a:p/>
+        </p:txBody>
       </p:sp>
       <p:sp>
         <p:nvSpPr>
@@ -7268,6 +6974,10 @@
             <a:tailEnd type="triangle"/>
           </a:ln>
         </p:spPr>
+        <p:txBody>
+          <a:bodyPr/>
+          <a:p/>
+        </p:txBody>
       </p:sp>
       <p:sp>
         <p:nvSpPr>
@@ -7290,6 +7000,10 @@
           </a:solidFill>
           <a:ln/>
         </p:spPr>
+        <p:txBody>
+          <a:bodyPr/>
+          <a:p/>
+        </p:txBody>
       </p:sp>
       <p:sp>
         <p:nvSpPr>
@@ -7370,6 +7084,10 @@
             <a:tailEnd type="triangle"/>
           </a:ln>
         </p:spPr>
+        <p:txBody>
+          <a:bodyPr/>
+          <a:p/>
+        </p:txBody>
       </p:sp>
       <p:sp>
         <p:nvSpPr>
@@ -7392,6 +7110,10 @@
           </a:solidFill>
           <a:ln/>
         </p:spPr>
+        <p:txBody>
+          <a:bodyPr/>
+          <a:p/>
+        </p:txBody>
       </p:sp>
       <p:sp>
         <p:nvSpPr>
@@ -7472,6 +7194,10 @@
             <a:tailEnd type="triangle"/>
           </a:ln>
         </p:spPr>
+        <p:txBody>
+          <a:bodyPr/>
+          <a:p/>
+        </p:txBody>
       </p:sp>
       <p:sp>
         <p:nvSpPr>
@@ -7494,6 +7220,10 @@
           </a:solidFill>
           <a:ln/>
         </p:spPr>
+        <p:txBody>
+          <a:bodyPr/>
+          <a:p/>
+        </p:txBody>
       </p:sp>
       <p:sp>
         <p:nvSpPr>
@@ -7592,79 +7322,44 @@
       </p:sp>
       <p:sp>
         <p:nvSpPr>
-          <p:cNvPr id="19" name="Text 17"/>
-          <p:cNvSpPr txBox="1"/>
-          <p:nvPr/>
-        </p:nvSpPr>
-        <p:spPr>
-          <a:xfrm>
-            <a:off x="640080" y="6446520"/>
-            <a:ext cx="8686800" cy="292608"/>
-          </a:xfrm>
-          <a:prstGeom prst="rect">
-            <a:avLst/>
-          </a:prstGeom>
-          <a:noFill/>
-          <a:ln/>
-        </p:spPr>
-        <p:txBody>
-          <a:bodyPr wrap="square" lIns="0" tIns="0" rIns="0" bIns="0" rtlCol="0" anchor="ctr"/>
-          <a:lstStyle/>
-          <a:p>
-            <a:pPr algn="l" indent="0" marL="0">
-              <a:buNone/>
-            </a:pPr>
-            <a:r>
-              <a:rPr lang="en-US" sz="900" dirty="0">
-                <a:solidFill>
-                  <a:srgbClr val="5D5D72"/>
-                </a:solidFill>
-                <a:latin typeface="Calibri" pitchFamily="34" charset="0"/>
-                <a:ea typeface="Calibri" pitchFamily="34" charset="-122"/>
-                <a:cs typeface="Calibri" pitchFamily="34" charset="-120"/>
-              </a:rPr>
-              <a:t>Usman Akram  •  COMSATS University Islamabad</a:t>
-            </a:r>
-            <a:endParaRPr lang="en-US" sz="900" dirty="0"/>
-          </a:p>
-        </p:txBody>
-      </p:sp>
-      <p:sp>
-        <p:nvSpPr>
-          <p:cNvPr id="20" name="Text 18"/>
-          <p:cNvSpPr txBox="1"/>
-          <p:nvPr/>
-        </p:nvSpPr>
-        <p:spPr>
-          <a:xfrm>
-            <a:off x="11155680" y="6446520"/>
-            <a:ext cx="457200" cy="292608"/>
-          </a:xfrm>
-          <a:prstGeom prst="rect">
-            <a:avLst/>
-          </a:prstGeom>
-          <a:noFill/>
-          <a:ln/>
-        </p:spPr>
-        <p:txBody>
-          <a:bodyPr wrap="square" lIns="0" tIns="0" rIns="0" bIns="0" rtlCol="0" anchor="ctr"/>
-          <a:lstStyle/>
-          <a:p>
-            <a:pPr algn="r" indent="0" marL="0">
-              <a:buNone/>
-            </a:pPr>
-            <a:r>
-              <a:rPr lang="en-US" sz="900" dirty="0">
-                <a:solidFill>
-                  <a:srgbClr val="5D5D72"/>
-                </a:solidFill>
-                <a:latin typeface="Calibri" pitchFamily="34" charset="0"/>
-                <a:ea typeface="Calibri" pitchFamily="34" charset="-122"/>
-                <a:cs typeface="Calibri" pitchFamily="34" charset="-120"/>
-              </a:rPr>
-              <a:t>19</a:t>
-            </a:r>
-            <a:endParaRPr lang="en-US" sz="900" dirty="0"/>
+          <p:cNvPr id="21" name="cuinotes-footer-mark"/>
+          <p:cNvSpPr txBox="1"/>
+          <p:nvPr/>
+        </p:nvSpPr>
+        <p:spPr>
+          <a:xfrm>
+            <a:off x="9951720" y="6455664"/>
+            <a:ext cx="2011680" cy="292608"/>
+          </a:xfrm>
+          <a:prstGeom prst="rect">
+            <a:avLst/>
+          </a:prstGeom>
+          <a:noFill/>
+        </p:spPr>
+        <p:txBody>
+          <a:bodyPr wrap="none" lIns="0" rIns="0" tIns="0" bIns="0">
+            <a:spAutoFit/>
+          </a:bodyPr>
+          <a:lstStyle/>
+          <a:p>
+            <a:pPr algn="r"/>
+            <a:r>
+              <a:rPr sz="1000">
+                <a:solidFill>
+                  <a:srgbClr val="8A939B"/>
+                </a:solidFill>
+                <a:hlinkClick r:id="rId3"/>
+              </a:rPr>
+              <a:t>cuinotes.com</a:t>
+            </a:r>
+            <a:r>
+              <a:rPr sz="1000">
+                <a:solidFill>
+                  <a:srgbClr val="8A939B"/>
+                </a:solidFill>
+              </a:rPr>
+              <a:t>  ·  19</a:t>
+            </a:r>
           </a:p>
         </p:txBody>
       </p:sp>
@@ -7797,6 +7492,10 @@
           </a:solidFill>
           <a:ln/>
         </p:spPr>
+        <p:txBody>
+          <a:bodyPr/>
+          <a:p/>
+        </p:txBody>
       </p:sp>
       <p:sp>
         <p:nvSpPr>
@@ -7895,6 +7594,10 @@
           </a:solidFill>
           <a:ln/>
         </p:spPr>
+        <p:txBody>
+          <a:bodyPr/>
+          <a:p/>
+        </p:txBody>
       </p:sp>
       <p:sp>
         <p:nvSpPr>
@@ -7993,6 +7696,10 @@
           </a:solidFill>
           <a:ln/>
         </p:spPr>
+        <p:txBody>
+          <a:bodyPr/>
+          <a:p/>
+        </p:txBody>
       </p:sp>
       <p:sp>
         <p:nvSpPr>
@@ -8091,6 +7798,10 @@
           </a:solidFill>
           <a:ln/>
         </p:spPr>
+        <p:txBody>
+          <a:bodyPr/>
+          <a:p/>
+        </p:txBody>
       </p:sp>
       <p:sp>
         <p:nvSpPr>
@@ -8189,6 +7900,10 @@
           </a:solidFill>
           <a:ln/>
         </p:spPr>
+        <p:txBody>
+          <a:bodyPr/>
+          <a:p/>
+        </p:txBody>
       </p:sp>
       <p:sp>
         <p:nvSpPr>
@@ -8287,6 +8002,10 @@
           </a:solidFill>
           <a:ln/>
         </p:spPr>
+        <p:txBody>
+          <a:bodyPr/>
+          <a:p/>
+        </p:txBody>
       </p:sp>
       <p:sp>
         <p:nvSpPr>
@@ -8368,79 +8087,44 @@
       </p:sp>
       <p:sp>
         <p:nvSpPr>
-          <p:cNvPr id="22" name="Text 20"/>
-          <p:cNvSpPr txBox="1"/>
-          <p:nvPr/>
-        </p:nvSpPr>
-        <p:spPr>
-          <a:xfrm>
-            <a:off x="640080" y="6446520"/>
-            <a:ext cx="8686800" cy="292608"/>
-          </a:xfrm>
-          <a:prstGeom prst="rect">
-            <a:avLst/>
-          </a:prstGeom>
-          <a:noFill/>
-          <a:ln/>
-        </p:spPr>
-        <p:txBody>
-          <a:bodyPr wrap="square" lIns="0" tIns="0" rIns="0" bIns="0" rtlCol="0" anchor="ctr"/>
-          <a:lstStyle/>
-          <a:p>
-            <a:pPr algn="l" indent="0" marL="0">
-              <a:buNone/>
-            </a:pPr>
-            <a:r>
-              <a:rPr lang="en-US" sz="900" dirty="0">
-                <a:solidFill>
-                  <a:srgbClr val="5D5D72"/>
-                </a:solidFill>
-                <a:latin typeface="Calibri" pitchFamily="34" charset="0"/>
-                <a:ea typeface="Calibri" pitchFamily="34" charset="-122"/>
-                <a:cs typeface="Calibri" pitchFamily="34" charset="-120"/>
-              </a:rPr>
-              <a:t>Usman Akram  •  COMSATS University Islamabad</a:t>
-            </a:r>
-            <a:endParaRPr lang="en-US" sz="900" dirty="0"/>
-          </a:p>
-        </p:txBody>
-      </p:sp>
-      <p:sp>
-        <p:nvSpPr>
-          <p:cNvPr id="23" name="Text 21"/>
-          <p:cNvSpPr txBox="1"/>
-          <p:nvPr/>
-        </p:nvSpPr>
-        <p:spPr>
-          <a:xfrm>
-            <a:off x="11155680" y="6446520"/>
-            <a:ext cx="457200" cy="292608"/>
-          </a:xfrm>
-          <a:prstGeom prst="rect">
-            <a:avLst/>
-          </a:prstGeom>
-          <a:noFill/>
-          <a:ln/>
-        </p:spPr>
-        <p:txBody>
-          <a:bodyPr wrap="square" lIns="0" tIns="0" rIns="0" bIns="0" rtlCol="0" anchor="ctr"/>
-          <a:lstStyle/>
-          <a:p>
-            <a:pPr algn="r" indent="0" marL="0">
-              <a:buNone/>
-            </a:pPr>
-            <a:r>
-              <a:rPr lang="en-US" sz="900" dirty="0">
-                <a:solidFill>
-                  <a:srgbClr val="5D5D72"/>
-                </a:solidFill>
-                <a:latin typeface="Calibri" pitchFamily="34" charset="0"/>
-                <a:ea typeface="Calibri" pitchFamily="34" charset="-122"/>
-                <a:cs typeface="Calibri" pitchFamily="34" charset="-120"/>
-              </a:rPr>
-              <a:t>2</a:t>
-            </a:r>
-            <a:endParaRPr lang="en-US" sz="900" dirty="0"/>
+          <p:cNvPr id="24" name="cuinotes-footer-mark"/>
+          <p:cNvSpPr txBox="1"/>
+          <p:nvPr/>
+        </p:nvSpPr>
+        <p:spPr>
+          <a:xfrm>
+            <a:off x="9951720" y="6455664"/>
+            <a:ext cx="2011680" cy="292608"/>
+          </a:xfrm>
+          <a:prstGeom prst="rect">
+            <a:avLst/>
+          </a:prstGeom>
+          <a:noFill/>
+        </p:spPr>
+        <p:txBody>
+          <a:bodyPr wrap="none" lIns="0" rIns="0" tIns="0" bIns="0">
+            <a:spAutoFit/>
+          </a:bodyPr>
+          <a:lstStyle/>
+          <a:p>
+            <a:pPr algn="r"/>
+            <a:r>
+              <a:rPr sz="1000">
+                <a:solidFill>
+                  <a:srgbClr val="8A939B"/>
+                </a:solidFill>
+                <a:hlinkClick r:id="rId3"/>
+              </a:rPr>
+              <a:t>cuinotes.com</a:t>
+            </a:r>
+            <a:r>
+              <a:rPr sz="1000">
+                <a:solidFill>
+                  <a:srgbClr val="8A939B"/>
+                </a:solidFill>
+              </a:rPr>
+              <a:t>  ·  2</a:t>
+            </a:r>
           </a:p>
         </p:txBody>
       </p:sp>
@@ -8575,6 +8259,10 @@
           </a:solidFill>
           <a:ln/>
         </p:spPr>
+        <p:txBody>
+          <a:bodyPr/>
+          <a:p/>
+        </p:txBody>
       </p:sp>
       <p:sp>
         <p:nvSpPr>
@@ -8897,79 +8585,44 @@
       </p:sp>
       <p:sp>
         <p:nvSpPr>
-          <p:cNvPr id="7" name="Text 5"/>
-          <p:cNvSpPr txBox="1"/>
-          <p:nvPr/>
-        </p:nvSpPr>
-        <p:spPr>
-          <a:xfrm>
-            <a:off x="640080" y="6446520"/>
-            <a:ext cx="8686800" cy="292608"/>
-          </a:xfrm>
-          <a:prstGeom prst="rect">
-            <a:avLst/>
-          </a:prstGeom>
-          <a:noFill/>
-          <a:ln/>
-        </p:spPr>
-        <p:txBody>
-          <a:bodyPr wrap="square" lIns="0" tIns="0" rIns="0" bIns="0" rtlCol="0" anchor="ctr"/>
-          <a:lstStyle/>
-          <a:p>
-            <a:pPr algn="l" indent="0" marL="0">
-              <a:buNone/>
-            </a:pPr>
-            <a:r>
-              <a:rPr lang="en-US" sz="900" dirty="0">
-                <a:solidFill>
-                  <a:srgbClr val="5D5D72"/>
-                </a:solidFill>
-                <a:latin typeface="Calibri" pitchFamily="34" charset="0"/>
-                <a:ea typeface="Calibri" pitchFamily="34" charset="-122"/>
-                <a:cs typeface="Calibri" pitchFamily="34" charset="-120"/>
-              </a:rPr>
-              <a:t>Usman Akram  •  COMSATS University Islamabad</a:t>
-            </a:r>
-            <a:endParaRPr lang="en-US" sz="900" dirty="0"/>
-          </a:p>
-        </p:txBody>
-      </p:sp>
-      <p:sp>
-        <p:nvSpPr>
-          <p:cNvPr id="8" name="Text 6"/>
-          <p:cNvSpPr txBox="1"/>
-          <p:nvPr/>
-        </p:nvSpPr>
-        <p:spPr>
-          <a:xfrm>
-            <a:off x="11155680" y="6446520"/>
-            <a:ext cx="457200" cy="292608"/>
-          </a:xfrm>
-          <a:prstGeom prst="rect">
-            <a:avLst/>
-          </a:prstGeom>
-          <a:noFill/>
-          <a:ln/>
-        </p:spPr>
-        <p:txBody>
-          <a:bodyPr wrap="square" lIns="0" tIns="0" rIns="0" bIns="0" rtlCol="0" anchor="ctr"/>
-          <a:lstStyle/>
-          <a:p>
-            <a:pPr algn="r" indent="0" marL="0">
-              <a:buNone/>
-            </a:pPr>
-            <a:r>
-              <a:rPr lang="en-US" sz="900" dirty="0">
-                <a:solidFill>
-                  <a:srgbClr val="5D5D72"/>
-                </a:solidFill>
-                <a:latin typeface="Calibri" pitchFamily="34" charset="0"/>
-                <a:ea typeface="Calibri" pitchFamily="34" charset="-122"/>
-                <a:cs typeface="Calibri" pitchFamily="34" charset="-120"/>
-              </a:rPr>
-              <a:t>20</a:t>
-            </a:r>
-            <a:endParaRPr lang="en-US" sz="900" dirty="0"/>
+          <p:cNvPr id="9" name="cuinotes-footer-mark"/>
+          <p:cNvSpPr txBox="1"/>
+          <p:nvPr/>
+        </p:nvSpPr>
+        <p:spPr>
+          <a:xfrm>
+            <a:off x="9951720" y="6455664"/>
+            <a:ext cx="2011680" cy="292608"/>
+          </a:xfrm>
+          <a:prstGeom prst="rect">
+            <a:avLst/>
+          </a:prstGeom>
+          <a:noFill/>
+        </p:spPr>
+        <p:txBody>
+          <a:bodyPr wrap="none" lIns="0" rIns="0" tIns="0" bIns="0">
+            <a:spAutoFit/>
+          </a:bodyPr>
+          <a:lstStyle/>
+          <a:p>
+            <a:pPr algn="r"/>
+            <a:r>
+              <a:rPr sz="1000">
+                <a:solidFill>
+                  <a:srgbClr val="8A939B"/>
+                </a:solidFill>
+                <a:hlinkClick r:id="rId3"/>
+              </a:rPr>
+              <a:t>cuinotes.com</a:t>
+            </a:r>
+            <a:r>
+              <a:rPr sz="1000">
+                <a:solidFill>
+                  <a:srgbClr val="8A939B"/>
+                </a:solidFill>
+              </a:rPr>
+              <a:t>  ·  20</a:t>
+            </a:r>
           </a:p>
         </p:txBody>
       </p:sp>
@@ -9104,6 +8757,10 @@
           </a:solidFill>
           <a:ln/>
         </p:spPr>
+        <p:txBody>
+          <a:bodyPr/>
+          <a:p/>
+        </p:txBody>
       </p:sp>
       <p:sp>
         <p:nvSpPr>
@@ -9357,79 +9014,44 @@
       </p:sp>
       <p:sp>
         <p:nvSpPr>
-          <p:cNvPr id="7" name="Text 5"/>
-          <p:cNvSpPr txBox="1"/>
-          <p:nvPr/>
-        </p:nvSpPr>
-        <p:spPr>
-          <a:xfrm>
-            <a:off x="640080" y="6446520"/>
-            <a:ext cx="8686800" cy="292608"/>
-          </a:xfrm>
-          <a:prstGeom prst="rect">
-            <a:avLst/>
-          </a:prstGeom>
-          <a:noFill/>
-          <a:ln/>
-        </p:spPr>
-        <p:txBody>
-          <a:bodyPr wrap="square" lIns="0" tIns="0" rIns="0" bIns="0" rtlCol="0" anchor="ctr"/>
-          <a:lstStyle/>
-          <a:p>
-            <a:pPr algn="l" indent="0" marL="0">
-              <a:buNone/>
-            </a:pPr>
-            <a:r>
-              <a:rPr lang="en-US" sz="900" dirty="0">
-                <a:solidFill>
-                  <a:srgbClr val="5D5D72"/>
-                </a:solidFill>
-                <a:latin typeface="Calibri" pitchFamily="34" charset="0"/>
-                <a:ea typeface="Calibri" pitchFamily="34" charset="-122"/>
-                <a:cs typeface="Calibri" pitchFamily="34" charset="-120"/>
-              </a:rPr>
-              <a:t>Usman Akram  •  COMSATS University Islamabad</a:t>
-            </a:r>
-            <a:endParaRPr lang="en-US" sz="900" dirty="0"/>
-          </a:p>
-        </p:txBody>
-      </p:sp>
-      <p:sp>
-        <p:nvSpPr>
-          <p:cNvPr id="8" name="Text 6"/>
-          <p:cNvSpPr txBox="1"/>
-          <p:nvPr/>
-        </p:nvSpPr>
-        <p:spPr>
-          <a:xfrm>
-            <a:off x="11155680" y="6446520"/>
-            <a:ext cx="457200" cy="292608"/>
-          </a:xfrm>
-          <a:prstGeom prst="rect">
-            <a:avLst/>
-          </a:prstGeom>
-          <a:noFill/>
-          <a:ln/>
-        </p:spPr>
-        <p:txBody>
-          <a:bodyPr wrap="square" lIns="0" tIns="0" rIns="0" bIns="0" rtlCol="0" anchor="ctr"/>
-          <a:lstStyle/>
-          <a:p>
-            <a:pPr algn="r" indent="0" marL="0">
-              <a:buNone/>
-            </a:pPr>
-            <a:r>
-              <a:rPr lang="en-US" sz="900" dirty="0">
-                <a:solidFill>
-                  <a:srgbClr val="5D5D72"/>
-                </a:solidFill>
-                <a:latin typeface="Calibri" pitchFamily="34" charset="0"/>
-                <a:ea typeface="Calibri" pitchFamily="34" charset="-122"/>
-                <a:cs typeface="Calibri" pitchFamily="34" charset="-120"/>
-              </a:rPr>
-              <a:t>21</a:t>
-            </a:r>
-            <a:endParaRPr lang="en-US" sz="900" dirty="0"/>
+          <p:cNvPr id="9" name="cuinotes-footer-mark"/>
+          <p:cNvSpPr txBox="1"/>
+          <p:nvPr/>
+        </p:nvSpPr>
+        <p:spPr>
+          <a:xfrm>
+            <a:off x="9951720" y="6455664"/>
+            <a:ext cx="2011680" cy="292608"/>
+          </a:xfrm>
+          <a:prstGeom prst="rect">
+            <a:avLst/>
+          </a:prstGeom>
+          <a:noFill/>
+        </p:spPr>
+        <p:txBody>
+          <a:bodyPr wrap="none" lIns="0" rIns="0" tIns="0" bIns="0">
+            <a:spAutoFit/>
+          </a:bodyPr>
+          <a:lstStyle/>
+          <a:p>
+            <a:pPr algn="r"/>
+            <a:r>
+              <a:rPr sz="1000">
+                <a:solidFill>
+                  <a:srgbClr val="8A939B"/>
+                </a:solidFill>
+                <a:hlinkClick r:id="rId3"/>
+              </a:rPr>
+              <a:t>cuinotes.com</a:t>
+            </a:r>
+            <a:r>
+              <a:rPr sz="1000">
+                <a:solidFill>
+                  <a:srgbClr val="8A939B"/>
+                </a:solidFill>
+              </a:rPr>
+              <a:t>  ·  21</a:t>
+            </a:r>
           </a:p>
         </p:txBody>
       </p:sp>
@@ -9564,6 +9186,10 @@
           </a:solidFill>
           <a:ln/>
         </p:spPr>
+        <p:txBody>
+          <a:bodyPr/>
+          <a:p/>
+        </p:txBody>
       </p:sp>
       <p:sp>
         <p:nvSpPr>
@@ -9857,79 +9483,44 @@
       </p:sp>
       <p:sp>
         <p:nvSpPr>
-          <p:cNvPr id="7" name="Text 5"/>
-          <p:cNvSpPr txBox="1"/>
-          <p:nvPr/>
-        </p:nvSpPr>
-        <p:spPr>
-          <a:xfrm>
-            <a:off x="640080" y="6446520"/>
-            <a:ext cx="8686800" cy="292608"/>
-          </a:xfrm>
-          <a:prstGeom prst="rect">
-            <a:avLst/>
-          </a:prstGeom>
-          <a:noFill/>
-          <a:ln/>
-        </p:spPr>
-        <p:txBody>
-          <a:bodyPr wrap="square" lIns="0" tIns="0" rIns="0" bIns="0" rtlCol="0" anchor="ctr"/>
-          <a:lstStyle/>
-          <a:p>
-            <a:pPr algn="l" indent="0" marL="0">
-              <a:buNone/>
-            </a:pPr>
-            <a:r>
-              <a:rPr lang="en-US" sz="900" dirty="0">
-                <a:solidFill>
-                  <a:srgbClr val="5D5D72"/>
-                </a:solidFill>
-                <a:latin typeface="Calibri" pitchFamily="34" charset="0"/>
-                <a:ea typeface="Calibri" pitchFamily="34" charset="-122"/>
-                <a:cs typeface="Calibri" pitchFamily="34" charset="-120"/>
-              </a:rPr>
-              <a:t>Usman Akram  •  COMSATS University Islamabad</a:t>
-            </a:r>
-            <a:endParaRPr lang="en-US" sz="900" dirty="0"/>
-          </a:p>
-        </p:txBody>
-      </p:sp>
-      <p:sp>
-        <p:nvSpPr>
-          <p:cNvPr id="8" name="Text 6"/>
-          <p:cNvSpPr txBox="1"/>
-          <p:nvPr/>
-        </p:nvSpPr>
-        <p:spPr>
-          <a:xfrm>
-            <a:off x="11155680" y="6446520"/>
-            <a:ext cx="457200" cy="292608"/>
-          </a:xfrm>
-          <a:prstGeom prst="rect">
-            <a:avLst/>
-          </a:prstGeom>
-          <a:noFill/>
-          <a:ln/>
-        </p:spPr>
-        <p:txBody>
-          <a:bodyPr wrap="square" lIns="0" tIns="0" rIns="0" bIns="0" rtlCol="0" anchor="ctr"/>
-          <a:lstStyle/>
-          <a:p>
-            <a:pPr algn="r" indent="0" marL="0">
-              <a:buNone/>
-            </a:pPr>
-            <a:r>
-              <a:rPr lang="en-US" sz="900" dirty="0">
-                <a:solidFill>
-                  <a:srgbClr val="5D5D72"/>
-                </a:solidFill>
-                <a:latin typeface="Calibri" pitchFamily="34" charset="0"/>
-                <a:ea typeface="Calibri" pitchFamily="34" charset="-122"/>
-                <a:cs typeface="Calibri" pitchFamily="34" charset="-120"/>
-              </a:rPr>
-              <a:t>22</a:t>
-            </a:r>
-            <a:endParaRPr lang="en-US" sz="900" dirty="0"/>
+          <p:cNvPr id="9" name="cuinotes-footer-mark"/>
+          <p:cNvSpPr txBox="1"/>
+          <p:nvPr/>
+        </p:nvSpPr>
+        <p:spPr>
+          <a:xfrm>
+            <a:off x="9951720" y="6455664"/>
+            <a:ext cx="2011680" cy="292608"/>
+          </a:xfrm>
+          <a:prstGeom prst="rect">
+            <a:avLst/>
+          </a:prstGeom>
+          <a:noFill/>
+        </p:spPr>
+        <p:txBody>
+          <a:bodyPr wrap="none" lIns="0" rIns="0" tIns="0" bIns="0">
+            <a:spAutoFit/>
+          </a:bodyPr>
+          <a:lstStyle/>
+          <a:p>
+            <a:pPr algn="r"/>
+            <a:r>
+              <a:rPr sz="1000">
+                <a:solidFill>
+                  <a:srgbClr val="8A939B"/>
+                </a:solidFill>
+                <a:hlinkClick r:id="rId3"/>
+              </a:rPr>
+              <a:t>cuinotes.com</a:t>
+            </a:r>
+            <a:r>
+              <a:rPr sz="1000">
+                <a:solidFill>
+                  <a:srgbClr val="8A939B"/>
+                </a:solidFill>
+              </a:rPr>
+              <a:t>  ·  22</a:t>
+            </a:r>
           </a:p>
         </p:txBody>
       </p:sp>
@@ -10064,6 +9655,10 @@
           </a:solidFill>
           <a:ln/>
         </p:spPr>
+        <p:txBody>
+          <a:bodyPr/>
+          <a:p/>
+        </p:txBody>
       </p:sp>
       <p:sp>
         <p:nvSpPr>
@@ -10298,79 +9893,44 @@
       </p:sp>
       <p:sp>
         <p:nvSpPr>
-          <p:cNvPr id="6" name="Text 4"/>
-          <p:cNvSpPr txBox="1"/>
-          <p:nvPr/>
-        </p:nvSpPr>
-        <p:spPr>
-          <a:xfrm>
-            <a:off x="640080" y="6446520"/>
-            <a:ext cx="8686800" cy="292608"/>
-          </a:xfrm>
-          <a:prstGeom prst="rect">
-            <a:avLst/>
-          </a:prstGeom>
-          <a:noFill/>
-          <a:ln/>
-        </p:spPr>
-        <p:txBody>
-          <a:bodyPr wrap="square" lIns="0" tIns="0" rIns="0" bIns="0" rtlCol="0" anchor="ctr"/>
-          <a:lstStyle/>
-          <a:p>
-            <a:pPr algn="l" indent="0" marL="0">
-              <a:buNone/>
-            </a:pPr>
-            <a:r>
-              <a:rPr lang="en-US" sz="900" dirty="0">
-                <a:solidFill>
-                  <a:srgbClr val="5D5D72"/>
-                </a:solidFill>
-                <a:latin typeface="Calibri" pitchFamily="34" charset="0"/>
-                <a:ea typeface="Calibri" pitchFamily="34" charset="-122"/>
-                <a:cs typeface="Calibri" pitchFamily="34" charset="-120"/>
-              </a:rPr>
-              <a:t>Usman Akram  •  COMSATS University Islamabad</a:t>
-            </a:r>
-            <a:endParaRPr lang="en-US" sz="900" dirty="0"/>
-          </a:p>
-        </p:txBody>
-      </p:sp>
-      <p:sp>
-        <p:nvSpPr>
-          <p:cNvPr id="7" name="Text 5"/>
-          <p:cNvSpPr txBox="1"/>
-          <p:nvPr/>
-        </p:nvSpPr>
-        <p:spPr>
-          <a:xfrm>
-            <a:off x="11155680" y="6446520"/>
-            <a:ext cx="457200" cy="292608"/>
-          </a:xfrm>
-          <a:prstGeom prst="rect">
-            <a:avLst/>
-          </a:prstGeom>
-          <a:noFill/>
-          <a:ln/>
-        </p:spPr>
-        <p:txBody>
-          <a:bodyPr wrap="square" lIns="0" tIns="0" rIns="0" bIns="0" rtlCol="0" anchor="ctr"/>
-          <a:lstStyle/>
-          <a:p>
-            <a:pPr algn="r" indent="0" marL="0">
-              <a:buNone/>
-            </a:pPr>
-            <a:r>
-              <a:rPr lang="en-US" sz="900" dirty="0">
-                <a:solidFill>
-                  <a:srgbClr val="5D5D72"/>
-                </a:solidFill>
-                <a:latin typeface="Calibri" pitchFamily="34" charset="0"/>
-                <a:ea typeface="Calibri" pitchFamily="34" charset="-122"/>
-                <a:cs typeface="Calibri" pitchFamily="34" charset="-120"/>
-              </a:rPr>
-              <a:t>23</a:t>
-            </a:r>
-            <a:endParaRPr lang="en-US" sz="900" dirty="0"/>
+          <p:cNvPr id="8" name="cuinotes-footer-mark"/>
+          <p:cNvSpPr txBox="1"/>
+          <p:nvPr/>
+        </p:nvSpPr>
+        <p:spPr>
+          <a:xfrm>
+            <a:off x="9951720" y="6455664"/>
+            <a:ext cx="2011680" cy="292608"/>
+          </a:xfrm>
+          <a:prstGeom prst="rect">
+            <a:avLst/>
+          </a:prstGeom>
+          <a:noFill/>
+        </p:spPr>
+        <p:txBody>
+          <a:bodyPr wrap="none" lIns="0" rIns="0" tIns="0" bIns="0">
+            <a:spAutoFit/>
+          </a:bodyPr>
+          <a:lstStyle/>
+          <a:p>
+            <a:pPr algn="r"/>
+            <a:r>
+              <a:rPr sz="1000">
+                <a:solidFill>
+                  <a:srgbClr val="8A939B"/>
+                </a:solidFill>
+                <a:hlinkClick r:id="rId3"/>
+              </a:rPr>
+              <a:t>cuinotes.com</a:t>
+            </a:r>
+            <a:r>
+              <a:rPr sz="1000">
+                <a:solidFill>
+                  <a:srgbClr val="8A939B"/>
+                </a:solidFill>
+              </a:rPr>
+              <a:t>  ·  23</a:t>
+            </a:r>
           </a:p>
         </p:txBody>
       </p:sp>
@@ -10510,6 +10070,10 @@
             <a:prstDash val="solid"/>
           </a:ln>
         </p:spPr>
+        <p:txBody>
+          <a:bodyPr/>
+          <a:p/>
+        </p:txBody>
       </p:sp>
       <p:sp>
         <p:nvSpPr>
@@ -10591,79 +10155,44 @@
       </p:sp>
       <p:sp>
         <p:nvSpPr>
-          <p:cNvPr id="7" name="Text 5"/>
-          <p:cNvSpPr txBox="1"/>
-          <p:nvPr/>
-        </p:nvSpPr>
-        <p:spPr>
-          <a:xfrm>
-            <a:off x="640080" y="6446520"/>
-            <a:ext cx="8686800" cy="292608"/>
-          </a:xfrm>
-          <a:prstGeom prst="rect">
-            <a:avLst/>
-          </a:prstGeom>
-          <a:noFill/>
-          <a:ln/>
-        </p:spPr>
-        <p:txBody>
-          <a:bodyPr wrap="square" lIns="0" tIns="0" rIns="0" bIns="0" rtlCol="0" anchor="ctr"/>
-          <a:lstStyle/>
-          <a:p>
-            <a:pPr algn="l" indent="0" marL="0">
-              <a:buNone/>
-            </a:pPr>
-            <a:r>
-              <a:rPr lang="en-US" sz="900" dirty="0">
-                <a:solidFill>
-                  <a:srgbClr val="5D5D72"/>
-                </a:solidFill>
-                <a:latin typeface="Calibri" pitchFamily="34" charset="0"/>
-                <a:ea typeface="Calibri" pitchFamily="34" charset="-122"/>
-                <a:cs typeface="Calibri" pitchFamily="34" charset="-120"/>
-              </a:rPr>
-              <a:t>Usman Akram  •  COMSATS University Islamabad</a:t>
-            </a:r>
-            <a:endParaRPr lang="en-US" sz="900" dirty="0"/>
-          </a:p>
-        </p:txBody>
-      </p:sp>
-      <p:sp>
-        <p:nvSpPr>
-          <p:cNvPr id="8" name="Text 6"/>
-          <p:cNvSpPr txBox="1"/>
-          <p:nvPr/>
-        </p:nvSpPr>
-        <p:spPr>
-          <a:xfrm>
-            <a:off x="11155680" y="6446520"/>
-            <a:ext cx="457200" cy="292608"/>
-          </a:xfrm>
-          <a:prstGeom prst="rect">
-            <a:avLst/>
-          </a:prstGeom>
-          <a:noFill/>
-          <a:ln/>
-        </p:spPr>
-        <p:txBody>
-          <a:bodyPr wrap="square" lIns="0" tIns="0" rIns="0" bIns="0" rtlCol="0" anchor="ctr"/>
-          <a:lstStyle/>
-          <a:p>
-            <a:pPr algn="r" indent="0" marL="0">
-              <a:buNone/>
-            </a:pPr>
-            <a:r>
-              <a:rPr lang="en-US" sz="900" dirty="0">
-                <a:solidFill>
-                  <a:srgbClr val="5D5D72"/>
-                </a:solidFill>
-                <a:latin typeface="Calibri" pitchFamily="34" charset="0"/>
-                <a:ea typeface="Calibri" pitchFamily="34" charset="-122"/>
-                <a:cs typeface="Calibri" pitchFamily="34" charset="-120"/>
-              </a:rPr>
-              <a:t>24</a:t>
-            </a:r>
-            <a:endParaRPr lang="en-US" sz="900" dirty="0"/>
+          <p:cNvPr id="9" name="cuinotes-footer-mark"/>
+          <p:cNvSpPr txBox="1"/>
+          <p:nvPr/>
+        </p:nvSpPr>
+        <p:spPr>
+          <a:xfrm>
+            <a:off x="9951720" y="6455664"/>
+            <a:ext cx="2011680" cy="292608"/>
+          </a:xfrm>
+          <a:prstGeom prst="rect">
+            <a:avLst/>
+          </a:prstGeom>
+          <a:noFill/>
+        </p:spPr>
+        <p:txBody>
+          <a:bodyPr wrap="none" lIns="0" rIns="0" tIns="0" bIns="0">
+            <a:spAutoFit/>
+          </a:bodyPr>
+          <a:lstStyle/>
+          <a:p>
+            <a:pPr algn="r"/>
+            <a:r>
+              <a:rPr sz="1000">
+                <a:solidFill>
+                  <a:srgbClr val="8A939B"/>
+                </a:solidFill>
+                <a:hlinkClick r:id="rId3"/>
+              </a:rPr>
+              <a:t>cuinotes.com</a:t>
+            </a:r>
+            <a:r>
+              <a:rPr sz="1000">
+                <a:solidFill>
+                  <a:srgbClr val="8A939B"/>
+                </a:solidFill>
+              </a:rPr>
+              <a:t>  ·  24</a:t>
+            </a:r>
           </a:p>
         </p:txBody>
       </p:sp>
@@ -10796,6 +10325,10 @@
           </a:solidFill>
           <a:ln/>
         </p:spPr>
+        <p:txBody>
+          <a:bodyPr/>
+          <a:p/>
+        </p:txBody>
       </p:sp>
       <p:sp>
         <p:nvSpPr>
@@ -10894,6 +10427,10 @@
           </a:solidFill>
           <a:ln/>
         </p:spPr>
+        <p:txBody>
+          <a:bodyPr/>
+          <a:p/>
+        </p:txBody>
       </p:sp>
       <p:sp>
         <p:nvSpPr>
@@ -10992,6 +10529,10 @@
           </a:solidFill>
           <a:ln/>
         </p:spPr>
+        <p:txBody>
+          <a:bodyPr/>
+          <a:p/>
+        </p:txBody>
       </p:sp>
       <p:sp>
         <p:nvSpPr>
@@ -11073,79 +10614,44 @@
       </p:sp>
       <p:sp>
         <p:nvSpPr>
-          <p:cNvPr id="13" name="Text 11"/>
-          <p:cNvSpPr txBox="1"/>
-          <p:nvPr/>
-        </p:nvSpPr>
-        <p:spPr>
-          <a:xfrm>
-            <a:off x="640080" y="6446520"/>
-            <a:ext cx="8686800" cy="292608"/>
-          </a:xfrm>
-          <a:prstGeom prst="rect">
-            <a:avLst/>
-          </a:prstGeom>
-          <a:noFill/>
-          <a:ln/>
-        </p:spPr>
-        <p:txBody>
-          <a:bodyPr wrap="square" lIns="0" tIns="0" rIns="0" bIns="0" rtlCol="0" anchor="ctr"/>
-          <a:lstStyle/>
-          <a:p>
-            <a:pPr algn="l" indent="0" marL="0">
-              <a:buNone/>
-            </a:pPr>
-            <a:r>
-              <a:rPr lang="en-US" sz="900" dirty="0">
-                <a:solidFill>
-                  <a:srgbClr val="5D5D72"/>
-                </a:solidFill>
-                <a:latin typeface="Calibri" pitchFamily="34" charset="0"/>
-                <a:ea typeface="Calibri" pitchFamily="34" charset="-122"/>
-                <a:cs typeface="Calibri" pitchFamily="34" charset="-120"/>
-              </a:rPr>
-              <a:t>Usman Akram  •  COMSATS University Islamabad</a:t>
-            </a:r>
-            <a:endParaRPr lang="en-US" sz="900" dirty="0"/>
-          </a:p>
-        </p:txBody>
-      </p:sp>
-      <p:sp>
-        <p:nvSpPr>
-          <p:cNvPr id="14" name="Text 12"/>
-          <p:cNvSpPr txBox="1"/>
-          <p:nvPr/>
-        </p:nvSpPr>
-        <p:spPr>
-          <a:xfrm>
-            <a:off x="11155680" y="6446520"/>
-            <a:ext cx="457200" cy="292608"/>
-          </a:xfrm>
-          <a:prstGeom prst="rect">
-            <a:avLst/>
-          </a:prstGeom>
-          <a:noFill/>
-          <a:ln/>
-        </p:spPr>
-        <p:txBody>
-          <a:bodyPr wrap="square" lIns="0" tIns="0" rIns="0" bIns="0" rtlCol="0" anchor="ctr"/>
-          <a:lstStyle/>
-          <a:p>
-            <a:pPr algn="r" indent="0" marL="0">
-              <a:buNone/>
-            </a:pPr>
-            <a:r>
-              <a:rPr lang="en-US" sz="900" dirty="0">
-                <a:solidFill>
-                  <a:srgbClr val="5D5D72"/>
-                </a:solidFill>
-                <a:latin typeface="Calibri" pitchFamily="34" charset="0"/>
-                <a:ea typeface="Calibri" pitchFamily="34" charset="-122"/>
-                <a:cs typeface="Calibri" pitchFamily="34" charset="-120"/>
-              </a:rPr>
-              <a:t>25</a:t>
-            </a:r>
-            <a:endParaRPr lang="en-US" sz="900" dirty="0"/>
+          <p:cNvPr id="15" name="cuinotes-footer-mark"/>
+          <p:cNvSpPr txBox="1"/>
+          <p:nvPr/>
+        </p:nvSpPr>
+        <p:spPr>
+          <a:xfrm>
+            <a:off x="9951720" y="6455664"/>
+            <a:ext cx="2011680" cy="292608"/>
+          </a:xfrm>
+          <a:prstGeom prst="rect">
+            <a:avLst/>
+          </a:prstGeom>
+          <a:noFill/>
+        </p:spPr>
+        <p:txBody>
+          <a:bodyPr wrap="none" lIns="0" rIns="0" tIns="0" bIns="0">
+            <a:spAutoFit/>
+          </a:bodyPr>
+          <a:lstStyle/>
+          <a:p>
+            <a:pPr algn="r"/>
+            <a:r>
+              <a:rPr sz="1000">
+                <a:solidFill>
+                  <a:srgbClr val="8A939B"/>
+                </a:solidFill>
+                <a:hlinkClick r:id="rId3"/>
+              </a:rPr>
+              <a:t>cuinotes.com</a:t>
+            </a:r>
+            <a:r>
+              <a:rPr sz="1000">
+                <a:solidFill>
+                  <a:srgbClr val="8A939B"/>
+                </a:solidFill>
+              </a:rPr>
+              <a:t>  ·  25</a:t>
+            </a:r>
           </a:p>
         </p:txBody>
       </p:sp>
@@ -11280,6 +10786,10 @@
           </a:solidFill>
           <a:ln/>
         </p:spPr>
+        <p:txBody>
+          <a:bodyPr/>
+          <a:p/>
+        </p:txBody>
       </p:sp>
       <p:sp>
         <p:nvSpPr>
@@ -11525,79 +11035,44 @@
       </p:sp>
       <p:sp>
         <p:nvSpPr>
-          <p:cNvPr id="6" name="Text 4"/>
-          <p:cNvSpPr txBox="1"/>
-          <p:nvPr/>
-        </p:nvSpPr>
-        <p:spPr>
-          <a:xfrm>
-            <a:off x="640080" y="6446520"/>
-            <a:ext cx="8686800" cy="292608"/>
-          </a:xfrm>
-          <a:prstGeom prst="rect">
-            <a:avLst/>
-          </a:prstGeom>
-          <a:noFill/>
-          <a:ln/>
-        </p:spPr>
-        <p:txBody>
-          <a:bodyPr wrap="square" lIns="0" tIns="0" rIns="0" bIns="0" rtlCol="0" anchor="ctr"/>
-          <a:lstStyle/>
-          <a:p>
-            <a:pPr algn="l" indent="0" marL="0">
-              <a:buNone/>
-            </a:pPr>
-            <a:r>
-              <a:rPr lang="en-US" sz="900" dirty="0">
-                <a:solidFill>
-                  <a:srgbClr val="5D5D72"/>
-                </a:solidFill>
-                <a:latin typeface="Calibri" pitchFamily="34" charset="0"/>
-                <a:ea typeface="Calibri" pitchFamily="34" charset="-122"/>
-                <a:cs typeface="Calibri" pitchFamily="34" charset="-120"/>
-              </a:rPr>
-              <a:t>Usman Akram  •  COMSATS University Islamabad</a:t>
-            </a:r>
-            <a:endParaRPr lang="en-US" sz="900" dirty="0"/>
-          </a:p>
-        </p:txBody>
-      </p:sp>
-      <p:sp>
-        <p:nvSpPr>
-          <p:cNvPr id="7" name="Text 5"/>
-          <p:cNvSpPr txBox="1"/>
-          <p:nvPr/>
-        </p:nvSpPr>
-        <p:spPr>
-          <a:xfrm>
-            <a:off x="11155680" y="6446520"/>
-            <a:ext cx="457200" cy="292608"/>
-          </a:xfrm>
-          <a:prstGeom prst="rect">
-            <a:avLst/>
-          </a:prstGeom>
-          <a:noFill/>
-          <a:ln/>
-        </p:spPr>
-        <p:txBody>
-          <a:bodyPr wrap="square" lIns="0" tIns="0" rIns="0" bIns="0" rtlCol="0" anchor="ctr"/>
-          <a:lstStyle/>
-          <a:p>
-            <a:pPr algn="r" indent="0" marL="0">
-              <a:buNone/>
-            </a:pPr>
-            <a:r>
-              <a:rPr lang="en-US" sz="900" dirty="0">
-                <a:solidFill>
-                  <a:srgbClr val="5D5D72"/>
-                </a:solidFill>
-                <a:latin typeface="Calibri" pitchFamily="34" charset="0"/>
-                <a:ea typeface="Calibri" pitchFamily="34" charset="-122"/>
-                <a:cs typeface="Calibri" pitchFamily="34" charset="-120"/>
-              </a:rPr>
-              <a:t>26</a:t>
-            </a:r>
-            <a:endParaRPr lang="en-US" sz="900" dirty="0"/>
+          <p:cNvPr id="8" name="cuinotes-footer-mark"/>
+          <p:cNvSpPr txBox="1"/>
+          <p:nvPr/>
+        </p:nvSpPr>
+        <p:spPr>
+          <a:xfrm>
+            <a:off x="9951720" y="6455664"/>
+            <a:ext cx="2011680" cy="292608"/>
+          </a:xfrm>
+          <a:prstGeom prst="rect">
+            <a:avLst/>
+          </a:prstGeom>
+          <a:noFill/>
+        </p:spPr>
+        <p:txBody>
+          <a:bodyPr wrap="none" lIns="0" rIns="0" tIns="0" bIns="0">
+            <a:spAutoFit/>
+          </a:bodyPr>
+          <a:lstStyle/>
+          <a:p>
+            <a:pPr algn="r"/>
+            <a:r>
+              <a:rPr sz="1000">
+                <a:solidFill>
+                  <a:srgbClr val="8A939B"/>
+                </a:solidFill>
+                <a:hlinkClick r:id="rId3"/>
+              </a:rPr>
+              <a:t>cuinotes.com</a:t>
+            </a:r>
+            <a:r>
+              <a:rPr sz="1000">
+                <a:solidFill>
+                  <a:srgbClr val="8A939B"/>
+                </a:solidFill>
+              </a:rPr>
+              <a:t>  ·  26</a:t>
+            </a:r>
           </a:p>
         </p:txBody>
       </p:sp>
@@ -11732,6 +11207,10 @@
           </a:solidFill>
           <a:ln/>
         </p:spPr>
+        <p:txBody>
+          <a:bodyPr/>
+          <a:p/>
+        </p:txBody>
       </p:sp>
       <p:sp>
         <p:nvSpPr>
@@ -11877,79 +11356,44 @@
       </p:sp>
       <p:sp>
         <p:nvSpPr>
-          <p:cNvPr id="6" name="Text 4"/>
-          <p:cNvSpPr txBox="1"/>
-          <p:nvPr/>
-        </p:nvSpPr>
-        <p:spPr>
-          <a:xfrm>
-            <a:off x="640080" y="6446520"/>
-            <a:ext cx="8686800" cy="292608"/>
-          </a:xfrm>
-          <a:prstGeom prst="rect">
-            <a:avLst/>
-          </a:prstGeom>
-          <a:noFill/>
-          <a:ln/>
-        </p:spPr>
-        <p:txBody>
-          <a:bodyPr wrap="square" lIns="0" tIns="0" rIns="0" bIns="0" rtlCol="0" anchor="ctr"/>
-          <a:lstStyle/>
-          <a:p>
-            <a:pPr algn="l" indent="0" marL="0">
-              <a:buNone/>
-            </a:pPr>
-            <a:r>
-              <a:rPr lang="en-US" sz="900" dirty="0">
-                <a:solidFill>
-                  <a:srgbClr val="5D5D72"/>
-                </a:solidFill>
-                <a:latin typeface="Calibri" pitchFamily="34" charset="0"/>
-                <a:ea typeface="Calibri" pitchFamily="34" charset="-122"/>
-                <a:cs typeface="Calibri" pitchFamily="34" charset="-120"/>
-              </a:rPr>
-              <a:t>Usman Akram  •  COMSATS University Islamabad</a:t>
-            </a:r>
-            <a:endParaRPr lang="en-US" sz="900" dirty="0"/>
-          </a:p>
-        </p:txBody>
-      </p:sp>
-      <p:sp>
-        <p:nvSpPr>
-          <p:cNvPr id="7" name="Text 5"/>
-          <p:cNvSpPr txBox="1"/>
-          <p:nvPr/>
-        </p:nvSpPr>
-        <p:spPr>
-          <a:xfrm>
-            <a:off x="11155680" y="6446520"/>
-            <a:ext cx="457200" cy="292608"/>
-          </a:xfrm>
-          <a:prstGeom prst="rect">
-            <a:avLst/>
-          </a:prstGeom>
-          <a:noFill/>
-          <a:ln/>
-        </p:spPr>
-        <p:txBody>
-          <a:bodyPr wrap="square" lIns="0" tIns="0" rIns="0" bIns="0" rtlCol="0" anchor="ctr"/>
-          <a:lstStyle/>
-          <a:p>
-            <a:pPr algn="r" indent="0" marL="0">
-              <a:buNone/>
-            </a:pPr>
-            <a:r>
-              <a:rPr lang="en-US" sz="900" dirty="0">
-                <a:solidFill>
-                  <a:srgbClr val="5D5D72"/>
-                </a:solidFill>
-                <a:latin typeface="Calibri" pitchFamily="34" charset="0"/>
-                <a:ea typeface="Calibri" pitchFamily="34" charset="-122"/>
-                <a:cs typeface="Calibri" pitchFamily="34" charset="-120"/>
-              </a:rPr>
-              <a:t>27</a:t>
-            </a:r>
-            <a:endParaRPr lang="en-US" sz="900" dirty="0"/>
+          <p:cNvPr id="8" name="cuinotes-footer-mark"/>
+          <p:cNvSpPr txBox="1"/>
+          <p:nvPr/>
+        </p:nvSpPr>
+        <p:spPr>
+          <a:xfrm>
+            <a:off x="9951720" y="6455664"/>
+            <a:ext cx="2011680" cy="292608"/>
+          </a:xfrm>
+          <a:prstGeom prst="rect">
+            <a:avLst/>
+          </a:prstGeom>
+          <a:noFill/>
+        </p:spPr>
+        <p:txBody>
+          <a:bodyPr wrap="none" lIns="0" rIns="0" tIns="0" bIns="0">
+            <a:spAutoFit/>
+          </a:bodyPr>
+          <a:lstStyle/>
+          <a:p>
+            <a:pPr algn="r"/>
+            <a:r>
+              <a:rPr sz="1000">
+                <a:solidFill>
+                  <a:srgbClr val="8A939B"/>
+                </a:solidFill>
+                <a:hlinkClick r:id="rId3"/>
+              </a:rPr>
+              <a:t>cuinotes.com</a:t>
+            </a:r>
+            <a:r>
+              <a:rPr sz="1000">
+                <a:solidFill>
+                  <a:srgbClr val="8A939B"/>
+                </a:solidFill>
+              </a:rPr>
+              <a:t>  ·  27</a:t>
+            </a:r>
           </a:p>
         </p:txBody>
       </p:sp>
@@ -12084,6 +11528,10 @@
           </a:solidFill>
           <a:ln/>
         </p:spPr>
+        <p:txBody>
+          <a:bodyPr/>
+          <a:p/>
+        </p:txBody>
       </p:sp>
       <p:sp>
         <p:nvSpPr>
@@ -12348,79 +11796,44 @@
       </p:sp>
       <p:sp>
         <p:nvSpPr>
-          <p:cNvPr id="7" name="Text 5"/>
-          <p:cNvSpPr txBox="1"/>
-          <p:nvPr/>
-        </p:nvSpPr>
-        <p:spPr>
-          <a:xfrm>
-            <a:off x="640080" y="6446520"/>
-            <a:ext cx="8686800" cy="292608"/>
-          </a:xfrm>
-          <a:prstGeom prst="rect">
-            <a:avLst/>
-          </a:prstGeom>
-          <a:noFill/>
-          <a:ln/>
-        </p:spPr>
-        <p:txBody>
-          <a:bodyPr wrap="square" lIns="0" tIns="0" rIns="0" bIns="0" rtlCol="0" anchor="ctr"/>
-          <a:lstStyle/>
-          <a:p>
-            <a:pPr algn="l" indent="0" marL="0">
-              <a:buNone/>
-            </a:pPr>
-            <a:r>
-              <a:rPr lang="en-US" sz="900" dirty="0">
-                <a:solidFill>
-                  <a:srgbClr val="5D5D72"/>
-                </a:solidFill>
-                <a:latin typeface="Calibri" pitchFamily="34" charset="0"/>
-                <a:ea typeface="Calibri" pitchFamily="34" charset="-122"/>
-                <a:cs typeface="Calibri" pitchFamily="34" charset="-120"/>
-              </a:rPr>
-              <a:t>Usman Akram  •  COMSATS University Islamabad</a:t>
-            </a:r>
-            <a:endParaRPr lang="en-US" sz="900" dirty="0"/>
-          </a:p>
-        </p:txBody>
-      </p:sp>
-      <p:sp>
-        <p:nvSpPr>
-          <p:cNvPr id="8" name="Text 6"/>
-          <p:cNvSpPr txBox="1"/>
-          <p:nvPr/>
-        </p:nvSpPr>
-        <p:spPr>
-          <a:xfrm>
-            <a:off x="11155680" y="6446520"/>
-            <a:ext cx="457200" cy="292608"/>
-          </a:xfrm>
-          <a:prstGeom prst="rect">
-            <a:avLst/>
-          </a:prstGeom>
-          <a:noFill/>
-          <a:ln/>
-        </p:spPr>
-        <p:txBody>
-          <a:bodyPr wrap="square" lIns="0" tIns="0" rIns="0" bIns="0" rtlCol="0" anchor="ctr"/>
-          <a:lstStyle/>
-          <a:p>
-            <a:pPr algn="r" indent="0" marL="0">
-              <a:buNone/>
-            </a:pPr>
-            <a:r>
-              <a:rPr lang="en-US" sz="900" dirty="0">
-                <a:solidFill>
-                  <a:srgbClr val="5D5D72"/>
-                </a:solidFill>
-                <a:latin typeface="Calibri" pitchFamily="34" charset="0"/>
-                <a:ea typeface="Calibri" pitchFamily="34" charset="-122"/>
-                <a:cs typeface="Calibri" pitchFamily="34" charset="-120"/>
-              </a:rPr>
-              <a:t>28</a:t>
-            </a:r>
-            <a:endParaRPr lang="en-US" sz="900" dirty="0"/>
+          <p:cNvPr id="9" name="cuinotes-footer-mark"/>
+          <p:cNvSpPr txBox="1"/>
+          <p:nvPr/>
+        </p:nvSpPr>
+        <p:spPr>
+          <a:xfrm>
+            <a:off x="9951720" y="6455664"/>
+            <a:ext cx="2011680" cy="292608"/>
+          </a:xfrm>
+          <a:prstGeom prst="rect">
+            <a:avLst/>
+          </a:prstGeom>
+          <a:noFill/>
+        </p:spPr>
+        <p:txBody>
+          <a:bodyPr wrap="none" lIns="0" rIns="0" tIns="0" bIns="0">
+            <a:spAutoFit/>
+          </a:bodyPr>
+          <a:lstStyle/>
+          <a:p>
+            <a:pPr algn="r"/>
+            <a:r>
+              <a:rPr sz="1000">
+                <a:solidFill>
+                  <a:srgbClr val="8A939B"/>
+                </a:solidFill>
+                <a:hlinkClick r:id="rId3"/>
+              </a:rPr>
+              <a:t>cuinotes.com</a:t>
+            </a:r>
+            <a:r>
+              <a:rPr sz="1000">
+                <a:solidFill>
+                  <a:srgbClr val="8A939B"/>
+                </a:solidFill>
+              </a:rPr>
+              <a:t>  ·  28</a:t>
+            </a:r>
           </a:p>
         </p:txBody>
       </p:sp>
@@ -12560,6 +11973,10 @@
             <a:prstDash val="solid"/>
           </a:ln>
         </p:spPr>
+        <p:txBody>
+          <a:bodyPr/>
+          <a:p/>
+        </p:txBody>
       </p:sp>
       <p:sp>
         <p:nvSpPr>
@@ -12641,79 +12058,44 @@
       </p:sp>
       <p:sp>
         <p:nvSpPr>
-          <p:cNvPr id="7" name="Text 5"/>
-          <p:cNvSpPr txBox="1"/>
-          <p:nvPr/>
-        </p:nvSpPr>
-        <p:spPr>
-          <a:xfrm>
-            <a:off x="640080" y="6446520"/>
-            <a:ext cx="8686800" cy="292608"/>
-          </a:xfrm>
-          <a:prstGeom prst="rect">
-            <a:avLst/>
-          </a:prstGeom>
-          <a:noFill/>
-          <a:ln/>
-        </p:spPr>
-        <p:txBody>
-          <a:bodyPr wrap="square" lIns="0" tIns="0" rIns="0" bIns="0" rtlCol="0" anchor="ctr"/>
-          <a:lstStyle/>
-          <a:p>
-            <a:pPr algn="l" indent="0" marL="0">
-              <a:buNone/>
-            </a:pPr>
-            <a:r>
-              <a:rPr lang="en-US" sz="900" dirty="0">
-                <a:solidFill>
-                  <a:srgbClr val="5D5D72"/>
-                </a:solidFill>
-                <a:latin typeface="Calibri" pitchFamily="34" charset="0"/>
-                <a:ea typeface="Calibri" pitchFamily="34" charset="-122"/>
-                <a:cs typeface="Calibri" pitchFamily="34" charset="-120"/>
-              </a:rPr>
-              <a:t>Usman Akram  •  COMSATS University Islamabad</a:t>
-            </a:r>
-            <a:endParaRPr lang="en-US" sz="900" dirty="0"/>
-          </a:p>
-        </p:txBody>
-      </p:sp>
-      <p:sp>
-        <p:nvSpPr>
-          <p:cNvPr id="8" name="Text 6"/>
-          <p:cNvSpPr txBox="1"/>
-          <p:nvPr/>
-        </p:nvSpPr>
-        <p:spPr>
-          <a:xfrm>
-            <a:off x="11155680" y="6446520"/>
-            <a:ext cx="457200" cy="292608"/>
-          </a:xfrm>
-          <a:prstGeom prst="rect">
-            <a:avLst/>
-          </a:prstGeom>
-          <a:noFill/>
-          <a:ln/>
-        </p:spPr>
-        <p:txBody>
-          <a:bodyPr wrap="square" lIns="0" tIns="0" rIns="0" bIns="0" rtlCol="0" anchor="ctr"/>
-          <a:lstStyle/>
-          <a:p>
-            <a:pPr algn="r" indent="0" marL="0">
-              <a:buNone/>
-            </a:pPr>
-            <a:r>
-              <a:rPr lang="en-US" sz="900" dirty="0">
-                <a:solidFill>
-                  <a:srgbClr val="5D5D72"/>
-                </a:solidFill>
-                <a:latin typeface="Calibri" pitchFamily="34" charset="0"/>
-                <a:ea typeface="Calibri" pitchFamily="34" charset="-122"/>
-                <a:cs typeface="Calibri" pitchFamily="34" charset="-120"/>
-              </a:rPr>
-              <a:t>29</a:t>
-            </a:r>
-            <a:endParaRPr lang="en-US" sz="900" dirty="0"/>
+          <p:cNvPr id="9" name="cuinotes-footer-mark"/>
+          <p:cNvSpPr txBox="1"/>
+          <p:nvPr/>
+        </p:nvSpPr>
+        <p:spPr>
+          <a:xfrm>
+            <a:off x="9951720" y="6455664"/>
+            <a:ext cx="2011680" cy="292608"/>
+          </a:xfrm>
+          <a:prstGeom prst="rect">
+            <a:avLst/>
+          </a:prstGeom>
+          <a:noFill/>
+        </p:spPr>
+        <p:txBody>
+          <a:bodyPr wrap="none" lIns="0" rIns="0" tIns="0" bIns="0">
+            <a:spAutoFit/>
+          </a:bodyPr>
+          <a:lstStyle/>
+          <a:p>
+            <a:pPr algn="r"/>
+            <a:r>
+              <a:rPr sz="1000">
+                <a:solidFill>
+                  <a:srgbClr val="8A939B"/>
+                </a:solidFill>
+                <a:hlinkClick r:id="rId3"/>
+              </a:rPr>
+              <a:t>cuinotes.com</a:t>
+            </a:r>
+            <a:r>
+              <a:rPr sz="1000">
+                <a:solidFill>
+                  <a:srgbClr val="8A939B"/>
+                </a:solidFill>
+              </a:rPr>
+              <a:t>  ·  29</a:t>
+            </a:r>
           </a:p>
         </p:txBody>
       </p:sp>
@@ -12846,6 +12228,10 @@
           </a:solidFill>
           <a:ln/>
         </p:spPr>
+        <p:txBody>
+          <a:bodyPr/>
+          <a:p/>
+        </p:txBody>
       </p:sp>
       <p:sp>
         <p:nvSpPr>
@@ -12944,6 +12330,10 @@
           </a:solidFill>
           <a:ln/>
         </p:spPr>
+        <p:txBody>
+          <a:bodyPr/>
+          <a:p/>
+        </p:txBody>
       </p:sp>
       <p:sp>
         <p:nvSpPr>
@@ -13042,6 +12432,10 @@
           </a:solidFill>
           <a:ln/>
         </p:spPr>
+        <p:txBody>
+          <a:bodyPr/>
+          <a:p/>
+        </p:txBody>
       </p:sp>
       <p:sp>
         <p:nvSpPr>
@@ -13123,79 +12517,44 @@
       </p:sp>
       <p:sp>
         <p:nvSpPr>
-          <p:cNvPr id="13" name="Text 11"/>
-          <p:cNvSpPr txBox="1"/>
-          <p:nvPr/>
-        </p:nvSpPr>
-        <p:spPr>
-          <a:xfrm>
-            <a:off x="640080" y="6446520"/>
-            <a:ext cx="8686800" cy="292608"/>
-          </a:xfrm>
-          <a:prstGeom prst="rect">
-            <a:avLst/>
-          </a:prstGeom>
-          <a:noFill/>
-          <a:ln/>
-        </p:spPr>
-        <p:txBody>
-          <a:bodyPr wrap="square" lIns="0" tIns="0" rIns="0" bIns="0" rtlCol="0" anchor="ctr"/>
-          <a:lstStyle/>
-          <a:p>
-            <a:pPr algn="l" indent="0" marL="0">
-              <a:buNone/>
-            </a:pPr>
-            <a:r>
-              <a:rPr lang="en-US" sz="900" dirty="0">
-                <a:solidFill>
-                  <a:srgbClr val="5D5D72"/>
-                </a:solidFill>
-                <a:latin typeface="Calibri" pitchFamily="34" charset="0"/>
-                <a:ea typeface="Calibri" pitchFamily="34" charset="-122"/>
-                <a:cs typeface="Calibri" pitchFamily="34" charset="-120"/>
-              </a:rPr>
-              <a:t>Usman Akram  •  COMSATS University Islamabad</a:t>
-            </a:r>
-            <a:endParaRPr lang="en-US" sz="900" dirty="0"/>
-          </a:p>
-        </p:txBody>
-      </p:sp>
-      <p:sp>
-        <p:nvSpPr>
-          <p:cNvPr id="14" name="Text 12"/>
-          <p:cNvSpPr txBox="1"/>
-          <p:nvPr/>
-        </p:nvSpPr>
-        <p:spPr>
-          <a:xfrm>
-            <a:off x="11155680" y="6446520"/>
-            <a:ext cx="457200" cy="292608"/>
-          </a:xfrm>
-          <a:prstGeom prst="rect">
-            <a:avLst/>
-          </a:prstGeom>
-          <a:noFill/>
-          <a:ln/>
-        </p:spPr>
-        <p:txBody>
-          <a:bodyPr wrap="square" lIns="0" tIns="0" rIns="0" bIns="0" rtlCol="0" anchor="ctr"/>
-          <a:lstStyle/>
-          <a:p>
-            <a:pPr algn="r" indent="0" marL="0">
-              <a:buNone/>
-            </a:pPr>
-            <a:r>
-              <a:rPr lang="en-US" sz="900" dirty="0">
-                <a:solidFill>
-                  <a:srgbClr val="5D5D72"/>
-                </a:solidFill>
-                <a:latin typeface="Calibri" pitchFamily="34" charset="0"/>
-                <a:ea typeface="Calibri" pitchFamily="34" charset="-122"/>
-                <a:cs typeface="Calibri" pitchFamily="34" charset="-120"/>
-              </a:rPr>
-              <a:t>3</a:t>
-            </a:r>
-            <a:endParaRPr lang="en-US" sz="900" dirty="0"/>
+          <p:cNvPr id="15" name="cuinotes-footer-mark"/>
+          <p:cNvSpPr txBox="1"/>
+          <p:nvPr/>
+        </p:nvSpPr>
+        <p:spPr>
+          <a:xfrm>
+            <a:off x="9951720" y="6455664"/>
+            <a:ext cx="2011680" cy="292608"/>
+          </a:xfrm>
+          <a:prstGeom prst="rect">
+            <a:avLst/>
+          </a:prstGeom>
+          <a:noFill/>
+        </p:spPr>
+        <p:txBody>
+          <a:bodyPr wrap="none" lIns="0" rIns="0" tIns="0" bIns="0">
+            <a:spAutoFit/>
+          </a:bodyPr>
+          <a:lstStyle/>
+          <a:p>
+            <a:pPr algn="r"/>
+            <a:r>
+              <a:rPr sz="1000">
+                <a:solidFill>
+                  <a:srgbClr val="8A939B"/>
+                </a:solidFill>
+                <a:hlinkClick r:id="rId3"/>
+              </a:rPr>
+              <a:t>cuinotes.com</a:t>
+            </a:r>
+            <a:r>
+              <a:rPr sz="1000">
+                <a:solidFill>
+                  <a:srgbClr val="8A939B"/>
+                </a:solidFill>
+              </a:rPr>
+              <a:t>  ·  3</a:t>
+            </a:r>
           </a:p>
         </p:txBody>
       </p:sp>
@@ -13328,6 +12687,10 @@
           </a:solidFill>
           <a:ln/>
         </p:spPr>
+        <p:txBody>
+          <a:bodyPr/>
+          <a:p/>
+        </p:txBody>
       </p:sp>
       <p:sp>
         <p:nvSpPr>
@@ -13426,6 +12789,10 @@
           </a:solidFill>
           <a:ln/>
         </p:spPr>
+        <p:txBody>
+          <a:bodyPr/>
+          <a:p/>
+        </p:txBody>
       </p:sp>
       <p:sp>
         <p:nvSpPr>
@@ -13524,6 +12891,10 @@
           </a:solidFill>
           <a:ln/>
         </p:spPr>
+        <p:txBody>
+          <a:bodyPr/>
+          <a:p/>
+        </p:txBody>
       </p:sp>
       <p:sp>
         <p:nvSpPr>
@@ -13622,6 +12993,10 @@
           </a:solidFill>
           <a:ln/>
         </p:spPr>
+        <p:txBody>
+          <a:bodyPr/>
+          <a:p/>
+        </p:txBody>
       </p:sp>
       <p:sp>
         <p:nvSpPr>
@@ -13720,6 +13095,10 @@
           </a:solidFill>
           <a:ln/>
         </p:spPr>
+        <p:txBody>
+          <a:bodyPr/>
+          <a:p/>
+        </p:txBody>
       </p:sp>
       <p:sp>
         <p:nvSpPr>
@@ -13818,6 +13197,10 @@
           </a:solidFill>
           <a:ln/>
         </p:spPr>
+        <p:txBody>
+          <a:bodyPr/>
+          <a:p/>
+        </p:txBody>
       </p:sp>
       <p:sp>
         <p:nvSpPr>
@@ -13899,79 +13282,44 @@
       </p:sp>
       <p:sp>
         <p:nvSpPr>
-          <p:cNvPr id="22" name="Text 20"/>
-          <p:cNvSpPr txBox="1"/>
-          <p:nvPr/>
-        </p:nvSpPr>
-        <p:spPr>
-          <a:xfrm>
-            <a:off x="640080" y="6446520"/>
-            <a:ext cx="8686800" cy="292608"/>
-          </a:xfrm>
-          <a:prstGeom prst="rect">
-            <a:avLst/>
-          </a:prstGeom>
-          <a:noFill/>
-          <a:ln/>
-        </p:spPr>
-        <p:txBody>
-          <a:bodyPr wrap="square" lIns="0" tIns="0" rIns="0" bIns="0" rtlCol="0" anchor="ctr"/>
-          <a:lstStyle/>
-          <a:p>
-            <a:pPr algn="l" indent="0" marL="0">
-              <a:buNone/>
-            </a:pPr>
-            <a:r>
-              <a:rPr lang="en-US" sz="900" dirty="0">
-                <a:solidFill>
-                  <a:srgbClr val="9AA3D8"/>
-                </a:solidFill>
-                <a:latin typeface="Calibri" pitchFamily="34" charset="0"/>
-                <a:ea typeface="Calibri" pitchFamily="34" charset="-122"/>
-                <a:cs typeface="Calibri" pitchFamily="34" charset="-120"/>
-              </a:rPr>
-              <a:t>Usman Akram  •  COMSATS University Islamabad</a:t>
-            </a:r>
-            <a:endParaRPr lang="en-US" sz="900" dirty="0"/>
-          </a:p>
-        </p:txBody>
-      </p:sp>
-      <p:sp>
-        <p:nvSpPr>
-          <p:cNvPr id="23" name="Text 21"/>
-          <p:cNvSpPr txBox="1"/>
-          <p:nvPr/>
-        </p:nvSpPr>
-        <p:spPr>
-          <a:xfrm>
-            <a:off x="11155680" y="6446520"/>
-            <a:ext cx="457200" cy="292608"/>
-          </a:xfrm>
-          <a:prstGeom prst="rect">
-            <a:avLst/>
-          </a:prstGeom>
-          <a:noFill/>
-          <a:ln/>
-        </p:spPr>
-        <p:txBody>
-          <a:bodyPr wrap="square" lIns="0" tIns="0" rIns="0" bIns="0" rtlCol="0" anchor="ctr"/>
-          <a:lstStyle/>
-          <a:p>
-            <a:pPr algn="r" indent="0" marL="0">
-              <a:buNone/>
-            </a:pPr>
-            <a:r>
-              <a:rPr lang="en-US" sz="900" dirty="0">
-                <a:solidFill>
-                  <a:srgbClr val="9AA3D8"/>
-                </a:solidFill>
-                <a:latin typeface="Calibri" pitchFamily="34" charset="0"/>
-                <a:ea typeface="Calibri" pitchFamily="34" charset="-122"/>
-                <a:cs typeface="Calibri" pitchFamily="34" charset="-120"/>
-              </a:rPr>
-              <a:t>30</a:t>
-            </a:r>
-            <a:endParaRPr lang="en-US" sz="900" dirty="0"/>
+          <p:cNvPr id="24" name="cuinotes-footer-mark"/>
+          <p:cNvSpPr txBox="1"/>
+          <p:nvPr/>
+        </p:nvSpPr>
+        <p:spPr>
+          <a:xfrm>
+            <a:off x="9951720" y="6455664"/>
+            <a:ext cx="2011680" cy="292608"/>
+          </a:xfrm>
+          <a:prstGeom prst="rect">
+            <a:avLst/>
+          </a:prstGeom>
+          <a:noFill/>
+        </p:spPr>
+        <p:txBody>
+          <a:bodyPr wrap="none" lIns="0" rIns="0" tIns="0" bIns="0">
+            <a:spAutoFit/>
+          </a:bodyPr>
+          <a:lstStyle/>
+          <a:p>
+            <a:pPr algn="r"/>
+            <a:r>
+              <a:rPr sz="1000">
+                <a:solidFill>
+                  <a:srgbClr val="8A939B"/>
+                </a:solidFill>
+                <a:hlinkClick r:id="rId3"/>
+              </a:rPr>
+              <a:t>cuinotes.com</a:t>
+            </a:r>
+            <a:r>
+              <a:rPr sz="1000">
+                <a:solidFill>
+                  <a:srgbClr val="8A939B"/>
+                </a:solidFill>
+              </a:rPr>
+              <a:t>  ·  30</a:t>
+            </a:r>
           </a:p>
         </p:txBody>
       </p:sp>
@@ -14106,6 +13454,10 @@
           </a:solidFill>
           <a:ln/>
         </p:spPr>
+        <p:txBody>
+          <a:bodyPr/>
+          <a:p/>
+        </p:txBody>
       </p:sp>
       <p:sp>
         <p:nvSpPr>
@@ -14379,79 +13731,44 @@
       </p:sp>
       <p:sp>
         <p:nvSpPr>
-          <p:cNvPr id="7" name="Text 5"/>
-          <p:cNvSpPr txBox="1"/>
-          <p:nvPr/>
-        </p:nvSpPr>
-        <p:spPr>
-          <a:xfrm>
-            <a:off x="640080" y="6446520"/>
-            <a:ext cx="8686800" cy="292608"/>
-          </a:xfrm>
-          <a:prstGeom prst="rect">
-            <a:avLst/>
-          </a:prstGeom>
-          <a:noFill/>
-          <a:ln/>
-        </p:spPr>
-        <p:txBody>
-          <a:bodyPr wrap="square" lIns="0" tIns="0" rIns="0" bIns="0" rtlCol="0" anchor="ctr"/>
-          <a:lstStyle/>
-          <a:p>
-            <a:pPr algn="l" indent="0" marL="0">
-              <a:buNone/>
-            </a:pPr>
-            <a:r>
-              <a:rPr lang="en-US" sz="900" dirty="0">
-                <a:solidFill>
-                  <a:srgbClr val="5D5D72"/>
-                </a:solidFill>
-                <a:latin typeface="Calibri" pitchFamily="34" charset="0"/>
-                <a:ea typeface="Calibri" pitchFamily="34" charset="-122"/>
-                <a:cs typeface="Calibri" pitchFamily="34" charset="-120"/>
-              </a:rPr>
-              <a:t>Usman Akram  •  COMSATS University Islamabad</a:t>
-            </a:r>
-            <a:endParaRPr lang="en-US" sz="900" dirty="0"/>
-          </a:p>
-        </p:txBody>
-      </p:sp>
-      <p:sp>
-        <p:nvSpPr>
-          <p:cNvPr id="8" name="Text 6"/>
-          <p:cNvSpPr txBox="1"/>
-          <p:nvPr/>
-        </p:nvSpPr>
-        <p:spPr>
-          <a:xfrm>
-            <a:off x="11155680" y="6446520"/>
-            <a:ext cx="457200" cy="292608"/>
-          </a:xfrm>
-          <a:prstGeom prst="rect">
-            <a:avLst/>
-          </a:prstGeom>
-          <a:noFill/>
-          <a:ln/>
-        </p:spPr>
-        <p:txBody>
-          <a:bodyPr wrap="square" lIns="0" tIns="0" rIns="0" bIns="0" rtlCol="0" anchor="ctr"/>
-          <a:lstStyle/>
-          <a:p>
-            <a:pPr algn="r" indent="0" marL="0">
-              <a:buNone/>
-            </a:pPr>
-            <a:r>
-              <a:rPr lang="en-US" sz="900" dirty="0">
-                <a:solidFill>
-                  <a:srgbClr val="5D5D72"/>
-                </a:solidFill>
-                <a:latin typeface="Calibri" pitchFamily="34" charset="0"/>
-                <a:ea typeface="Calibri" pitchFamily="34" charset="-122"/>
-                <a:cs typeface="Calibri" pitchFamily="34" charset="-120"/>
-              </a:rPr>
-              <a:t>4</a:t>
-            </a:r>
-            <a:endParaRPr lang="en-US" sz="900" dirty="0"/>
+          <p:cNvPr id="9" name="cuinotes-footer-mark"/>
+          <p:cNvSpPr txBox="1"/>
+          <p:nvPr/>
+        </p:nvSpPr>
+        <p:spPr>
+          <a:xfrm>
+            <a:off x="9951720" y="6455664"/>
+            <a:ext cx="2011680" cy="292608"/>
+          </a:xfrm>
+          <a:prstGeom prst="rect">
+            <a:avLst/>
+          </a:prstGeom>
+          <a:noFill/>
+        </p:spPr>
+        <p:txBody>
+          <a:bodyPr wrap="none" lIns="0" rIns="0" tIns="0" bIns="0">
+            <a:spAutoFit/>
+          </a:bodyPr>
+          <a:lstStyle/>
+          <a:p>
+            <a:pPr algn="r"/>
+            <a:r>
+              <a:rPr sz="1000">
+                <a:solidFill>
+                  <a:srgbClr val="8A939B"/>
+                </a:solidFill>
+                <a:hlinkClick r:id="rId3"/>
+              </a:rPr>
+              <a:t>cuinotes.com</a:t>
+            </a:r>
+            <a:r>
+              <a:rPr sz="1000">
+                <a:solidFill>
+                  <a:srgbClr val="8A939B"/>
+                </a:solidFill>
+              </a:rPr>
+              <a:t>  ·  4</a:t>
+            </a:r>
           </a:p>
         </p:txBody>
       </p:sp>
@@ -14586,6 +13903,10 @@
           </a:solidFill>
           <a:ln/>
         </p:spPr>
+        <p:txBody>
+          <a:bodyPr/>
+          <a:p/>
+        </p:txBody>
       </p:sp>
       <p:sp>
         <p:nvSpPr>
@@ -14850,79 +14171,44 @@
       </p:sp>
       <p:sp>
         <p:nvSpPr>
-          <p:cNvPr id="7" name="Text 5"/>
-          <p:cNvSpPr txBox="1"/>
-          <p:nvPr/>
-        </p:nvSpPr>
-        <p:spPr>
-          <a:xfrm>
-            <a:off x="640080" y="6446520"/>
-            <a:ext cx="8686800" cy="292608"/>
-          </a:xfrm>
-          <a:prstGeom prst="rect">
-            <a:avLst/>
-          </a:prstGeom>
-          <a:noFill/>
-          <a:ln/>
-        </p:spPr>
-        <p:txBody>
-          <a:bodyPr wrap="square" lIns="0" tIns="0" rIns="0" bIns="0" rtlCol="0" anchor="ctr"/>
-          <a:lstStyle/>
-          <a:p>
-            <a:pPr algn="l" indent="0" marL="0">
-              <a:buNone/>
-            </a:pPr>
-            <a:r>
-              <a:rPr lang="en-US" sz="900" dirty="0">
-                <a:solidFill>
-                  <a:srgbClr val="5D5D72"/>
-                </a:solidFill>
-                <a:latin typeface="Calibri" pitchFamily="34" charset="0"/>
-                <a:ea typeface="Calibri" pitchFamily="34" charset="-122"/>
-                <a:cs typeface="Calibri" pitchFamily="34" charset="-120"/>
-              </a:rPr>
-              <a:t>Usman Akram  •  COMSATS University Islamabad</a:t>
-            </a:r>
-            <a:endParaRPr lang="en-US" sz="900" dirty="0"/>
-          </a:p>
-        </p:txBody>
-      </p:sp>
-      <p:sp>
-        <p:nvSpPr>
-          <p:cNvPr id="8" name="Text 6"/>
-          <p:cNvSpPr txBox="1"/>
-          <p:nvPr/>
-        </p:nvSpPr>
-        <p:spPr>
-          <a:xfrm>
-            <a:off x="11155680" y="6446520"/>
-            <a:ext cx="457200" cy="292608"/>
-          </a:xfrm>
-          <a:prstGeom prst="rect">
-            <a:avLst/>
-          </a:prstGeom>
-          <a:noFill/>
-          <a:ln/>
-        </p:spPr>
-        <p:txBody>
-          <a:bodyPr wrap="square" lIns="0" tIns="0" rIns="0" bIns="0" rtlCol="0" anchor="ctr"/>
-          <a:lstStyle/>
-          <a:p>
-            <a:pPr algn="r" indent="0" marL="0">
-              <a:buNone/>
-            </a:pPr>
-            <a:r>
-              <a:rPr lang="en-US" sz="900" dirty="0">
-                <a:solidFill>
-                  <a:srgbClr val="5D5D72"/>
-                </a:solidFill>
-                <a:latin typeface="Calibri" pitchFamily="34" charset="0"/>
-                <a:ea typeface="Calibri" pitchFamily="34" charset="-122"/>
-                <a:cs typeface="Calibri" pitchFamily="34" charset="-120"/>
-              </a:rPr>
-              <a:t>5</a:t>
-            </a:r>
-            <a:endParaRPr lang="en-US" sz="900" dirty="0"/>
+          <p:cNvPr id="9" name="cuinotes-footer-mark"/>
+          <p:cNvSpPr txBox="1"/>
+          <p:nvPr/>
+        </p:nvSpPr>
+        <p:spPr>
+          <a:xfrm>
+            <a:off x="9951720" y="6455664"/>
+            <a:ext cx="2011680" cy="292608"/>
+          </a:xfrm>
+          <a:prstGeom prst="rect">
+            <a:avLst/>
+          </a:prstGeom>
+          <a:noFill/>
+        </p:spPr>
+        <p:txBody>
+          <a:bodyPr wrap="none" lIns="0" rIns="0" tIns="0" bIns="0">
+            <a:spAutoFit/>
+          </a:bodyPr>
+          <a:lstStyle/>
+          <a:p>
+            <a:pPr algn="r"/>
+            <a:r>
+              <a:rPr sz="1000">
+                <a:solidFill>
+                  <a:srgbClr val="8A939B"/>
+                </a:solidFill>
+                <a:hlinkClick r:id="rId3"/>
+              </a:rPr>
+              <a:t>cuinotes.com</a:t>
+            </a:r>
+            <a:r>
+              <a:rPr sz="1000">
+                <a:solidFill>
+                  <a:srgbClr val="8A939B"/>
+                </a:solidFill>
+              </a:rPr>
+              <a:t>  ·  5</a:t>
+            </a:r>
           </a:p>
         </p:txBody>
       </p:sp>
@@ -15059,6 +14345,10 @@
             <a:tailEnd type="triangle"/>
           </a:ln>
         </p:spPr>
+        <p:txBody>
+          <a:bodyPr/>
+          <a:p/>
+        </p:txBody>
       </p:sp>
       <p:sp>
         <p:nvSpPr>
@@ -15120,6 +14410,10 @@
           </a:solidFill>
           <a:ln/>
         </p:spPr>
+        <p:txBody>
+          <a:bodyPr/>
+          <a:p/>
+        </p:txBody>
       </p:sp>
       <p:sp>
         <p:nvSpPr>
@@ -15182,6 +14476,10 @@
           </a:solidFill>
           <a:ln/>
         </p:spPr>
+        <p:txBody>
+          <a:bodyPr/>
+          <a:p/>
+        </p:txBody>
       </p:sp>
       <p:sp>
         <p:nvSpPr>
@@ -15244,6 +14542,10 @@
           </a:solidFill>
           <a:ln/>
         </p:spPr>
+        <p:txBody>
+          <a:bodyPr/>
+          <a:p/>
+        </p:txBody>
       </p:sp>
       <p:sp>
         <p:nvSpPr>
@@ -15326,6 +14628,10 @@
           </a:solidFill>
           <a:ln/>
         </p:spPr>
+        <p:txBody>
+          <a:bodyPr/>
+          <a:p/>
+        </p:txBody>
       </p:sp>
       <p:sp>
         <p:nvSpPr>
@@ -15408,6 +14714,10 @@
           </a:solidFill>
           <a:ln/>
         </p:spPr>
+        <p:txBody>
+          <a:bodyPr/>
+          <a:p/>
+        </p:txBody>
       </p:sp>
       <p:sp>
         <p:nvSpPr>
@@ -15570,79 +14880,44 @@
       </p:sp>
       <p:sp>
         <p:nvSpPr>
-          <p:cNvPr id="17" name="Text 15"/>
-          <p:cNvSpPr txBox="1"/>
-          <p:nvPr/>
-        </p:nvSpPr>
-        <p:spPr>
-          <a:xfrm>
-            <a:off x="640080" y="6446520"/>
-            <a:ext cx="8686800" cy="292608"/>
-          </a:xfrm>
-          <a:prstGeom prst="rect">
-            <a:avLst/>
-          </a:prstGeom>
-          <a:noFill/>
-          <a:ln/>
-        </p:spPr>
-        <p:txBody>
-          <a:bodyPr wrap="square" lIns="0" tIns="0" rIns="0" bIns="0" rtlCol="0" anchor="ctr"/>
-          <a:lstStyle/>
-          <a:p>
-            <a:pPr algn="l" indent="0" marL="0">
-              <a:buNone/>
-            </a:pPr>
-            <a:r>
-              <a:rPr lang="en-US" sz="900" dirty="0">
-                <a:solidFill>
-                  <a:srgbClr val="5D5D72"/>
-                </a:solidFill>
-                <a:latin typeface="Calibri" pitchFamily="34" charset="0"/>
-                <a:ea typeface="Calibri" pitchFamily="34" charset="-122"/>
-                <a:cs typeface="Calibri" pitchFamily="34" charset="-120"/>
-              </a:rPr>
-              <a:t>Usman Akram  •  COMSATS University Islamabad</a:t>
-            </a:r>
-            <a:endParaRPr lang="en-US" sz="900" dirty="0"/>
-          </a:p>
-        </p:txBody>
-      </p:sp>
-      <p:sp>
-        <p:nvSpPr>
-          <p:cNvPr id="18" name="Text 16"/>
-          <p:cNvSpPr txBox="1"/>
-          <p:nvPr/>
-        </p:nvSpPr>
-        <p:spPr>
-          <a:xfrm>
-            <a:off x="11155680" y="6446520"/>
-            <a:ext cx="457200" cy="292608"/>
-          </a:xfrm>
-          <a:prstGeom prst="rect">
-            <a:avLst/>
-          </a:prstGeom>
-          <a:noFill/>
-          <a:ln/>
-        </p:spPr>
-        <p:txBody>
-          <a:bodyPr wrap="square" lIns="0" tIns="0" rIns="0" bIns="0" rtlCol="0" anchor="ctr"/>
-          <a:lstStyle/>
-          <a:p>
-            <a:pPr algn="r" indent="0" marL="0">
-              <a:buNone/>
-            </a:pPr>
-            <a:r>
-              <a:rPr lang="en-US" sz="900" dirty="0">
-                <a:solidFill>
-                  <a:srgbClr val="5D5D72"/>
-                </a:solidFill>
-                <a:latin typeface="Calibri" pitchFamily="34" charset="0"/>
-                <a:ea typeface="Calibri" pitchFamily="34" charset="-122"/>
-                <a:cs typeface="Calibri" pitchFamily="34" charset="-120"/>
-              </a:rPr>
-              <a:t>6</a:t>
-            </a:r>
-            <a:endParaRPr lang="en-US" sz="900" dirty="0"/>
+          <p:cNvPr id="19" name="cuinotes-footer-mark"/>
+          <p:cNvSpPr txBox="1"/>
+          <p:nvPr/>
+        </p:nvSpPr>
+        <p:spPr>
+          <a:xfrm>
+            <a:off x="9951720" y="6455664"/>
+            <a:ext cx="2011680" cy="292608"/>
+          </a:xfrm>
+          <a:prstGeom prst="rect">
+            <a:avLst/>
+          </a:prstGeom>
+          <a:noFill/>
+        </p:spPr>
+        <p:txBody>
+          <a:bodyPr wrap="none" lIns="0" rIns="0" tIns="0" bIns="0">
+            <a:spAutoFit/>
+          </a:bodyPr>
+          <a:lstStyle/>
+          <a:p>
+            <a:pPr algn="r"/>
+            <a:r>
+              <a:rPr sz="1000">
+                <a:solidFill>
+                  <a:srgbClr val="8A939B"/>
+                </a:solidFill>
+                <a:hlinkClick r:id="rId3"/>
+              </a:rPr>
+              <a:t>cuinotes.com</a:t>
+            </a:r>
+            <a:r>
+              <a:rPr sz="1000">
+                <a:solidFill>
+                  <a:srgbClr val="8A939B"/>
+                </a:solidFill>
+              </a:rPr>
+              <a:t>  ·  6</a:t>
+            </a:r>
           </a:p>
         </p:txBody>
       </p:sp>
@@ -17220,79 +16495,44 @@
       </p:graphicFrame>
       <p:sp>
         <p:nvSpPr>
-          <p:cNvPr id="5" name="Text 2"/>
-          <p:cNvSpPr txBox="1"/>
-          <p:nvPr/>
-        </p:nvSpPr>
-        <p:spPr>
-          <a:xfrm>
-            <a:off x="640080" y="6446520"/>
-            <a:ext cx="8686800" cy="292608"/>
-          </a:xfrm>
-          <a:prstGeom prst="rect">
-            <a:avLst/>
-          </a:prstGeom>
-          <a:noFill/>
-          <a:ln/>
-        </p:spPr>
-        <p:txBody>
-          <a:bodyPr wrap="square" lIns="0" tIns="0" rIns="0" bIns="0" rtlCol="0" anchor="ctr"/>
-          <a:lstStyle/>
-          <a:p>
-            <a:pPr algn="l" indent="0" marL="0">
-              <a:buNone/>
-            </a:pPr>
-            <a:r>
-              <a:rPr lang="en-US" sz="900" dirty="0">
-                <a:solidFill>
-                  <a:srgbClr val="5D5D72"/>
-                </a:solidFill>
-                <a:latin typeface="Calibri" pitchFamily="34" charset="0"/>
-                <a:ea typeface="Calibri" pitchFamily="34" charset="-122"/>
-                <a:cs typeface="Calibri" pitchFamily="34" charset="-120"/>
-              </a:rPr>
-              <a:t>Usman Akram  •  COMSATS University Islamabad</a:t>
-            </a:r>
-            <a:endParaRPr lang="en-US" sz="900" dirty="0"/>
-          </a:p>
-        </p:txBody>
-      </p:sp>
-      <p:sp>
-        <p:nvSpPr>
-          <p:cNvPr id="6" name="Text 3"/>
-          <p:cNvSpPr txBox="1"/>
-          <p:nvPr/>
-        </p:nvSpPr>
-        <p:spPr>
-          <a:xfrm>
-            <a:off x="11155680" y="6446520"/>
-            <a:ext cx="457200" cy="292608"/>
-          </a:xfrm>
-          <a:prstGeom prst="rect">
-            <a:avLst/>
-          </a:prstGeom>
-          <a:noFill/>
-          <a:ln/>
-        </p:spPr>
-        <p:txBody>
-          <a:bodyPr wrap="square" lIns="0" tIns="0" rIns="0" bIns="0" rtlCol="0" anchor="ctr"/>
-          <a:lstStyle/>
-          <a:p>
-            <a:pPr algn="r" indent="0" marL="0">
-              <a:buNone/>
-            </a:pPr>
-            <a:r>
-              <a:rPr lang="en-US" sz="900" dirty="0">
-                <a:solidFill>
-                  <a:srgbClr val="5D5D72"/>
-                </a:solidFill>
-                <a:latin typeface="Calibri" pitchFamily="34" charset="0"/>
-                <a:ea typeface="Calibri" pitchFamily="34" charset="-122"/>
-                <a:cs typeface="Calibri" pitchFamily="34" charset="-120"/>
-              </a:rPr>
-              <a:t>7</a:t>
-            </a:r>
-            <a:endParaRPr lang="en-US" sz="900" dirty="0"/>
+          <p:cNvPr id="9" name="cuinotes-footer-mark"/>
+          <p:cNvSpPr txBox="1"/>
+          <p:nvPr/>
+        </p:nvSpPr>
+        <p:spPr>
+          <a:xfrm>
+            <a:off x="9951720" y="6455664"/>
+            <a:ext cx="2011680" cy="292608"/>
+          </a:xfrm>
+          <a:prstGeom prst="rect">
+            <a:avLst/>
+          </a:prstGeom>
+          <a:noFill/>
+        </p:spPr>
+        <p:txBody>
+          <a:bodyPr wrap="none" lIns="0" rIns="0" tIns="0" bIns="0">
+            <a:spAutoFit/>
+          </a:bodyPr>
+          <a:lstStyle/>
+          <a:p>
+            <a:pPr algn="r"/>
+            <a:r>
+              <a:rPr sz="1000">
+                <a:solidFill>
+                  <a:srgbClr val="8A939B"/>
+                </a:solidFill>
+                <a:hlinkClick r:id="rId3"/>
+              </a:rPr>
+              <a:t>cuinotes.com</a:t>
+            </a:r>
+            <a:r>
+              <a:rPr sz="1000">
+                <a:solidFill>
+                  <a:srgbClr val="8A939B"/>
+                </a:solidFill>
+              </a:rPr>
+              <a:t>  ·  7</a:t>
+            </a:r>
           </a:p>
         </p:txBody>
       </p:sp>
@@ -17432,6 +16672,10 @@
             <a:prstDash val="solid"/>
           </a:ln>
         </p:spPr>
+        <p:txBody>
+          <a:bodyPr/>
+          <a:p/>
+        </p:txBody>
       </p:sp>
       <p:sp>
         <p:nvSpPr>
@@ -17513,79 +16757,44 @@
       </p:sp>
       <p:sp>
         <p:nvSpPr>
-          <p:cNvPr id="7" name="Text 5"/>
-          <p:cNvSpPr txBox="1"/>
-          <p:nvPr/>
-        </p:nvSpPr>
-        <p:spPr>
-          <a:xfrm>
-            <a:off x="640080" y="6446520"/>
-            <a:ext cx="8686800" cy="292608"/>
-          </a:xfrm>
-          <a:prstGeom prst="rect">
-            <a:avLst/>
-          </a:prstGeom>
-          <a:noFill/>
-          <a:ln/>
-        </p:spPr>
-        <p:txBody>
-          <a:bodyPr wrap="square" lIns="0" tIns="0" rIns="0" bIns="0" rtlCol="0" anchor="ctr"/>
-          <a:lstStyle/>
-          <a:p>
-            <a:pPr algn="l" indent="0" marL="0">
-              <a:buNone/>
-            </a:pPr>
-            <a:r>
-              <a:rPr lang="en-US" sz="900" dirty="0">
-                <a:solidFill>
-                  <a:srgbClr val="5D5D72"/>
-                </a:solidFill>
-                <a:latin typeface="Calibri" pitchFamily="34" charset="0"/>
-                <a:ea typeface="Calibri" pitchFamily="34" charset="-122"/>
-                <a:cs typeface="Calibri" pitchFamily="34" charset="-120"/>
-              </a:rPr>
-              <a:t>Usman Akram  •  COMSATS University Islamabad</a:t>
-            </a:r>
-            <a:endParaRPr lang="en-US" sz="900" dirty="0"/>
-          </a:p>
-        </p:txBody>
-      </p:sp>
-      <p:sp>
-        <p:nvSpPr>
-          <p:cNvPr id="8" name="Text 6"/>
-          <p:cNvSpPr txBox="1"/>
-          <p:nvPr/>
-        </p:nvSpPr>
-        <p:spPr>
-          <a:xfrm>
-            <a:off x="11155680" y="6446520"/>
-            <a:ext cx="457200" cy="292608"/>
-          </a:xfrm>
-          <a:prstGeom prst="rect">
-            <a:avLst/>
-          </a:prstGeom>
-          <a:noFill/>
-          <a:ln/>
-        </p:spPr>
-        <p:txBody>
-          <a:bodyPr wrap="square" lIns="0" tIns="0" rIns="0" bIns="0" rtlCol="0" anchor="ctr"/>
-          <a:lstStyle/>
-          <a:p>
-            <a:pPr algn="r" indent="0" marL="0">
-              <a:buNone/>
-            </a:pPr>
-            <a:r>
-              <a:rPr lang="en-US" sz="900" dirty="0">
-                <a:solidFill>
-                  <a:srgbClr val="5D5D72"/>
-                </a:solidFill>
-                <a:latin typeface="Calibri" pitchFamily="34" charset="0"/>
-                <a:ea typeface="Calibri" pitchFamily="34" charset="-122"/>
-                <a:cs typeface="Calibri" pitchFamily="34" charset="-120"/>
-              </a:rPr>
-              <a:t>8</a:t>
-            </a:r>
-            <a:endParaRPr lang="en-US" sz="900" dirty="0"/>
+          <p:cNvPr id="9" name="cuinotes-footer-mark"/>
+          <p:cNvSpPr txBox="1"/>
+          <p:nvPr/>
+        </p:nvSpPr>
+        <p:spPr>
+          <a:xfrm>
+            <a:off x="9951720" y="6455664"/>
+            <a:ext cx="2011680" cy="292608"/>
+          </a:xfrm>
+          <a:prstGeom prst="rect">
+            <a:avLst/>
+          </a:prstGeom>
+          <a:noFill/>
+        </p:spPr>
+        <p:txBody>
+          <a:bodyPr wrap="none" lIns="0" rIns="0" tIns="0" bIns="0">
+            <a:spAutoFit/>
+          </a:bodyPr>
+          <a:lstStyle/>
+          <a:p>
+            <a:pPr algn="r"/>
+            <a:r>
+              <a:rPr sz="1000">
+                <a:solidFill>
+                  <a:srgbClr val="8A939B"/>
+                </a:solidFill>
+                <a:hlinkClick r:id="rId3"/>
+              </a:rPr>
+              <a:t>cuinotes.com</a:t>
+            </a:r>
+            <a:r>
+              <a:rPr sz="1000">
+                <a:solidFill>
+                  <a:srgbClr val="8A939B"/>
+                </a:solidFill>
+              </a:rPr>
+              <a:t>  ·  8</a:t>
+            </a:r>
           </a:p>
         </p:txBody>
       </p:sp>
@@ -17725,6 +16934,10 @@
             <a:prstDash val="solid"/>
           </a:ln>
         </p:spPr>
+        <p:txBody>
+          <a:bodyPr/>
+          <a:p/>
+        </p:txBody>
       </p:sp>
       <p:sp>
         <p:nvSpPr>
@@ -17876,6 +17089,10 @@
             <a:prstDash val="solid"/>
           </a:ln>
         </p:spPr>
+        <p:txBody>
+          <a:bodyPr/>
+          <a:p/>
+        </p:txBody>
       </p:sp>
       <p:sp>
         <p:nvSpPr>
@@ -18003,79 +17220,44 @@
       </p:sp>
       <p:sp>
         <p:nvSpPr>
-          <p:cNvPr id="10" name="Text 8"/>
-          <p:cNvSpPr txBox="1"/>
-          <p:nvPr/>
-        </p:nvSpPr>
-        <p:spPr>
-          <a:xfrm>
-            <a:off x="640080" y="6446520"/>
-            <a:ext cx="8686800" cy="292608"/>
-          </a:xfrm>
-          <a:prstGeom prst="rect">
-            <a:avLst/>
-          </a:prstGeom>
-          <a:noFill/>
-          <a:ln/>
-        </p:spPr>
-        <p:txBody>
-          <a:bodyPr wrap="square" lIns="0" tIns="0" rIns="0" bIns="0" rtlCol="0" anchor="ctr"/>
-          <a:lstStyle/>
-          <a:p>
-            <a:pPr algn="l" indent="0" marL="0">
-              <a:buNone/>
-            </a:pPr>
-            <a:r>
-              <a:rPr lang="en-US" sz="900" dirty="0">
-                <a:solidFill>
-                  <a:srgbClr val="5D5D72"/>
-                </a:solidFill>
-                <a:latin typeface="Calibri" pitchFamily="34" charset="0"/>
-                <a:ea typeface="Calibri" pitchFamily="34" charset="-122"/>
-                <a:cs typeface="Calibri" pitchFamily="34" charset="-120"/>
-              </a:rPr>
-              <a:t>Usman Akram  •  COMSATS University Islamabad</a:t>
-            </a:r>
-            <a:endParaRPr lang="en-US" sz="900" dirty="0"/>
-          </a:p>
-        </p:txBody>
-      </p:sp>
-      <p:sp>
-        <p:nvSpPr>
-          <p:cNvPr id="11" name="Text 9"/>
-          <p:cNvSpPr txBox="1"/>
-          <p:nvPr/>
-        </p:nvSpPr>
-        <p:spPr>
-          <a:xfrm>
-            <a:off x="11155680" y="6446520"/>
-            <a:ext cx="457200" cy="292608"/>
-          </a:xfrm>
-          <a:prstGeom prst="rect">
-            <a:avLst/>
-          </a:prstGeom>
-          <a:noFill/>
-          <a:ln/>
-        </p:spPr>
-        <p:txBody>
-          <a:bodyPr wrap="square" lIns="0" tIns="0" rIns="0" bIns="0" rtlCol="0" anchor="ctr"/>
-          <a:lstStyle/>
-          <a:p>
-            <a:pPr algn="r" indent="0" marL="0">
-              <a:buNone/>
-            </a:pPr>
-            <a:r>
-              <a:rPr lang="en-US" sz="900" dirty="0">
-                <a:solidFill>
-                  <a:srgbClr val="5D5D72"/>
-                </a:solidFill>
-                <a:latin typeface="Calibri" pitchFamily="34" charset="0"/>
-                <a:ea typeface="Calibri" pitchFamily="34" charset="-122"/>
-                <a:cs typeface="Calibri" pitchFamily="34" charset="-120"/>
-              </a:rPr>
-              <a:t>9</a:t>
-            </a:r>
-            <a:endParaRPr lang="en-US" sz="900" dirty="0"/>
+          <p:cNvPr id="12" name="cuinotes-footer-mark"/>
+          <p:cNvSpPr txBox="1"/>
+          <p:nvPr/>
+        </p:nvSpPr>
+        <p:spPr>
+          <a:xfrm>
+            <a:off x="9951720" y="6455664"/>
+            <a:ext cx="2011680" cy="292608"/>
+          </a:xfrm>
+          <a:prstGeom prst="rect">
+            <a:avLst/>
+          </a:prstGeom>
+          <a:noFill/>
+        </p:spPr>
+        <p:txBody>
+          <a:bodyPr wrap="none" lIns="0" rIns="0" tIns="0" bIns="0">
+            <a:spAutoFit/>
+          </a:bodyPr>
+          <a:lstStyle/>
+          <a:p>
+            <a:pPr algn="r"/>
+            <a:r>
+              <a:rPr sz="1000">
+                <a:solidFill>
+                  <a:srgbClr val="8A939B"/>
+                </a:solidFill>
+                <a:hlinkClick r:id="rId3"/>
+              </a:rPr>
+              <a:t>cuinotes.com</a:t>
+            </a:r>
+            <a:r>
+              <a:rPr sz="1000">
+                <a:solidFill>
+                  <a:srgbClr val="8A939B"/>
+                </a:solidFill>
+              </a:rPr>
+              <a:t>  ·  9</a:t>
+            </a:r>
           </a:p>
         </p:txBody>
       </p:sp>

--- a/slides/CSC336-Lecture-22-Database-Connectivity.pptx
+++ b/slides/CSC336-Lecture-22-Database-Connectivity.pptx
@@ -3797,7 +3797,7 @@
         <p:spPr>
           <a:xfrm>
             <a:off x="640080" y="1965960"/>
-            <a:ext cx="10911535" cy="1828800"/>
+            <a:ext cx="10911535" cy="3980000"/>
           </a:xfrm>
           <a:prstGeom prst="roundRect">
             <a:avLst>
@@ -3828,7 +3828,7 @@
         <p:spPr>
           <a:xfrm>
             <a:off x="868680" y="2103120"/>
-            <a:ext cx="10454335" cy="274320"/>
+            <a:ext cx="10454335" cy="400000"/>
           </a:xfrm>
           <a:prstGeom prst="rect">
             <a:avLst/>
@@ -3844,7 +3844,7 @@
               <a:buNone/>
             </a:pPr>
             <a:r>
-              <a:rPr lang="en-US" sz="1000" b="1" spc="200" kern="0" dirty="0">
+              <a:rPr lang="en-US" sz="1800" b="1" spc="200" kern="0" dirty="0">
                 <a:solidFill>
                   <a:srgbClr val="1F7A46"/>
                 </a:solidFill>
@@ -3854,7 +3854,7 @@
               </a:rPr>
               <a:t>TIP</a:t>
             </a:r>
-            <a:endParaRPr lang="en-US" sz="1000" dirty="0"/>
+            <a:endParaRPr lang="en-US" sz="1800" dirty="0"/>
           </a:p>
         </p:txBody>
       </p:sp>
@@ -3866,24 +3866,24 @@
         </p:nvSpPr>
         <p:spPr>
           <a:xfrm>
-            <a:off x="868680" y="2404872"/>
-            <a:ext cx="10454335" cy="1234440"/>
-          </a:xfrm>
-          <a:prstGeom prst="rect">
-            <a:avLst/>
-          </a:prstGeom>
-          <a:noFill/>
-          <a:ln/>
-        </p:spPr>
-        <p:txBody>
-          <a:bodyPr wrap="square" lIns="0" tIns="0" rIns="0" bIns="0" rtlCol="0" anchor="t"/>
-          <a:lstStyle/>
-          <a:p>
-            <a:pPr indent="0" marL="0">
-              <a:buNone/>
-            </a:pPr>
-            <a:r>
-              <a:rPr lang="en-US" sz="1250" dirty="0">
+            <a:off x="868680" y="2795960"/>
+            <a:ext cx="10454335" cy="3000000"/>
+          </a:xfrm>
+          <a:prstGeom prst="rect">
+            <a:avLst/>
+          </a:prstGeom>
+          <a:noFill/>
+          <a:ln/>
+        </p:spPr>
+        <p:txBody>
+          <a:bodyPr wrap="square" lIns="0" tIns="0" rIns="0" bIns="0" rtlCol="0" anchor="ctr"/>
+          <a:lstStyle/>
+          <a:p>
+            <a:pPr indent="0" marL="0">
+              <a:buNone/>
+            </a:pPr>
+            <a:r>
+              <a:rPr lang="en-US" sz="2800" dirty="0">
                 <a:solidFill>
                   <a:srgbClr val="26262F"/>
                 </a:solidFill>
@@ -3893,7 +3893,7 @@
               </a:rPr>
               <a:t>A relational database for structured, transactional data (like payments), and a document database for flexible content (like product catalogs or activity logs). Choosing a database is a design decision per use case, not a one-time choice for the whole company.</a:t>
             </a:r>
-            <a:endParaRPr lang="en-US" sz="1250" dirty="0"/>
+            <a:endParaRPr lang="en-US" sz="2800" dirty="0"/>
           </a:p>
         </p:txBody>
       </p:sp>
@@ -4526,9 +4526,13 @@
             </a:avLst>
           </a:prstGeom>
           <a:solidFill>
-            <a:srgbClr val="1E1E4C"/>
+            <a:srgbClr val="F7F8F9"/>
           </a:solidFill>
-          <a:ln/>
+          <a:ln w="9525">
+            <a:solidFill>
+              <a:srgbClr val="D0D5DD"/>
+            </a:solidFill>
+          </a:ln>
         </p:spPr>
         <p:txBody>
           <a:bodyPr/>
@@ -4565,7 +4569,7 @@
             <a:r>
               <a:rPr lang="en-US" sz="1400" dirty="0">
                 <a:solidFill>
-                  <a:srgbClr val="C9D3F5"/>
+                  <a:srgbClr val="1F2429"/>
                 </a:solidFill>
                 <a:latin typeface="Courier New" pitchFamily="34" charset="0"/>
                 <a:ea typeface="Courier New" pitchFamily="34" charset="-122"/>
@@ -4594,7 +4598,7 @@
             <a:r>
               <a:rPr lang="en-US" sz="1400" dirty="0">
                 <a:solidFill>
-                  <a:srgbClr val="C9D3F5"/>
+                  <a:srgbClr val="1F2429"/>
                 </a:solidFill>
                 <a:latin typeface="Courier New" pitchFamily="34" charset="0"/>
                 <a:ea typeface="Courier New" pitchFamily="34" charset="-122"/>
@@ -4768,7 +4772,7 @@
         <p:spPr>
           <a:xfrm>
             <a:off x="640080" y="1965960"/>
-            <a:ext cx="10911535" cy="2103120"/>
+            <a:ext cx="10911535" cy="3980000"/>
           </a:xfrm>
           <a:prstGeom prst="roundRect">
             <a:avLst>
@@ -4799,7 +4803,7 @@
         <p:spPr>
           <a:xfrm>
             <a:off x="868680" y="2103120"/>
-            <a:ext cx="10454335" cy="274320"/>
+            <a:ext cx="10454335" cy="400000"/>
           </a:xfrm>
           <a:prstGeom prst="rect">
             <a:avLst/>
@@ -4815,7 +4819,7 @@
               <a:buNone/>
             </a:pPr>
             <a:r>
-              <a:rPr lang="en-US" sz="1000" b="1" spc="200" kern="0" dirty="0">
+              <a:rPr lang="en-US" sz="1800" b="1" spc="200" kern="0" dirty="0">
                 <a:solidFill>
                   <a:srgbClr val="8A3A12"/>
                 </a:solidFill>
@@ -4825,7 +4829,7 @@
               </a:rPr>
               <a:t>WARNING</a:t>
             </a:r>
-            <a:endParaRPr lang="en-US" sz="1000" dirty="0"/>
+            <a:endParaRPr lang="en-US" sz="1800" dirty="0"/>
           </a:p>
         </p:txBody>
       </p:sp>
@@ -4837,24 +4841,24 @@
         </p:nvSpPr>
         <p:spPr>
           <a:xfrm>
-            <a:off x="868680" y="2404872"/>
-            <a:ext cx="10454335" cy="1508760"/>
-          </a:xfrm>
-          <a:prstGeom prst="rect">
-            <a:avLst/>
-          </a:prstGeom>
-          <a:noFill/>
-          <a:ln/>
-        </p:spPr>
-        <p:txBody>
-          <a:bodyPr wrap="square" lIns="0" tIns="0" rIns="0" bIns="0" rtlCol="0" anchor="t"/>
-          <a:lstStyle/>
-          <a:p>
-            <a:pPr indent="0" marL="0">
-              <a:buNone/>
-            </a:pPr>
-            <a:r>
-              <a:rPr lang="en-US" sz="1250" dirty="0">
+            <a:off x="868680" y="2795960"/>
+            <a:ext cx="10454335" cy="3000000"/>
+          </a:xfrm>
+          <a:prstGeom prst="rect">
+            <a:avLst/>
+          </a:prstGeom>
+          <a:noFill/>
+          <a:ln/>
+        </p:spPr>
+        <p:txBody>
+          <a:bodyPr wrap="square" lIns="0" tIns="0" rIns="0" bIns="0" rtlCol="0" anchor="ctr"/>
+          <a:lstStyle/>
+          <a:p>
+            <a:pPr indent="0" marL="0">
+              <a:buNone/>
+            </a:pPr>
+            <a:r>
+              <a:rPr lang="en-US" sz="2800" dirty="0">
                 <a:solidFill>
                   <a:srgbClr val="26262F"/>
                 </a:solidFill>
@@ -4864,7 +4868,7 @@
               </a:rPr>
               <a:t>Anyone who sees your source code — including everyone on GitHub, if the repo is public — sees the password too. Always add .env to your .gitignore file; committing real credentials to Git, even a private repo, is one of the most common causes of security breaches in student and professional projects alike.</a:t>
             </a:r>
-            <a:endParaRPr lang="en-US" sz="1250" dirty="0"/>
+            <a:endParaRPr lang="en-US" sz="2800" dirty="0"/>
           </a:p>
         </p:txBody>
       </p:sp>
@@ -5038,9 +5042,13 @@
             </a:avLst>
           </a:prstGeom>
           <a:solidFill>
-            <a:srgbClr val="1E1E4C"/>
+            <a:srgbClr val="F7F8F9"/>
           </a:solidFill>
-          <a:ln/>
+          <a:ln w="9525">
+            <a:solidFill>
+              <a:srgbClr val="D0D5DD"/>
+            </a:solidFill>
+          </a:ln>
         </p:spPr>
         <p:txBody>
           <a:bodyPr/>
@@ -5077,7 +5085,7 @@
             <a:r>
               <a:rPr lang="en-US" sz="1400" dirty="0">
                 <a:solidFill>
-                  <a:srgbClr val="C9D3F5"/>
+                  <a:srgbClr val="1F2429"/>
                 </a:solidFill>
                 <a:latin typeface="Courier New" pitchFamily="34" charset="0"/>
                 <a:ea typeface="Courier New" pitchFamily="34" charset="-122"/>
@@ -5097,7 +5105,7 @@
             <a:r>
               <a:rPr lang="en-US" sz="1400" dirty="0">
                 <a:solidFill>
-                  <a:srgbClr val="C9D3F5"/>
+                  <a:srgbClr val="1F2429"/>
                 </a:solidFill>
                 <a:latin typeface="Courier New" pitchFamily="34" charset="0"/>
                 <a:ea typeface="Courier New" pitchFamily="34" charset="-122"/>
@@ -5117,7 +5125,7 @@
             <a:r>
               <a:rPr lang="en-US" sz="1400" dirty="0">
                 <a:solidFill>
-                  <a:srgbClr val="C9D3F5"/>
+                  <a:srgbClr val="1F2429"/>
                 </a:solidFill>
                 <a:latin typeface="Courier New" pitchFamily="34" charset="0"/>
                 <a:ea typeface="Courier New" pitchFamily="34" charset="-122"/>
@@ -5137,7 +5145,7 @@
             <a:r>
               <a:rPr lang="en-US" sz="1400" dirty="0">
                 <a:solidFill>
-                  <a:srgbClr val="C9D3F5"/>
+                  <a:srgbClr val="1F2429"/>
                 </a:solidFill>
                 <a:latin typeface="Courier New" pitchFamily="34" charset="0"/>
                 <a:ea typeface="Courier New" pitchFamily="34" charset="-122"/>
@@ -5319,9 +5327,13 @@
             </a:avLst>
           </a:prstGeom>
           <a:solidFill>
-            <a:srgbClr val="1E1E4C"/>
+            <a:srgbClr val="F7F8F9"/>
           </a:solidFill>
-          <a:ln/>
+          <a:ln w="9525">
+            <a:solidFill>
+              <a:srgbClr val="D0D5DD"/>
+            </a:solidFill>
+          </a:ln>
         </p:spPr>
         <p:txBody>
           <a:bodyPr/>
@@ -5358,7 +5370,7 @@
             <a:r>
               <a:rPr lang="en-US" sz="1400" dirty="0">
                 <a:solidFill>
-                  <a:srgbClr val="C9D3F5"/>
+                  <a:srgbClr val="1F2429"/>
                 </a:solidFill>
                 <a:latin typeface="Courier New" pitchFamily="34" charset="0"/>
                 <a:ea typeface="Courier New" pitchFamily="34" charset="-122"/>
@@ -5378,7 +5390,7 @@
             <a:r>
               <a:rPr lang="en-US" sz="1400" dirty="0">
                 <a:solidFill>
-                  <a:srgbClr val="C9D3F5"/>
+                  <a:srgbClr val="1F2429"/>
                 </a:solidFill>
                 <a:latin typeface="Courier New" pitchFamily="34" charset="0"/>
                 <a:ea typeface="Courier New" pitchFamily="34" charset="-122"/>
@@ -5407,7 +5419,7 @@
             <a:r>
               <a:rPr lang="en-US" sz="1400" dirty="0">
                 <a:solidFill>
-                  <a:srgbClr val="C9D3F5"/>
+                  <a:srgbClr val="1F2429"/>
                 </a:solidFill>
                 <a:latin typeface="Courier New" pitchFamily="34" charset="0"/>
                 <a:ea typeface="Courier New" pitchFamily="34" charset="-122"/>
@@ -5628,9 +5640,13 @@
             </a:avLst>
           </a:prstGeom>
           <a:solidFill>
-            <a:srgbClr val="1E1E4C"/>
+            <a:srgbClr val="F7F8F9"/>
           </a:solidFill>
-          <a:ln/>
+          <a:ln w="9525">
+            <a:solidFill>
+              <a:srgbClr val="D0D5DD"/>
+            </a:solidFill>
+          </a:ln>
         </p:spPr>
         <p:txBody>
           <a:bodyPr/>
@@ -5667,7 +5683,7 @@
             <a:r>
               <a:rPr lang="en-US" sz="1366" dirty="0">
                 <a:solidFill>
-                  <a:srgbClr val="C9D3F5"/>
+                  <a:srgbClr val="1F2429"/>
                 </a:solidFill>
                 <a:latin typeface="Courier New" pitchFamily="34" charset="0"/>
                 <a:ea typeface="Courier New" pitchFamily="34" charset="-122"/>
@@ -5687,7 +5703,7 @@
             <a:r>
               <a:rPr lang="en-US" sz="1366" dirty="0">
                 <a:solidFill>
-                  <a:srgbClr val="C9D3F5"/>
+                  <a:srgbClr val="1F2429"/>
                 </a:solidFill>
                 <a:latin typeface="Courier New" pitchFamily="34" charset="0"/>
                 <a:ea typeface="Courier New" pitchFamily="34" charset="-122"/>
@@ -5716,7 +5732,7 @@
             <a:r>
               <a:rPr lang="en-US" sz="1366" dirty="0">
                 <a:solidFill>
-                  <a:srgbClr val="C9D3F5"/>
+                  <a:srgbClr val="1F2429"/>
                 </a:solidFill>
                 <a:latin typeface="Courier New" pitchFamily="34" charset="0"/>
                 <a:ea typeface="Courier New" pitchFamily="34" charset="-122"/>
@@ -5745,7 +5761,7 @@
             <a:r>
               <a:rPr lang="en-US" sz="1366" dirty="0">
                 <a:solidFill>
-                  <a:srgbClr val="C9D3F5"/>
+                  <a:srgbClr val="1F2429"/>
                 </a:solidFill>
                 <a:latin typeface="Courier New" pitchFamily="34" charset="0"/>
                 <a:ea typeface="Courier New" pitchFamily="34" charset="-122"/>
@@ -5765,7 +5781,7 @@
             <a:r>
               <a:rPr lang="en-US" sz="1366" dirty="0">
                 <a:solidFill>
-                  <a:srgbClr val="C9D3F5"/>
+                  <a:srgbClr val="1F2429"/>
                 </a:solidFill>
                 <a:latin typeface="Courier New" pitchFamily="34" charset="0"/>
                 <a:ea typeface="Courier New" pitchFamily="34" charset="-122"/>
@@ -5785,7 +5801,7 @@
             <a:r>
               <a:rPr lang="en-US" sz="1366" dirty="0">
                 <a:solidFill>
-                  <a:srgbClr val="C9D3F5"/>
+                  <a:srgbClr val="1F2429"/>
                 </a:solidFill>
                 <a:latin typeface="Courier New" pitchFamily="34" charset="0"/>
                 <a:ea typeface="Courier New" pitchFamily="34" charset="-122"/>
@@ -5805,7 +5821,7 @@
             <a:r>
               <a:rPr lang="en-US" sz="1366" dirty="0">
                 <a:solidFill>
-                  <a:srgbClr val="C9D3F5"/>
+                  <a:srgbClr val="1F2429"/>
                 </a:solidFill>
                 <a:latin typeface="Courier New" pitchFamily="34" charset="0"/>
                 <a:ea typeface="Courier New" pitchFamily="34" charset="-122"/>
@@ -5825,7 +5841,7 @@
             <a:r>
               <a:rPr lang="en-US" sz="1366" dirty="0">
                 <a:solidFill>
-                  <a:srgbClr val="C9D3F5"/>
+                  <a:srgbClr val="1F2429"/>
                 </a:solidFill>
                 <a:latin typeface="Courier New" pitchFamily="34" charset="0"/>
                 <a:ea typeface="Courier New" pitchFamily="34" charset="-122"/>
@@ -5845,7 +5861,7 @@
             <a:r>
               <a:rPr lang="en-US" sz="1366" dirty="0">
                 <a:solidFill>
-                  <a:srgbClr val="C9D3F5"/>
+                  <a:srgbClr val="1F2429"/>
                 </a:solidFill>
                 <a:latin typeface="Courier New" pitchFamily="34" charset="0"/>
                 <a:ea typeface="Courier New" pitchFamily="34" charset="-122"/>
@@ -5874,7 +5890,7 @@
             <a:r>
               <a:rPr lang="en-US" sz="1366" dirty="0">
                 <a:solidFill>
-                  <a:srgbClr val="C9D3F5"/>
+                  <a:srgbClr val="1F2429"/>
                 </a:solidFill>
                 <a:latin typeface="Courier New" pitchFamily="34" charset="0"/>
                 <a:ea typeface="Courier New" pitchFamily="34" charset="-122"/>
@@ -6056,9 +6072,13 @@
             </a:avLst>
           </a:prstGeom>
           <a:solidFill>
-            <a:srgbClr val="1E1E4C"/>
+            <a:srgbClr val="F7F8F9"/>
           </a:solidFill>
-          <a:ln/>
+          <a:ln w="9525">
+            <a:solidFill>
+              <a:srgbClr val="D0D5DD"/>
+            </a:solidFill>
+          </a:ln>
         </p:spPr>
         <p:txBody>
           <a:bodyPr/>
@@ -6095,7 +6115,7 @@
             <a:r>
               <a:rPr lang="en-US" sz="1200" dirty="0">
                 <a:solidFill>
-                  <a:srgbClr val="C9D3F5"/>
+                  <a:srgbClr val="1F2429"/>
                 </a:solidFill>
                 <a:latin typeface="Courier New" pitchFamily="34" charset="0"/>
                 <a:ea typeface="Courier New" pitchFamily="34" charset="-122"/>
@@ -6115,7 +6135,7 @@
             <a:r>
               <a:rPr lang="en-US" sz="1200" dirty="0">
                 <a:solidFill>
-                  <a:srgbClr val="C9D3F5"/>
+                  <a:srgbClr val="1F2429"/>
                 </a:solidFill>
                 <a:latin typeface="Courier New" pitchFamily="34" charset="0"/>
                 <a:ea typeface="Courier New" pitchFamily="34" charset="-122"/>
@@ -6144,7 +6164,7 @@
             <a:r>
               <a:rPr lang="en-US" sz="1200" dirty="0">
                 <a:solidFill>
-                  <a:srgbClr val="C9D3F5"/>
+                  <a:srgbClr val="1F2429"/>
                 </a:solidFill>
                 <a:latin typeface="Courier New" pitchFamily="34" charset="0"/>
                 <a:ea typeface="Courier New" pitchFamily="34" charset="-122"/>
@@ -6164,7 +6184,7 @@
             <a:r>
               <a:rPr lang="en-US" sz="1200" dirty="0">
                 <a:solidFill>
-                  <a:srgbClr val="C9D3F5"/>
+                  <a:srgbClr val="1F2429"/>
                 </a:solidFill>
                 <a:latin typeface="Courier New" pitchFamily="34" charset="0"/>
                 <a:ea typeface="Courier New" pitchFamily="34" charset="-122"/>
@@ -6184,7 +6204,7 @@
             <a:r>
               <a:rPr lang="en-US" sz="1200" dirty="0">
                 <a:solidFill>
-                  <a:srgbClr val="C9D3F5"/>
+                  <a:srgbClr val="1F2429"/>
                 </a:solidFill>
                 <a:latin typeface="Courier New" pitchFamily="34" charset="0"/>
                 <a:ea typeface="Courier New" pitchFamily="34" charset="-122"/>
@@ -6204,7 +6224,7 @@
             <a:r>
               <a:rPr lang="en-US" sz="1200" dirty="0">
                 <a:solidFill>
-                  <a:srgbClr val="C9D3F5"/>
+                  <a:srgbClr val="1F2429"/>
                 </a:solidFill>
                 <a:latin typeface="Courier New" pitchFamily="34" charset="0"/>
                 <a:ea typeface="Courier New" pitchFamily="34" charset="-122"/>
@@ -6233,7 +6253,7 @@
             <a:r>
               <a:rPr lang="en-US" sz="1200" dirty="0">
                 <a:solidFill>
-                  <a:srgbClr val="C9D3F5"/>
+                  <a:srgbClr val="1F2429"/>
                 </a:solidFill>
                 <a:latin typeface="Courier New" pitchFamily="34" charset="0"/>
                 <a:ea typeface="Courier New" pitchFamily="34" charset="-122"/>
@@ -6253,7 +6273,7 @@
             <a:r>
               <a:rPr lang="en-US" sz="1200" dirty="0">
                 <a:solidFill>
-                  <a:srgbClr val="C9D3F5"/>
+                  <a:srgbClr val="1F2429"/>
                 </a:solidFill>
                 <a:latin typeface="Courier New" pitchFamily="34" charset="0"/>
                 <a:ea typeface="Courier New" pitchFamily="34" charset="-122"/>
@@ -6273,7 +6293,7 @@
             <a:r>
               <a:rPr lang="en-US" sz="1200" dirty="0">
                 <a:solidFill>
-                  <a:srgbClr val="C9D3F5"/>
+                  <a:srgbClr val="1F2429"/>
                 </a:solidFill>
                 <a:latin typeface="Courier New" pitchFamily="34" charset="0"/>
                 <a:ea typeface="Courier New" pitchFamily="34" charset="-122"/>
@@ -6293,7 +6313,7 @@
             <a:r>
               <a:rPr lang="en-US" sz="1200" dirty="0">
                 <a:solidFill>
-                  <a:srgbClr val="C9D3F5"/>
+                  <a:srgbClr val="1F2429"/>
                 </a:solidFill>
                 <a:latin typeface="Courier New" pitchFamily="34" charset="0"/>
                 <a:ea typeface="Courier New" pitchFamily="34" charset="-122"/>
@@ -6506,7 +6526,7 @@
         <p:spPr>
           <a:xfrm>
             <a:off x="640080" y="1965960"/>
-            <a:ext cx="10911535" cy="1554480"/>
+            <a:ext cx="10911535" cy="3980000"/>
           </a:xfrm>
           <a:prstGeom prst="roundRect">
             <a:avLst>
@@ -6537,7 +6557,7 @@
         <p:spPr>
           <a:xfrm>
             <a:off x="868680" y="2103120"/>
-            <a:ext cx="10454335" cy="274320"/>
+            <a:ext cx="10454335" cy="400000"/>
           </a:xfrm>
           <a:prstGeom prst="rect">
             <a:avLst/>
@@ -6553,7 +6573,7 @@
               <a:buNone/>
             </a:pPr>
             <a:r>
-              <a:rPr lang="en-US" sz="1000" b="1" spc="200" kern="0" dirty="0">
+              <a:rPr lang="en-US" sz="1800" b="1" spc="200" kern="0" dirty="0">
                 <a:solidFill>
                   <a:srgbClr val="33459E"/>
                 </a:solidFill>
@@ -6563,7 +6583,7 @@
               </a:rPr>
               <a:t>NOTE</a:t>
             </a:r>
-            <a:endParaRPr lang="en-US" sz="1000" dirty="0"/>
+            <a:endParaRPr lang="en-US" sz="1800" dirty="0"/>
           </a:p>
         </p:txBody>
       </p:sp>
@@ -6575,24 +6595,24 @@
         </p:nvSpPr>
         <p:spPr>
           <a:xfrm>
-            <a:off x="868680" y="2404872"/>
-            <a:ext cx="10454335" cy="960120"/>
-          </a:xfrm>
-          <a:prstGeom prst="rect">
-            <a:avLst/>
-          </a:prstGeom>
-          <a:noFill/>
-          <a:ln/>
-        </p:spPr>
-        <p:txBody>
-          <a:bodyPr wrap="square" lIns="0" tIns="0" rIns="0" bIns="0" rtlCol="0" anchor="t"/>
-          <a:lstStyle/>
-          <a:p>
-            <a:pPr indent="0" marL="0">
-              <a:buNone/>
-            </a:pPr>
-            <a:r>
-              <a:rPr lang="en-US" sz="1250" dirty="0">
+            <a:off x="868680" y="2795960"/>
+            <a:ext cx="10454335" cy="3000000"/>
+          </a:xfrm>
+          <a:prstGeom prst="rect">
+            <a:avLst/>
+          </a:prstGeom>
+          <a:noFill/>
+          <a:ln/>
+        </p:spPr>
+        <p:txBody>
+          <a:bodyPr wrap="square" lIns="0" tIns="0" rIns="0" bIns="0" rtlCol="0" anchor="ctr"/>
+          <a:lstStyle/>
+          <a:p>
+            <a:pPr indent="0" marL="0">
+              <a:buNone/>
+            </a:pPr>
+            <a:r>
+              <a:rPr lang="en-US" sz="2800" dirty="0">
                 <a:solidFill>
                   <a:srgbClr val="26262F"/>
                 </a:solidFill>
@@ -6602,7 +6622,7 @@
               </a:rPr>
               <a:t>MongoDB's driver also manages a connection pool internally — by default, up to 100 connections — even though you only call client.connect() once. You rarely need to configure this yourself outside a high-traffic production app.</a:t>
             </a:r>
-            <a:endParaRPr lang="en-US" sz="1250" dirty="0"/>
+            <a:endParaRPr lang="en-US" sz="2800" dirty="0"/>
           </a:p>
         </p:txBody>
       </p:sp>
@@ -8255,9 +8275,13 @@
             </a:avLst>
           </a:prstGeom>
           <a:solidFill>
-            <a:srgbClr val="1E1E4C"/>
+            <a:srgbClr val="F7F8F9"/>
           </a:solidFill>
-          <a:ln/>
+          <a:ln w="9525">
+            <a:solidFill>
+              <a:srgbClr val="D0D5DD"/>
+            </a:solidFill>
+          </a:ln>
         </p:spPr>
         <p:txBody>
           <a:bodyPr/>
@@ -8294,7 +8318,7 @@
             <a:r>
               <a:rPr lang="en-US" sz="1029" dirty="0">
                 <a:solidFill>
-                  <a:srgbClr val="C9D3F5"/>
+                  <a:srgbClr val="1F2429"/>
                 </a:solidFill>
                 <a:latin typeface="Courier New" pitchFamily="34" charset="0"/>
                 <a:ea typeface="Courier New" pitchFamily="34" charset="-122"/>
@@ -8323,7 +8347,7 @@
             <a:r>
               <a:rPr lang="en-US" sz="1029" dirty="0">
                 <a:solidFill>
-                  <a:srgbClr val="C9D3F5"/>
+                  <a:srgbClr val="1F2429"/>
                 </a:solidFill>
                 <a:latin typeface="Courier New" pitchFamily="34" charset="0"/>
                 <a:ea typeface="Courier New" pitchFamily="34" charset="-122"/>
@@ -8343,7 +8367,7 @@
             <a:r>
               <a:rPr lang="en-US" sz="1029" dirty="0">
                 <a:solidFill>
-                  <a:srgbClr val="C9D3F5"/>
+                  <a:srgbClr val="1F2429"/>
                 </a:solidFill>
                 <a:latin typeface="Courier New" pitchFamily="34" charset="0"/>
                 <a:ea typeface="Courier New" pitchFamily="34" charset="-122"/>
@@ -8363,7 +8387,7 @@
             <a:r>
               <a:rPr lang="en-US" sz="1029" dirty="0">
                 <a:solidFill>
-                  <a:srgbClr val="C9D3F5"/>
+                  <a:srgbClr val="1F2429"/>
                 </a:solidFill>
                 <a:latin typeface="Courier New" pitchFamily="34" charset="0"/>
                 <a:ea typeface="Courier New" pitchFamily="34" charset="-122"/>
@@ -8383,7 +8407,7 @@
             <a:r>
               <a:rPr lang="en-US" sz="1029" dirty="0">
                 <a:solidFill>
-                  <a:srgbClr val="C9D3F5"/>
+                  <a:srgbClr val="1F2429"/>
                 </a:solidFill>
                 <a:latin typeface="Courier New" pitchFamily="34" charset="0"/>
                 <a:ea typeface="Courier New" pitchFamily="34" charset="-122"/>
@@ -8412,7 +8436,7 @@
             <a:r>
               <a:rPr lang="en-US" sz="1029" dirty="0">
                 <a:solidFill>
-                  <a:srgbClr val="C9D3F5"/>
+                  <a:srgbClr val="1F2429"/>
                 </a:solidFill>
                 <a:latin typeface="Courier New" pitchFamily="34" charset="0"/>
                 <a:ea typeface="Courier New" pitchFamily="34" charset="-122"/>
@@ -8432,7 +8456,7 @@
             <a:r>
               <a:rPr lang="en-US" sz="1029" dirty="0">
                 <a:solidFill>
-                  <a:srgbClr val="C9D3F5"/>
+                  <a:srgbClr val="1F2429"/>
                 </a:solidFill>
                 <a:latin typeface="Courier New" pitchFamily="34" charset="0"/>
                 <a:ea typeface="Courier New" pitchFamily="34" charset="-122"/>
@@ -8452,7 +8476,7 @@
             <a:r>
               <a:rPr lang="en-US" sz="1029" dirty="0">
                 <a:solidFill>
-                  <a:srgbClr val="C9D3F5"/>
+                  <a:srgbClr val="1F2429"/>
                 </a:solidFill>
                 <a:latin typeface="Courier New" pitchFamily="34" charset="0"/>
                 <a:ea typeface="Courier New" pitchFamily="34" charset="-122"/>
@@ -8472,7 +8496,7 @@
             <a:r>
               <a:rPr lang="en-US" sz="1029" dirty="0">
                 <a:solidFill>
-                  <a:srgbClr val="C9D3F5"/>
+                  <a:srgbClr val="1F2429"/>
                 </a:solidFill>
                 <a:latin typeface="Courier New" pitchFamily="34" charset="0"/>
                 <a:ea typeface="Courier New" pitchFamily="34" charset="-122"/>
@@ -8492,7 +8516,7 @@
             <a:r>
               <a:rPr lang="en-US" sz="1029" dirty="0">
                 <a:solidFill>
-                  <a:srgbClr val="C9D3F5"/>
+                  <a:srgbClr val="1F2429"/>
                 </a:solidFill>
                 <a:latin typeface="Courier New" pitchFamily="34" charset="0"/>
                 <a:ea typeface="Courier New" pitchFamily="34" charset="-122"/>
@@ -8512,7 +8536,7 @@
             <a:r>
               <a:rPr lang="en-US" sz="1029" dirty="0">
                 <a:solidFill>
-                  <a:srgbClr val="C9D3F5"/>
+                  <a:srgbClr val="1F2429"/>
                 </a:solidFill>
                 <a:latin typeface="Courier New" pitchFamily="34" charset="0"/>
                 <a:ea typeface="Courier New" pitchFamily="34" charset="-122"/>
@@ -8532,7 +8556,7 @@
             <a:r>
               <a:rPr lang="en-US" sz="1029" dirty="0">
                 <a:solidFill>
-                  <a:srgbClr val="C9D3F5"/>
+                  <a:srgbClr val="1F2429"/>
                 </a:solidFill>
                 <a:latin typeface="Courier New" pitchFamily="34" charset="0"/>
                 <a:ea typeface="Courier New" pitchFamily="34" charset="-122"/>
@@ -8753,9 +8777,13 @@
             </a:avLst>
           </a:prstGeom>
           <a:solidFill>
-            <a:srgbClr val="1E1E4C"/>
+            <a:srgbClr val="F7F8F9"/>
           </a:solidFill>
-          <a:ln/>
+          <a:ln w="9525">
+            <a:solidFill>
+              <a:srgbClr val="D0D5DD"/>
+            </a:solidFill>
+          </a:ln>
         </p:spPr>
         <p:txBody>
           <a:bodyPr/>
@@ -8792,7 +8820,7 @@
             <a:r>
               <a:rPr lang="en-US" sz="1400" dirty="0">
                 <a:solidFill>
-                  <a:srgbClr val="C9D3F5"/>
+                  <a:srgbClr val="1F2429"/>
                 </a:solidFill>
                 <a:latin typeface="Courier New" pitchFamily="34" charset="0"/>
                 <a:ea typeface="Courier New" pitchFamily="34" charset="-122"/>
@@ -8812,7 +8840,7 @@
             <a:r>
               <a:rPr lang="en-US" sz="1400" dirty="0">
                 <a:solidFill>
-                  <a:srgbClr val="C9D3F5"/>
+                  <a:srgbClr val="1F2429"/>
                 </a:solidFill>
                 <a:latin typeface="Courier New" pitchFamily="34" charset="0"/>
                 <a:ea typeface="Courier New" pitchFamily="34" charset="-122"/>
@@ -8832,7 +8860,7 @@
             <a:r>
               <a:rPr lang="en-US" sz="1400" dirty="0">
                 <a:solidFill>
-                  <a:srgbClr val="C9D3F5"/>
+                  <a:srgbClr val="1F2429"/>
                 </a:solidFill>
                 <a:latin typeface="Courier New" pitchFamily="34" charset="0"/>
                 <a:ea typeface="Courier New" pitchFamily="34" charset="-122"/>
@@ -8852,7 +8880,7 @@
             <a:r>
               <a:rPr lang="en-US" sz="1400" dirty="0">
                 <a:solidFill>
-                  <a:srgbClr val="C9D3F5"/>
+                  <a:srgbClr val="1F2429"/>
                 </a:solidFill>
                 <a:latin typeface="Courier New" pitchFamily="34" charset="0"/>
                 <a:ea typeface="Courier New" pitchFamily="34" charset="-122"/>
@@ -8872,7 +8900,7 @@
             <a:r>
               <a:rPr lang="en-US" sz="1400" dirty="0">
                 <a:solidFill>
-                  <a:srgbClr val="C9D3F5"/>
+                  <a:srgbClr val="1F2429"/>
                 </a:solidFill>
                 <a:latin typeface="Courier New" pitchFamily="34" charset="0"/>
                 <a:ea typeface="Courier New" pitchFamily="34" charset="-122"/>
@@ -8901,7 +8929,7 @@
             <a:r>
               <a:rPr lang="en-US" sz="1400" dirty="0">
                 <a:solidFill>
-                  <a:srgbClr val="C9D3F5"/>
+                  <a:srgbClr val="1F2429"/>
                 </a:solidFill>
                 <a:latin typeface="Courier New" pitchFamily="34" charset="0"/>
                 <a:ea typeface="Courier New" pitchFamily="34" charset="-122"/>
@@ -8921,7 +8949,7 @@
             <a:r>
               <a:rPr lang="en-US" sz="1400" dirty="0">
                 <a:solidFill>
-                  <a:srgbClr val="C9D3F5"/>
+                  <a:srgbClr val="1F2429"/>
                 </a:solidFill>
                 <a:latin typeface="Courier New" pitchFamily="34" charset="0"/>
                 <a:ea typeface="Courier New" pitchFamily="34" charset="-122"/>
@@ -8941,7 +8969,7 @@
             <a:r>
               <a:rPr lang="en-US" sz="1400" dirty="0">
                 <a:solidFill>
-                  <a:srgbClr val="C9D3F5"/>
+                  <a:srgbClr val="1F2429"/>
                 </a:solidFill>
                 <a:latin typeface="Courier New" pitchFamily="34" charset="0"/>
                 <a:ea typeface="Courier New" pitchFamily="34" charset="-122"/>
@@ -8961,7 +8989,7 @@
             <a:r>
               <a:rPr lang="en-US" sz="1400" dirty="0">
                 <a:solidFill>
-                  <a:srgbClr val="C9D3F5"/>
+                  <a:srgbClr val="1F2429"/>
                 </a:solidFill>
                 <a:latin typeface="Courier New" pitchFamily="34" charset="0"/>
                 <a:ea typeface="Courier New" pitchFamily="34" charset="-122"/>
@@ -9182,9 +9210,13 @@
             </a:avLst>
           </a:prstGeom>
           <a:solidFill>
-            <a:srgbClr val="1E1E4C"/>
+            <a:srgbClr val="F7F8F9"/>
           </a:solidFill>
-          <a:ln/>
+          <a:ln w="9525">
+            <a:solidFill>
+              <a:srgbClr val="D0D5DD"/>
+            </a:solidFill>
+          </a:ln>
         </p:spPr>
         <p:txBody>
           <a:bodyPr/>
@@ -9221,7 +9253,7 @@
             <a:r>
               <a:rPr lang="en-US" sz="1200" dirty="0">
                 <a:solidFill>
-                  <a:srgbClr val="C9D3F5"/>
+                  <a:srgbClr val="1F2429"/>
                 </a:solidFill>
                 <a:latin typeface="Courier New" pitchFamily="34" charset="0"/>
                 <a:ea typeface="Courier New" pitchFamily="34" charset="-122"/>
@@ -9241,7 +9273,7 @@
             <a:r>
               <a:rPr lang="en-US" sz="1200" dirty="0">
                 <a:solidFill>
-                  <a:srgbClr val="C9D3F5"/>
+                  <a:srgbClr val="1F2429"/>
                 </a:solidFill>
                 <a:latin typeface="Courier New" pitchFamily="34" charset="0"/>
                 <a:ea typeface="Courier New" pitchFamily="34" charset="-122"/>
@@ -9261,7 +9293,7 @@
             <a:r>
               <a:rPr lang="en-US" sz="1200" dirty="0">
                 <a:solidFill>
-                  <a:srgbClr val="C9D3F5"/>
+                  <a:srgbClr val="1F2429"/>
                 </a:solidFill>
                 <a:latin typeface="Courier New" pitchFamily="34" charset="0"/>
                 <a:ea typeface="Courier New" pitchFamily="34" charset="-122"/>
@@ -9281,7 +9313,7 @@
             <a:r>
               <a:rPr lang="en-US" sz="1200" dirty="0">
                 <a:solidFill>
-                  <a:srgbClr val="C9D3F5"/>
+                  <a:srgbClr val="1F2429"/>
                 </a:solidFill>
                 <a:latin typeface="Courier New" pitchFamily="34" charset="0"/>
                 <a:ea typeface="Courier New" pitchFamily="34" charset="-122"/>
@@ -9301,7 +9333,7 @@
             <a:r>
               <a:rPr lang="en-US" sz="1200" dirty="0">
                 <a:solidFill>
-                  <a:srgbClr val="C9D3F5"/>
+                  <a:srgbClr val="1F2429"/>
                 </a:solidFill>
                 <a:latin typeface="Courier New" pitchFamily="34" charset="0"/>
                 <a:ea typeface="Courier New" pitchFamily="34" charset="-122"/>
@@ -9321,7 +9353,7 @@
             <a:r>
               <a:rPr lang="en-US" sz="1200" dirty="0">
                 <a:solidFill>
-                  <a:srgbClr val="C9D3F5"/>
+                  <a:srgbClr val="1F2429"/>
                 </a:solidFill>
                 <a:latin typeface="Courier New" pitchFamily="34" charset="0"/>
                 <a:ea typeface="Courier New" pitchFamily="34" charset="-122"/>
@@ -9350,7 +9382,7 @@
             <a:r>
               <a:rPr lang="en-US" sz="1200" dirty="0">
                 <a:solidFill>
-                  <a:srgbClr val="C9D3F5"/>
+                  <a:srgbClr val="1F2429"/>
                 </a:solidFill>
                 <a:latin typeface="Courier New" pitchFamily="34" charset="0"/>
                 <a:ea typeface="Courier New" pitchFamily="34" charset="-122"/>
@@ -9370,7 +9402,7 @@
             <a:r>
               <a:rPr lang="en-US" sz="1200" dirty="0">
                 <a:solidFill>
-                  <a:srgbClr val="C9D3F5"/>
+                  <a:srgbClr val="1F2429"/>
                 </a:solidFill>
                 <a:latin typeface="Courier New" pitchFamily="34" charset="0"/>
                 <a:ea typeface="Courier New" pitchFamily="34" charset="-122"/>
@@ -9390,7 +9422,7 @@
             <a:r>
               <a:rPr lang="en-US" sz="1200" dirty="0">
                 <a:solidFill>
-                  <a:srgbClr val="C9D3F5"/>
+                  <a:srgbClr val="1F2429"/>
                 </a:solidFill>
                 <a:latin typeface="Courier New" pitchFamily="34" charset="0"/>
                 <a:ea typeface="Courier New" pitchFamily="34" charset="-122"/>
@@ -9410,7 +9442,7 @@
             <a:r>
               <a:rPr lang="en-US" sz="1200" dirty="0">
                 <a:solidFill>
-                  <a:srgbClr val="C9D3F5"/>
+                  <a:srgbClr val="1F2429"/>
                 </a:solidFill>
                 <a:latin typeface="Courier New" pitchFamily="34" charset="0"/>
                 <a:ea typeface="Courier New" pitchFamily="34" charset="-122"/>
@@ -9430,7 +9462,7 @@
             <a:r>
               <a:rPr lang="en-US" sz="1200" dirty="0">
                 <a:solidFill>
-                  <a:srgbClr val="C9D3F5"/>
+                  <a:srgbClr val="1F2429"/>
                 </a:solidFill>
                 <a:latin typeface="Courier New" pitchFamily="34" charset="0"/>
                 <a:ea typeface="Courier New" pitchFamily="34" charset="-122"/>
@@ -9651,9 +9683,13 @@
             </a:avLst>
           </a:prstGeom>
           <a:solidFill>
-            <a:srgbClr val="1E1E4C"/>
+            <a:srgbClr val="F7F8F9"/>
           </a:solidFill>
-          <a:ln/>
+          <a:ln w="9525">
+            <a:solidFill>
+              <a:srgbClr val="D0D5DD"/>
+            </a:solidFill>
+          </a:ln>
         </p:spPr>
         <p:txBody>
           <a:bodyPr/>
@@ -9690,7 +9726,7 @@
             <a:r>
               <a:rPr lang="en-US" sz="1400" dirty="0">
                 <a:solidFill>
-                  <a:srgbClr val="C9D3F5"/>
+                  <a:srgbClr val="1F2429"/>
                 </a:solidFill>
                 <a:latin typeface="Courier New" pitchFamily="34" charset="0"/>
                 <a:ea typeface="Courier New" pitchFamily="34" charset="-122"/>
@@ -9710,7 +9746,7 @@
             <a:r>
               <a:rPr lang="en-US" sz="1400" dirty="0">
                 <a:solidFill>
-                  <a:srgbClr val="C9D3F5"/>
+                  <a:srgbClr val="1F2429"/>
                 </a:solidFill>
                 <a:latin typeface="Courier New" pitchFamily="34" charset="0"/>
                 <a:ea typeface="Courier New" pitchFamily="34" charset="-122"/>
@@ -9730,7 +9766,7 @@
             <a:r>
               <a:rPr lang="en-US" sz="1400" dirty="0">
                 <a:solidFill>
-                  <a:srgbClr val="C9D3F5"/>
+                  <a:srgbClr val="1F2429"/>
                 </a:solidFill>
                 <a:latin typeface="Courier New" pitchFamily="34" charset="0"/>
                 <a:ea typeface="Courier New" pitchFamily="34" charset="-122"/>
@@ -9750,7 +9786,7 @@
             <a:r>
               <a:rPr lang="en-US" sz="1400" dirty="0">
                 <a:solidFill>
-                  <a:srgbClr val="C9D3F5"/>
+                  <a:srgbClr val="1F2429"/>
                 </a:solidFill>
                 <a:latin typeface="Courier New" pitchFamily="34" charset="0"/>
                 <a:ea typeface="Courier New" pitchFamily="34" charset="-122"/>
@@ -9770,7 +9806,7 @@
             <a:r>
               <a:rPr lang="en-US" sz="1400" dirty="0">
                 <a:solidFill>
-                  <a:srgbClr val="C9D3F5"/>
+                  <a:srgbClr val="1F2429"/>
                 </a:solidFill>
                 <a:latin typeface="Courier New" pitchFamily="34" charset="0"/>
                 <a:ea typeface="Courier New" pitchFamily="34" charset="-122"/>
@@ -9799,7 +9835,7 @@
             <a:r>
               <a:rPr lang="en-US" sz="1400" dirty="0">
                 <a:solidFill>
-                  <a:srgbClr val="C9D3F5"/>
+                  <a:srgbClr val="1F2429"/>
                 </a:solidFill>
                 <a:latin typeface="Courier New" pitchFamily="34" charset="0"/>
                 <a:ea typeface="Courier New" pitchFamily="34" charset="-122"/>
@@ -9819,7 +9855,7 @@
             <a:r>
               <a:rPr lang="en-US" sz="1400" dirty="0">
                 <a:solidFill>
-                  <a:srgbClr val="C9D3F5"/>
+                  <a:srgbClr val="1F2429"/>
                 </a:solidFill>
                 <a:latin typeface="Courier New" pitchFamily="34" charset="0"/>
                 <a:ea typeface="Courier New" pitchFamily="34" charset="-122"/>
@@ -9839,7 +9875,7 @@
             <a:r>
               <a:rPr lang="en-US" sz="1400" dirty="0">
                 <a:solidFill>
-                  <a:srgbClr val="C9D3F5"/>
+                  <a:srgbClr val="1F2429"/>
                 </a:solidFill>
                 <a:latin typeface="Courier New" pitchFamily="34" charset="0"/>
                 <a:ea typeface="Courier New" pitchFamily="34" charset="-122"/>
@@ -9859,7 +9895,7 @@
             <a:r>
               <a:rPr lang="en-US" sz="1400" dirty="0">
                 <a:solidFill>
-                  <a:srgbClr val="C9D3F5"/>
+                  <a:srgbClr val="1F2429"/>
                 </a:solidFill>
                 <a:latin typeface="Courier New" pitchFamily="34" charset="0"/>
                 <a:ea typeface="Courier New" pitchFamily="34" charset="-122"/>
@@ -9879,7 +9915,7 @@
             <a:r>
               <a:rPr lang="en-US" sz="1400" dirty="0">
                 <a:solidFill>
-                  <a:srgbClr val="C9D3F5"/>
+                  <a:srgbClr val="1F2429"/>
                 </a:solidFill>
                 <a:latin typeface="Courier New" pitchFamily="34" charset="0"/>
                 <a:ea typeface="Courier New" pitchFamily="34" charset="-122"/>
@@ -10053,7 +10089,7 @@
         <p:spPr>
           <a:xfrm>
             <a:off x="640080" y="1965960"/>
-            <a:ext cx="10911535" cy="2103120"/>
+            <a:ext cx="10911535" cy="3980000"/>
           </a:xfrm>
           <a:prstGeom prst="roundRect">
             <a:avLst>
@@ -10084,7 +10120,7 @@
         <p:spPr>
           <a:xfrm>
             <a:off x="868680" y="2103120"/>
-            <a:ext cx="10454335" cy="274320"/>
+            <a:ext cx="10454335" cy="400000"/>
           </a:xfrm>
           <a:prstGeom prst="rect">
             <a:avLst/>
@@ -10100,7 +10136,7 @@
               <a:buNone/>
             </a:pPr>
             <a:r>
-              <a:rPr lang="en-US" sz="1000" b="1" spc="200" kern="0" dirty="0">
+              <a:rPr lang="en-US" sz="1800" b="1" spc="200" kern="0" dirty="0">
                 <a:solidFill>
                   <a:srgbClr val="8A3A12"/>
                 </a:solidFill>
@@ -10110,7 +10146,7 @@
               </a:rPr>
               <a:t>WARNING</a:t>
             </a:r>
-            <a:endParaRPr lang="en-US" sz="1000" dirty="0"/>
+            <a:endParaRPr lang="en-US" sz="1800" dirty="0"/>
           </a:p>
         </p:txBody>
       </p:sp>
@@ -10122,24 +10158,24 @@
         </p:nvSpPr>
         <p:spPr>
           <a:xfrm>
-            <a:off x="868680" y="2404872"/>
-            <a:ext cx="10454335" cy="1508760"/>
-          </a:xfrm>
-          <a:prstGeom prst="rect">
-            <a:avLst/>
-          </a:prstGeom>
-          <a:noFill/>
-          <a:ln/>
-        </p:spPr>
-        <p:txBody>
-          <a:bodyPr wrap="square" lIns="0" tIns="0" rIns="0" bIns="0" rtlCol="0" anchor="t"/>
-          <a:lstStyle/>
-          <a:p>
-            <a:pPr indent="0" marL="0">
-              <a:buNone/>
-            </a:pPr>
-            <a:r>
-              <a:rPr lang="en-US" sz="1250" dirty="0">
+            <a:off x="868680" y="2795960"/>
+            <a:ext cx="10454335" cy="3000000"/>
+          </a:xfrm>
+          <a:prstGeom prst="rect">
+            <a:avLst/>
+          </a:prstGeom>
+          <a:noFill/>
+          <a:ln/>
+        </p:spPr>
+        <p:txBody>
+          <a:bodyPr wrap="square" lIns="0" tIns="0" rIns="0" bIns="0" rtlCol="0" anchor="ctr"/>
+          <a:lstStyle/>
+          <a:p>
+            <a:pPr indent="0" marL="0">
+              <a:buNone/>
+            </a:pPr>
+            <a:r>
+              <a:rPr lang="en-US" sz="2800" dirty="0">
                 <a:solidFill>
                   <a:srgbClr val="26262F"/>
                 </a:solidFill>
@@ -10149,7 +10185,7 @@
               </a:rPr>
               <a:t>Building queries by concatenating strings opens the door to SQL injection, letting an attacker smuggle their own SQL commands through user input. The MongoDB driver's object-based query syntax is naturally safer the same way, as long as you don't build queries from raw, unvalidated strings yourself.</a:t>
             </a:r>
-            <a:endParaRPr lang="en-US" sz="1250" dirty="0"/>
+            <a:endParaRPr lang="en-US" sz="2800" dirty="0"/>
           </a:p>
         </p:txBody>
       </p:sp>
@@ -10782,9 +10818,13 @@
             </a:avLst>
           </a:prstGeom>
           <a:solidFill>
-            <a:srgbClr val="1E1E4C"/>
+            <a:srgbClr val="F7F8F9"/>
           </a:solidFill>
-          <a:ln/>
+          <a:ln w="9525">
+            <a:solidFill>
+              <a:srgbClr val="D0D5DD"/>
+            </a:solidFill>
+          </a:ln>
         </p:spPr>
         <p:txBody>
           <a:bodyPr/>
@@ -10821,7 +10861,7 @@
             <a:r>
               <a:rPr lang="en-US" sz="1400" dirty="0">
                 <a:solidFill>
-                  <a:srgbClr val="C9D3F5"/>
+                  <a:srgbClr val="1F2429"/>
                 </a:solidFill>
                 <a:latin typeface="Courier New" pitchFamily="34" charset="0"/>
                 <a:ea typeface="Courier New" pitchFamily="34" charset="-122"/>
@@ -10841,7 +10881,7 @@
             <a:r>
               <a:rPr lang="en-US" sz="1400" dirty="0">
                 <a:solidFill>
-                  <a:srgbClr val="C9D3F5"/>
+                  <a:srgbClr val="1F2429"/>
                 </a:solidFill>
                 <a:latin typeface="Courier New" pitchFamily="34" charset="0"/>
                 <a:ea typeface="Courier New" pitchFamily="34" charset="-122"/>
@@ -10861,7 +10901,7 @@
             <a:r>
               <a:rPr lang="en-US" sz="1400" dirty="0">
                 <a:solidFill>
-                  <a:srgbClr val="C9D3F5"/>
+                  <a:srgbClr val="1F2429"/>
                 </a:solidFill>
                 <a:latin typeface="Courier New" pitchFamily="34" charset="0"/>
                 <a:ea typeface="Courier New" pitchFamily="34" charset="-122"/>
@@ -10881,7 +10921,7 @@
             <a:r>
               <a:rPr lang="en-US" sz="1400" dirty="0">
                 <a:solidFill>
-                  <a:srgbClr val="C9D3F5"/>
+                  <a:srgbClr val="1F2429"/>
                 </a:solidFill>
                 <a:latin typeface="Courier New" pitchFamily="34" charset="0"/>
                 <a:ea typeface="Courier New" pitchFamily="34" charset="-122"/>
@@ -10901,7 +10941,7 @@
             <a:r>
               <a:rPr lang="en-US" sz="1400" dirty="0">
                 <a:solidFill>
-                  <a:srgbClr val="C9D3F5"/>
+                  <a:srgbClr val="1F2429"/>
                 </a:solidFill>
                 <a:latin typeface="Courier New" pitchFamily="34" charset="0"/>
                 <a:ea typeface="Courier New" pitchFamily="34" charset="-122"/>
@@ -10921,7 +10961,7 @@
             <a:r>
               <a:rPr lang="en-US" sz="1400" dirty="0">
                 <a:solidFill>
-                  <a:srgbClr val="C9D3F5"/>
+                  <a:srgbClr val="1F2429"/>
                 </a:solidFill>
                 <a:latin typeface="Courier New" pitchFamily="34" charset="0"/>
                 <a:ea typeface="Courier New" pitchFamily="34" charset="-122"/>
@@ -10941,7 +10981,7 @@
             <a:r>
               <a:rPr lang="en-US" sz="1400" dirty="0">
                 <a:solidFill>
-                  <a:srgbClr val="C9D3F5"/>
+                  <a:srgbClr val="1F2429"/>
                 </a:solidFill>
                 <a:latin typeface="Courier New" pitchFamily="34" charset="0"/>
                 <a:ea typeface="Courier New" pitchFamily="34" charset="-122"/>
@@ -10961,7 +11001,7 @@
             <a:r>
               <a:rPr lang="en-US" sz="1400" dirty="0">
                 <a:solidFill>
-                  <a:srgbClr val="C9D3F5"/>
+                  <a:srgbClr val="1F2429"/>
                 </a:solidFill>
                 <a:latin typeface="Courier New" pitchFamily="34" charset="0"/>
                 <a:ea typeface="Courier New" pitchFamily="34" charset="-122"/>
@@ -10981,7 +11021,7 @@
             <a:r>
               <a:rPr lang="en-US" sz="1400" dirty="0">
                 <a:solidFill>
-                  <a:srgbClr val="C9D3F5"/>
+                  <a:srgbClr val="1F2429"/>
                 </a:solidFill>
                 <a:latin typeface="Courier New" pitchFamily="34" charset="0"/>
                 <a:ea typeface="Courier New" pitchFamily="34" charset="-122"/>
@@ -11001,7 +11041,7 @@
             <a:r>
               <a:rPr lang="en-US" sz="1400" dirty="0">
                 <a:solidFill>
-                  <a:srgbClr val="C9D3F5"/>
+                  <a:srgbClr val="1F2429"/>
                 </a:solidFill>
                 <a:latin typeface="Courier New" pitchFamily="34" charset="0"/>
                 <a:ea typeface="Courier New" pitchFamily="34" charset="-122"/>
@@ -11021,7 +11061,7 @@
             <a:r>
               <a:rPr lang="en-US" sz="1400" dirty="0">
                 <a:solidFill>
-                  <a:srgbClr val="C9D3F5"/>
+                  <a:srgbClr val="1F2429"/>
                 </a:solidFill>
                 <a:latin typeface="Courier New" pitchFamily="34" charset="0"/>
                 <a:ea typeface="Courier New" pitchFamily="34" charset="-122"/>
@@ -11203,9 +11243,13 @@
             </a:avLst>
           </a:prstGeom>
           <a:solidFill>
-            <a:srgbClr val="1E1E4C"/>
+            <a:srgbClr val="F7F8F9"/>
           </a:solidFill>
-          <a:ln/>
+          <a:ln w="9525">
+            <a:solidFill>
+              <a:srgbClr val="D0D5DD"/>
+            </a:solidFill>
+          </a:ln>
         </p:spPr>
         <p:txBody>
           <a:bodyPr/>
@@ -11242,7 +11286,7 @@
             <a:r>
               <a:rPr lang="en-US" sz="1400" dirty="0">
                 <a:solidFill>
-                  <a:srgbClr val="C9D3F5"/>
+                  <a:srgbClr val="1F2429"/>
                 </a:solidFill>
                 <a:latin typeface="Courier New" pitchFamily="34" charset="0"/>
                 <a:ea typeface="Courier New" pitchFamily="34" charset="-122"/>
@@ -11262,7 +11306,7 @@
             <a:r>
               <a:rPr lang="en-US" sz="1400" dirty="0">
                 <a:solidFill>
-                  <a:srgbClr val="C9D3F5"/>
+                  <a:srgbClr val="1F2429"/>
                 </a:solidFill>
                 <a:latin typeface="Courier New" pitchFamily="34" charset="0"/>
                 <a:ea typeface="Courier New" pitchFamily="34" charset="-122"/>
@@ -11282,7 +11326,7 @@
             <a:r>
               <a:rPr lang="en-US" sz="1400" dirty="0">
                 <a:solidFill>
-                  <a:srgbClr val="C9D3F5"/>
+                  <a:srgbClr val="1F2429"/>
                 </a:solidFill>
                 <a:latin typeface="Courier New" pitchFamily="34" charset="0"/>
                 <a:ea typeface="Courier New" pitchFamily="34" charset="-122"/>
@@ -11302,7 +11346,7 @@
             <a:r>
               <a:rPr lang="en-US" sz="1400" dirty="0">
                 <a:solidFill>
-                  <a:srgbClr val="C9D3F5"/>
+                  <a:srgbClr val="1F2429"/>
                 </a:solidFill>
                 <a:latin typeface="Courier New" pitchFamily="34" charset="0"/>
                 <a:ea typeface="Courier New" pitchFamily="34" charset="-122"/>
@@ -11322,7 +11366,7 @@
             <a:r>
               <a:rPr lang="en-US" sz="1400" dirty="0">
                 <a:solidFill>
-                  <a:srgbClr val="C9D3F5"/>
+                  <a:srgbClr val="1F2429"/>
                 </a:solidFill>
                 <a:latin typeface="Courier New" pitchFamily="34" charset="0"/>
                 <a:ea typeface="Courier New" pitchFamily="34" charset="-122"/>
@@ -11342,7 +11386,7 @@
             <a:r>
               <a:rPr lang="en-US" sz="1400" dirty="0">
                 <a:solidFill>
-                  <a:srgbClr val="C9D3F5"/>
+                  <a:srgbClr val="1F2429"/>
                 </a:solidFill>
                 <a:latin typeface="Courier New" pitchFamily="34" charset="0"/>
                 <a:ea typeface="Courier New" pitchFamily="34" charset="-122"/>
@@ -11524,9 +11568,13 @@
             </a:avLst>
           </a:prstGeom>
           <a:solidFill>
-            <a:srgbClr val="1E1E4C"/>
+            <a:srgbClr val="F7F8F9"/>
           </a:solidFill>
-          <a:ln/>
+          <a:ln w="9525">
+            <a:solidFill>
+              <a:srgbClr val="D0D5DD"/>
+            </a:solidFill>
+          </a:ln>
         </p:spPr>
         <p:txBody>
           <a:bodyPr/>
@@ -11563,7 +11611,7 @@
             <a:r>
               <a:rPr lang="en-US" sz="1400" dirty="0">
                 <a:solidFill>
-                  <a:srgbClr val="C9D3F5"/>
+                  <a:srgbClr val="1F2429"/>
                 </a:solidFill>
                 <a:latin typeface="Courier New" pitchFamily="34" charset="0"/>
                 <a:ea typeface="Courier New" pitchFamily="34" charset="-122"/>
@@ -11583,7 +11631,7 @@
             <a:r>
               <a:rPr lang="en-US" sz="1400" dirty="0">
                 <a:solidFill>
-                  <a:srgbClr val="C9D3F5"/>
+                  <a:srgbClr val="1F2429"/>
                 </a:solidFill>
                 <a:latin typeface="Courier New" pitchFamily="34" charset="0"/>
                 <a:ea typeface="Courier New" pitchFamily="34" charset="-122"/>
@@ -11603,7 +11651,7 @@
             <a:r>
               <a:rPr lang="en-US" sz="1400" dirty="0">
                 <a:solidFill>
-                  <a:srgbClr val="C9D3F5"/>
+                  <a:srgbClr val="1F2429"/>
                 </a:solidFill>
                 <a:latin typeface="Courier New" pitchFamily="34" charset="0"/>
                 <a:ea typeface="Courier New" pitchFamily="34" charset="-122"/>
@@ -11623,7 +11671,7 @@
             <a:r>
               <a:rPr lang="en-US" sz="1400" dirty="0">
                 <a:solidFill>
-                  <a:srgbClr val="C9D3F5"/>
+                  <a:srgbClr val="1F2429"/>
                 </a:solidFill>
                 <a:latin typeface="Courier New" pitchFamily="34" charset="0"/>
                 <a:ea typeface="Courier New" pitchFamily="34" charset="-122"/>
@@ -11643,7 +11691,7 @@
             <a:r>
               <a:rPr lang="en-US" sz="1400" dirty="0">
                 <a:solidFill>
-                  <a:srgbClr val="C9D3F5"/>
+                  <a:srgbClr val="1F2429"/>
                 </a:solidFill>
                 <a:latin typeface="Courier New" pitchFamily="34" charset="0"/>
                 <a:ea typeface="Courier New" pitchFamily="34" charset="-122"/>
@@ -11663,7 +11711,7 @@
             <a:r>
               <a:rPr lang="en-US" sz="1400" dirty="0">
                 <a:solidFill>
-                  <a:srgbClr val="C9D3F5"/>
+                  <a:srgbClr val="1F2429"/>
                 </a:solidFill>
                 <a:latin typeface="Courier New" pitchFamily="34" charset="0"/>
                 <a:ea typeface="Courier New" pitchFamily="34" charset="-122"/>
@@ -11683,7 +11731,7 @@
             <a:r>
               <a:rPr lang="en-US" sz="1400" dirty="0">
                 <a:solidFill>
-                  <a:srgbClr val="C9D3F5"/>
+                  <a:srgbClr val="1F2429"/>
                 </a:solidFill>
                 <a:latin typeface="Courier New" pitchFamily="34" charset="0"/>
                 <a:ea typeface="Courier New" pitchFamily="34" charset="-122"/>
@@ -11703,7 +11751,7 @@
             <a:r>
               <a:rPr lang="en-US" sz="1400" dirty="0">
                 <a:solidFill>
-                  <a:srgbClr val="C9D3F5"/>
+                  <a:srgbClr val="1F2429"/>
                 </a:solidFill>
                 <a:latin typeface="Courier New" pitchFamily="34" charset="0"/>
                 <a:ea typeface="Courier New" pitchFamily="34" charset="-122"/>
@@ -11723,7 +11771,7 @@
             <a:r>
               <a:rPr lang="en-US" sz="1400" dirty="0">
                 <a:solidFill>
-                  <a:srgbClr val="C9D3F5"/>
+                  <a:srgbClr val="1F2429"/>
                 </a:solidFill>
                 <a:latin typeface="Courier New" pitchFamily="34" charset="0"/>
                 <a:ea typeface="Courier New" pitchFamily="34" charset="-122"/>
@@ -11743,7 +11791,7 @@
             <a:r>
               <a:rPr lang="en-US" sz="1400" dirty="0">
                 <a:solidFill>
-                  <a:srgbClr val="C9D3F5"/>
+                  <a:srgbClr val="1F2429"/>
                 </a:solidFill>
                 <a:latin typeface="Courier New" pitchFamily="34" charset="0"/>
                 <a:ea typeface="Courier New" pitchFamily="34" charset="-122"/>
@@ -11956,7 +12004,7 @@
         <p:spPr>
           <a:xfrm>
             <a:off x="640080" y="1965960"/>
-            <a:ext cx="10911535" cy="1828800"/>
+            <a:ext cx="10911535" cy="3657600"/>
           </a:xfrm>
           <a:prstGeom prst="roundRect">
             <a:avLst>
@@ -11987,7 +12035,7 @@
         <p:spPr>
           <a:xfrm>
             <a:off x="868680" y="2103120"/>
-            <a:ext cx="10454335" cy="274320"/>
+            <a:ext cx="10454335" cy="400000"/>
           </a:xfrm>
           <a:prstGeom prst="rect">
             <a:avLst/>
@@ -12003,7 +12051,7 @@
               <a:buNone/>
             </a:pPr>
             <a:r>
-              <a:rPr lang="en-US" sz="1000" b="1" spc="200" kern="0" dirty="0">
+              <a:rPr lang="en-US" sz="1800" b="1" spc="200" kern="0" dirty="0">
                 <a:solidFill>
                   <a:srgbClr val="1F7A46"/>
                 </a:solidFill>
@@ -12013,7 +12061,7 @@
               </a:rPr>
               <a:t>TIP</a:t>
             </a:r>
-            <a:endParaRPr lang="en-US" sz="1000" dirty="0"/>
+            <a:endParaRPr lang="en-US" sz="1800" dirty="0"/>
           </a:p>
         </p:txBody>
       </p:sp>
@@ -12025,24 +12073,24 @@
         </p:nvSpPr>
         <p:spPr>
           <a:xfrm>
-            <a:off x="868680" y="2404872"/>
-            <a:ext cx="10454335" cy="1234440"/>
-          </a:xfrm>
-          <a:prstGeom prst="rect">
-            <a:avLst/>
-          </a:prstGeom>
-          <a:noFill/>
-          <a:ln/>
-        </p:spPr>
-        <p:txBody>
-          <a:bodyPr wrap="square" lIns="0" tIns="0" rIns="0" bIns="0" rtlCol="0" anchor="t"/>
-          <a:lstStyle/>
-          <a:p>
-            <a:pPr indent="0" marL="0">
-              <a:buNone/>
-            </a:pPr>
-            <a:r>
-              <a:rPr lang="en-US" sz="1250" dirty="0">
+            <a:off x="868680" y="2795960"/>
+            <a:ext cx="10454335" cy="2500000"/>
+          </a:xfrm>
+          <a:prstGeom prst="rect">
+            <a:avLst/>
+          </a:prstGeom>
+          <a:noFill/>
+          <a:ln/>
+        </p:spPr>
+        <p:txBody>
+          <a:bodyPr wrap="square" lIns="0" tIns="0" rIns="0" bIns="0" rtlCol="0" anchor="ctr"/>
+          <a:lstStyle/>
+          <a:p>
+            <a:pPr indent="0" marL="0">
+              <a:buNone/>
+            </a:pPr>
+            <a:r>
+              <a:rPr lang="en-US" sz="2800" dirty="0">
                 <a:solidFill>
                   <a:srgbClr val="26262F"/>
                 </a:solidFill>
@@ -12052,7 +12100,7 @@
               </a:rPr>
               <a:t>Raw database error messages can leak details about your schema or internal setup. Log the full error on the server, and send the client a short, generic message instead.</a:t>
             </a:r>
-            <a:endParaRPr lang="en-US" sz="1250" dirty="0"/>
+            <a:endParaRPr lang="en-US" sz="2800" dirty="0"/>
           </a:p>
         </p:txBody>
       </p:sp>
@@ -13450,9 +13498,13 @@
             </a:avLst>
           </a:prstGeom>
           <a:solidFill>
-            <a:srgbClr val="1E1E4C"/>
+            <a:srgbClr val="F7F8F9"/>
           </a:solidFill>
-          <a:ln/>
+          <a:ln w="9525">
+            <a:solidFill>
+              <a:srgbClr val="D0D5DD"/>
+            </a:solidFill>
+          </a:ln>
         </p:spPr>
         <p:txBody>
           <a:bodyPr/>
@@ -13489,7 +13541,7 @@
             <a:r>
               <a:rPr lang="en-US" sz="1309" dirty="0">
                 <a:solidFill>
-                  <a:srgbClr val="C9D3F5"/>
+                  <a:srgbClr val="1F2429"/>
                 </a:solidFill>
                 <a:latin typeface="Courier New" pitchFamily="34" charset="0"/>
                 <a:ea typeface="Courier New" pitchFamily="34" charset="-122"/>
@@ -13509,7 +13561,7 @@
             <a:r>
               <a:rPr lang="en-US" sz="1309" dirty="0">
                 <a:solidFill>
-                  <a:srgbClr val="C9D3F5"/>
+                  <a:srgbClr val="1F2429"/>
                 </a:solidFill>
                 <a:latin typeface="Courier New" pitchFamily="34" charset="0"/>
                 <a:ea typeface="Courier New" pitchFamily="34" charset="-122"/>
@@ -13529,7 +13581,7 @@
             <a:r>
               <a:rPr lang="en-US" sz="1309" dirty="0">
                 <a:solidFill>
-                  <a:srgbClr val="C9D3F5"/>
+                  <a:srgbClr val="1F2429"/>
                 </a:solidFill>
                 <a:latin typeface="Courier New" pitchFamily="34" charset="0"/>
                 <a:ea typeface="Courier New" pitchFamily="34" charset="-122"/>
@@ -13549,7 +13601,7 @@
             <a:r>
               <a:rPr lang="en-US" sz="1309" dirty="0">
                 <a:solidFill>
-                  <a:srgbClr val="C9D3F5"/>
+                  <a:srgbClr val="1F2429"/>
                 </a:solidFill>
                 <a:latin typeface="Courier New" pitchFamily="34" charset="0"/>
                 <a:ea typeface="Courier New" pitchFamily="34" charset="-122"/>
@@ -13569,7 +13621,7 @@
             <a:r>
               <a:rPr lang="en-US" sz="1309" dirty="0">
                 <a:solidFill>
-                  <a:srgbClr val="C9D3F5"/>
+                  <a:srgbClr val="1F2429"/>
                 </a:solidFill>
                 <a:latin typeface="Courier New" pitchFamily="34" charset="0"/>
                 <a:ea typeface="Courier New" pitchFamily="34" charset="-122"/>
@@ -13598,7 +13650,7 @@
             <a:r>
               <a:rPr lang="en-US" sz="1309" dirty="0">
                 <a:solidFill>
-                  <a:srgbClr val="C9D3F5"/>
+                  <a:srgbClr val="1F2429"/>
                 </a:solidFill>
                 <a:latin typeface="Courier New" pitchFamily="34" charset="0"/>
                 <a:ea typeface="Courier New" pitchFamily="34" charset="-122"/>
@@ -13618,7 +13670,7 @@
             <a:r>
               <a:rPr lang="en-US" sz="1309" dirty="0">
                 <a:solidFill>
-                  <a:srgbClr val="C9D3F5"/>
+                  <a:srgbClr val="1F2429"/>
                 </a:solidFill>
                 <a:latin typeface="Courier New" pitchFamily="34" charset="0"/>
                 <a:ea typeface="Courier New" pitchFamily="34" charset="-122"/>
@@ -13638,7 +13690,7 @@
             <a:r>
               <a:rPr lang="en-US" sz="1309" dirty="0">
                 <a:solidFill>
-                  <a:srgbClr val="C9D3F5"/>
+                  <a:srgbClr val="1F2429"/>
                 </a:solidFill>
                 <a:latin typeface="Courier New" pitchFamily="34" charset="0"/>
                 <a:ea typeface="Courier New" pitchFamily="34" charset="-122"/>
@@ -13658,7 +13710,7 @@
             <a:r>
               <a:rPr lang="en-US" sz="1309" dirty="0">
                 <a:solidFill>
-                  <a:srgbClr val="C9D3F5"/>
+                  <a:srgbClr val="1F2429"/>
                 </a:solidFill>
                 <a:latin typeface="Courier New" pitchFamily="34" charset="0"/>
                 <a:ea typeface="Courier New" pitchFamily="34" charset="-122"/>
@@ -13678,7 +13730,7 @@
             <a:r>
               <a:rPr lang="en-US" sz="1309" dirty="0">
                 <a:solidFill>
-                  <a:srgbClr val="C9D3F5"/>
+                  <a:srgbClr val="1F2429"/>
                 </a:solidFill>
                 <a:latin typeface="Courier New" pitchFamily="34" charset="0"/>
                 <a:ea typeface="Courier New" pitchFamily="34" charset="-122"/>
@@ -13899,9 +13951,13 @@
             </a:avLst>
           </a:prstGeom>
           <a:solidFill>
-            <a:srgbClr val="1E1E4C"/>
+            <a:srgbClr val="F7F8F9"/>
           </a:solidFill>
-          <a:ln/>
+          <a:ln w="9525">
+            <a:solidFill>
+              <a:srgbClr val="D0D5DD"/>
+            </a:solidFill>
+          </a:ln>
         </p:spPr>
         <p:txBody>
           <a:bodyPr/>
@@ -13938,7 +13994,7 @@
             <a:r>
               <a:rPr lang="en-US" sz="1400" dirty="0">
                 <a:solidFill>
-                  <a:srgbClr val="C9D3F5"/>
+                  <a:srgbClr val="1F2429"/>
                 </a:solidFill>
                 <a:latin typeface="Courier New" pitchFamily="34" charset="0"/>
                 <a:ea typeface="Courier New" pitchFamily="34" charset="-122"/>
@@ -13958,7 +14014,7 @@
             <a:r>
               <a:rPr lang="en-US" sz="1400" dirty="0">
                 <a:solidFill>
-                  <a:srgbClr val="C9D3F5"/>
+                  <a:srgbClr val="1F2429"/>
                 </a:solidFill>
                 <a:latin typeface="Courier New" pitchFamily="34" charset="0"/>
                 <a:ea typeface="Courier New" pitchFamily="34" charset="-122"/>
@@ -13978,7 +14034,7 @@
             <a:r>
               <a:rPr lang="en-US" sz="1400" dirty="0">
                 <a:solidFill>
-                  <a:srgbClr val="C9D3F5"/>
+                  <a:srgbClr val="1F2429"/>
                 </a:solidFill>
                 <a:latin typeface="Courier New" pitchFamily="34" charset="0"/>
                 <a:ea typeface="Courier New" pitchFamily="34" charset="-122"/>
@@ -13998,7 +14054,7 @@
             <a:r>
               <a:rPr lang="en-US" sz="1400" dirty="0">
                 <a:solidFill>
-                  <a:srgbClr val="C9D3F5"/>
+                  <a:srgbClr val="1F2429"/>
                 </a:solidFill>
                 <a:latin typeface="Courier New" pitchFamily="34" charset="0"/>
                 <a:ea typeface="Courier New" pitchFamily="34" charset="-122"/>
@@ -14018,7 +14074,7 @@
             <a:r>
               <a:rPr lang="en-US" sz="1400" dirty="0">
                 <a:solidFill>
-                  <a:srgbClr val="C9D3F5"/>
+                  <a:srgbClr val="1F2429"/>
                 </a:solidFill>
                 <a:latin typeface="Courier New" pitchFamily="34" charset="0"/>
                 <a:ea typeface="Courier New" pitchFamily="34" charset="-122"/>
@@ -14038,7 +14094,7 @@
             <a:r>
               <a:rPr lang="en-US" sz="1400" dirty="0">
                 <a:solidFill>
-                  <a:srgbClr val="C9D3F5"/>
+                  <a:srgbClr val="1F2429"/>
                 </a:solidFill>
                 <a:latin typeface="Courier New" pitchFamily="34" charset="0"/>
                 <a:ea typeface="Courier New" pitchFamily="34" charset="-122"/>
@@ -14058,7 +14114,7 @@
             <a:r>
               <a:rPr lang="en-US" sz="1400" dirty="0">
                 <a:solidFill>
-                  <a:srgbClr val="C9D3F5"/>
+                  <a:srgbClr val="1F2429"/>
                 </a:solidFill>
                 <a:latin typeface="Courier New" pitchFamily="34" charset="0"/>
                 <a:ea typeface="Courier New" pitchFamily="34" charset="-122"/>
@@ -14078,7 +14134,7 @@
             <a:r>
               <a:rPr lang="en-US" sz="1400" dirty="0">
                 <a:solidFill>
-                  <a:srgbClr val="C9D3F5"/>
+                  <a:srgbClr val="1F2429"/>
                 </a:solidFill>
                 <a:latin typeface="Courier New" pitchFamily="34" charset="0"/>
                 <a:ea typeface="Courier New" pitchFamily="34" charset="-122"/>
@@ -14098,7 +14154,7 @@
             <a:r>
               <a:rPr lang="en-US" sz="1400" dirty="0">
                 <a:solidFill>
-                  <a:srgbClr val="C9D3F5"/>
+                  <a:srgbClr val="1F2429"/>
                 </a:solidFill>
                 <a:latin typeface="Courier New" pitchFamily="34" charset="0"/>
                 <a:ea typeface="Courier New" pitchFamily="34" charset="-122"/>
@@ -14118,7 +14174,7 @@
             <a:r>
               <a:rPr lang="en-US" sz="1400" dirty="0">
                 <a:solidFill>
-                  <a:srgbClr val="C9D3F5"/>
+                  <a:srgbClr val="1F2429"/>
                 </a:solidFill>
                 <a:latin typeface="Courier New" pitchFamily="34" charset="0"/>
                 <a:ea typeface="Courier New" pitchFamily="34" charset="-122"/>
@@ -16655,7 +16711,7 @@
         <p:spPr>
           <a:xfrm>
             <a:off x="640080" y="1965960"/>
-            <a:ext cx="10911535" cy="1554480"/>
+            <a:ext cx="10911535" cy="3657600"/>
           </a:xfrm>
           <a:prstGeom prst="roundRect">
             <a:avLst>
@@ -16686,7 +16742,7 @@
         <p:spPr>
           <a:xfrm>
             <a:off x="868680" y="2103120"/>
-            <a:ext cx="10454335" cy="274320"/>
+            <a:ext cx="10454335" cy="400000"/>
           </a:xfrm>
           <a:prstGeom prst="rect">
             <a:avLst/>
@@ -16702,7 +16758,7 @@
               <a:buNone/>
             </a:pPr>
             <a:r>
-              <a:rPr lang="en-US" sz="1000" b="1" spc="200" kern="0" dirty="0">
+              <a:rPr lang="en-US" sz="1800" b="1" spc="200" kern="0" dirty="0">
                 <a:solidFill>
                   <a:srgbClr val="33459E"/>
                 </a:solidFill>
@@ -16712,7 +16768,7 @@
               </a:rPr>
               <a:t>NOTE</a:t>
             </a:r>
-            <a:endParaRPr lang="en-US" sz="1000" dirty="0"/>
+            <a:endParaRPr lang="en-US" sz="1800" dirty="0"/>
           </a:p>
         </p:txBody>
       </p:sp>
@@ -16724,24 +16780,24 @@
         </p:nvSpPr>
         <p:spPr>
           <a:xfrm>
-            <a:off x="868680" y="2404872"/>
-            <a:ext cx="10454335" cy="960120"/>
-          </a:xfrm>
-          <a:prstGeom prst="rect">
-            <a:avLst/>
-          </a:prstGeom>
-          <a:noFill/>
-          <a:ln/>
-        </p:spPr>
-        <p:txBody>
-          <a:bodyPr wrap="square" lIns="0" tIns="0" rIns="0" bIns="0" rtlCol="0" anchor="t"/>
-          <a:lstStyle/>
-          <a:p>
-            <a:pPr indent="0" marL="0">
-              <a:buNone/>
-            </a:pPr>
-            <a:r>
-              <a:rPr lang="en-US" sz="1250" dirty="0">
+            <a:off x="868680" y="2795960"/>
+            <a:ext cx="10454335" cy="2500000"/>
+          </a:xfrm>
+          <a:prstGeom prst="rect">
+            <a:avLst/>
+          </a:prstGeom>
+          <a:noFill/>
+          <a:ln/>
+        </p:spPr>
+        <p:txBody>
+          <a:bodyPr wrap="square" lIns="0" tIns="0" rIns="0" bIns="0" rtlCol="0" anchor="ctr"/>
+          <a:lstStyle/>
+          <a:p>
+            <a:pPr indent="0" marL="0">
+              <a:buNone/>
+            </a:pPr>
+            <a:r>
+              <a:rPr lang="en-US" sz="2800" dirty="0">
                 <a:solidFill>
                   <a:srgbClr val="26262F"/>
                 </a:solidFill>
@@ -16751,7 +16807,7 @@
               </a:rPr>
               <a:t>PostgreSQL/MySQL are often called SQL databases, after their query language. MongoDB is called a NoSQL database — "not only SQL" — a broad category that includes document, key-value, and other non-relational databases.</a:t>
             </a:r>
-            <a:endParaRPr lang="en-US" sz="1250" dirty="0"/>
+            <a:endParaRPr lang="en-US" sz="2800" dirty="0"/>
           </a:p>
         </p:txBody>
       </p:sp>
